--- a/组会记录/组会1113.pptx
+++ b/组会记录/组会1113.pptx
@@ -218,7 +218,7 @@
           <a:p>
             <a:fld id="{D2A48B96-639E-45A3-A0BA-2464DFDB1FAA}" type="datetimeFigureOut">
               <a:rPr lang="zh-CN" altLang="en-US" smtClean="0"/>
-              <a:t>2025/11/11</a:t>
+              <a:t>2025/11/13</a:t>
             </a:fld>
             <a:endParaRPr lang="zh-CN" altLang="en-US"/>
           </a:p>
@@ -609,7 +609,7 @@
           <a:p>
             <a:fld id="{837840E2-13A5-46A9-A265-C77FF1EECC77}" type="datetimeFigureOut">
               <a:rPr lang="zh-CN" altLang="en-US" smtClean="0"/>
-              <a:t>2025/11/11</a:t>
+              <a:t>2025/11/13</a:t>
             </a:fld>
             <a:endParaRPr lang="zh-CN" altLang="en-US"/>
           </a:p>
@@ -772,7 +772,7 @@
           <a:p>
             <a:fld id="{837840E2-13A5-46A9-A265-C77FF1EECC77}" type="datetimeFigureOut">
               <a:rPr lang="zh-CN" altLang="en-US" smtClean="0"/>
-              <a:t>2025/11/11</a:t>
+              <a:t>2025/11/13</a:t>
             </a:fld>
             <a:endParaRPr lang="zh-CN" altLang="en-US"/>
           </a:p>
@@ -945,7 +945,7 @@
           <a:p>
             <a:fld id="{837840E2-13A5-46A9-A265-C77FF1EECC77}" type="datetimeFigureOut">
               <a:rPr lang="zh-CN" altLang="en-US" smtClean="0"/>
-              <a:t>2025/11/11</a:t>
+              <a:t>2025/11/13</a:t>
             </a:fld>
             <a:endParaRPr lang="zh-CN" altLang="en-US"/>
           </a:p>
@@ -1108,7 +1108,7 @@
           <a:p>
             <a:fld id="{837840E2-13A5-46A9-A265-C77FF1EECC77}" type="datetimeFigureOut">
               <a:rPr lang="zh-CN" altLang="en-US" smtClean="0"/>
-              <a:t>2025/11/11</a:t>
+              <a:t>2025/11/13</a:t>
             </a:fld>
             <a:endParaRPr lang="zh-CN" altLang="en-US"/>
           </a:p>
@@ -1348,7 +1348,7 @@
           <a:p>
             <a:fld id="{837840E2-13A5-46A9-A265-C77FF1EECC77}" type="datetimeFigureOut">
               <a:rPr lang="zh-CN" altLang="en-US" smtClean="0"/>
-              <a:t>2025/11/11</a:t>
+              <a:t>2025/11/13</a:t>
             </a:fld>
             <a:endParaRPr lang="zh-CN" altLang="en-US"/>
           </a:p>
@@ -1572,7 +1572,7 @@
           <a:p>
             <a:fld id="{837840E2-13A5-46A9-A265-C77FF1EECC77}" type="datetimeFigureOut">
               <a:rPr lang="zh-CN" altLang="en-US" smtClean="0"/>
-              <a:t>2025/11/11</a:t>
+              <a:t>2025/11/13</a:t>
             </a:fld>
             <a:endParaRPr lang="zh-CN" altLang="en-US"/>
           </a:p>
@@ -1931,7 +1931,7 @@
           <a:p>
             <a:fld id="{837840E2-13A5-46A9-A265-C77FF1EECC77}" type="datetimeFigureOut">
               <a:rPr lang="zh-CN" altLang="en-US" smtClean="0"/>
-              <a:t>2025/11/11</a:t>
+              <a:t>2025/11/13</a:t>
             </a:fld>
             <a:endParaRPr lang="zh-CN" altLang="en-US"/>
           </a:p>
@@ -2043,7 +2043,7 @@
           <a:p>
             <a:fld id="{837840E2-13A5-46A9-A265-C77FF1EECC77}" type="datetimeFigureOut">
               <a:rPr lang="zh-CN" altLang="en-US" smtClean="0"/>
-              <a:t>2025/11/11</a:t>
+              <a:t>2025/11/13</a:t>
             </a:fld>
             <a:endParaRPr lang="zh-CN" altLang="en-US"/>
           </a:p>
@@ -2133,7 +2133,7 @@
           <a:p>
             <a:fld id="{837840E2-13A5-46A9-A265-C77FF1EECC77}" type="datetimeFigureOut">
               <a:rPr lang="zh-CN" altLang="en-US" smtClean="0"/>
-              <a:t>2025/11/11</a:t>
+              <a:t>2025/11/13</a:t>
             </a:fld>
             <a:endParaRPr lang="zh-CN" altLang="en-US"/>
           </a:p>
@@ -2403,7 +2403,7 @@
           <a:p>
             <a:fld id="{837840E2-13A5-46A9-A265-C77FF1EECC77}" type="datetimeFigureOut">
               <a:rPr lang="zh-CN" altLang="en-US" smtClean="0"/>
-              <a:t>2025/11/11</a:t>
+              <a:t>2025/11/13</a:t>
             </a:fld>
             <a:endParaRPr lang="zh-CN" altLang="en-US"/>
           </a:p>
@@ -2650,7 +2650,7 @@
           <a:p>
             <a:fld id="{837840E2-13A5-46A9-A265-C77FF1EECC77}" type="datetimeFigureOut">
               <a:rPr lang="zh-CN" altLang="en-US" smtClean="0"/>
-              <a:t>2025/11/11</a:t>
+              <a:t>2025/11/13</a:t>
             </a:fld>
             <a:endParaRPr lang="zh-CN" altLang="en-US"/>
           </a:p>
@@ -2856,7 +2856,7 @@
           <a:p>
             <a:fld id="{837840E2-13A5-46A9-A265-C77FF1EECC77}" type="datetimeFigureOut">
               <a:rPr lang="zh-CN" altLang="en-US" smtClean="0"/>
-              <a:t>2025/11/11</a:t>
+              <a:t>2025/11/13</a:t>
             </a:fld>
             <a:endParaRPr lang="zh-CN" altLang="en-US"/>
           </a:p>

--- a/组会记录/组会1113.pptx
+++ b/组会记录/组会1113.pptx
@@ -5844,14 +5844,14 @@
             </p:custDataLst>
             <p:extLst>
               <p:ext uri="{D42A27DB-BD31-4B8C-83A1-F6EECF244321}">
-                <p14:modId xmlns:p14="http://schemas.microsoft.com/office/powerpoint/2010/main" val="2325797622"/>
+                <p14:modId xmlns:p14="http://schemas.microsoft.com/office/powerpoint/2010/main" val="3979388269"/>
               </p:ext>
             </p:extLst>
           </p:nvPr>
         </p:nvGraphicFramePr>
         <p:xfrm>
           <a:off x="190500" y="1090295"/>
-          <a:ext cx="11628755" cy="5537200"/>
+          <a:ext cx="11628755" cy="5431965"/>
         </p:xfrm>
         <a:graphic>
           <a:graphicData uri="http://schemas.openxmlformats.org/drawingml/2006/table">
@@ -5875,7 +5875,7 @@
                   </a:extLst>
                 </a:gridCol>
               </a:tblGrid>
-              <a:tr h="1606550">
+              <a:tr h="2031277">
                 <a:tc>
                   <a:txBody>
                     <a:bodyPr/>
@@ -5947,13 +5947,212 @@
                     <a:bodyPr/>
                     <a:lstStyle/>
                     <a:p>
-                      <a:pPr marL="228600" indent="-228600" algn="l">
+                      <a:pPr marL="342900" indent="-342900" algn="l">
                         <a:lnSpc>
                           <a:spcPct val="150000"/>
                         </a:lnSpc>
                         <a:buAutoNum type="arabicPeriod"/>
                       </a:pPr>
-                      <a:endParaRPr lang="zh-CN" altLang="en-US" sz="1600" b="0" dirty="0">
+                      <a:r>
+                        <a:rPr lang="zh-CN" altLang="en-US" sz="1600" b="0" dirty="0">
+                          <a:solidFill>
+                            <a:schemeClr val="tx1"/>
+                          </a:solidFill>
+                        </a:rPr>
+                        <a:t>优化</a:t>
+                      </a:r>
+                      <a:r>
+                        <a:rPr lang="en-US" altLang="zh-CN" sz="1600" b="0" dirty="0">
+                          <a:solidFill>
+                            <a:schemeClr val="tx1"/>
+                          </a:solidFill>
+                        </a:rPr>
+                        <a:t>cot</a:t>
+                      </a:r>
+                      <a:r>
+                        <a:rPr lang="zh-CN" altLang="en-US" sz="1600" b="0" dirty="0">
+                          <a:solidFill>
+                            <a:schemeClr val="tx1"/>
+                          </a:solidFill>
+                        </a:rPr>
+                        <a:t>语言结构，做了过长循环处理，做了中英可选切换</a:t>
+                      </a:r>
+                      <a:endParaRPr lang="en-US" altLang="zh-CN" sz="1600" b="0" dirty="0">
+                        <a:solidFill>
+                          <a:schemeClr val="tx1"/>
+                        </a:solidFill>
+                      </a:endParaRPr>
+                    </a:p>
+                    <a:p>
+                      <a:pPr marL="342900" indent="-342900" algn="l">
+                        <a:lnSpc>
+                          <a:spcPct val="150000"/>
+                        </a:lnSpc>
+                        <a:buAutoNum type="arabicPeriod"/>
+                      </a:pPr>
+                      <a:r>
+                        <a:rPr lang="zh-CN" altLang="en-US" sz="1600" b="0" dirty="0">
+                          <a:solidFill>
+                            <a:schemeClr val="tx1"/>
+                          </a:solidFill>
+                        </a:rPr>
+                        <a:t>成功重构并接入了目前的</a:t>
+                      </a:r>
+                      <a:r>
+                        <a:rPr lang="en-US" altLang="zh-CN" sz="1600" b="0" dirty="0">
+                          <a:solidFill>
+                            <a:schemeClr val="tx1"/>
+                          </a:solidFill>
+                        </a:rPr>
+                        <a:t>cot</a:t>
+                      </a:r>
+                      <a:r>
+                        <a:rPr lang="zh-CN" altLang="en-US" sz="1600" b="0" dirty="0">
+                          <a:solidFill>
+                            <a:schemeClr val="tx1"/>
+                          </a:solidFill>
+                        </a:rPr>
+                        <a:t>生成框架</a:t>
+                      </a:r>
+                      <a:endParaRPr lang="en-US" altLang="zh-CN" sz="1600" b="0" dirty="0">
+                        <a:solidFill>
+                          <a:schemeClr val="tx1"/>
+                        </a:solidFill>
+                      </a:endParaRPr>
+                    </a:p>
+                    <a:p>
+                      <a:pPr marL="342900" indent="-342900" algn="l">
+                        <a:lnSpc>
+                          <a:spcPct val="150000"/>
+                        </a:lnSpc>
+                        <a:buAutoNum type="arabicPeriod"/>
+                      </a:pPr>
+                      <a:r>
+                        <a:rPr lang="zh-CN" altLang="en-US" sz="1600" b="0" dirty="0">
+                          <a:solidFill>
+                            <a:schemeClr val="tx1"/>
+                          </a:solidFill>
+                        </a:rPr>
+                        <a:t>顺利生产了</a:t>
+                      </a:r>
+                      <a:r>
+                        <a:rPr lang="en-US" altLang="zh-CN" sz="1600" b="0" dirty="0">
+                          <a:solidFill>
+                            <a:schemeClr val="tx1"/>
+                          </a:solidFill>
+                        </a:rPr>
+                        <a:t>500</a:t>
+                      </a:r>
+                      <a:r>
+                        <a:rPr lang="zh-CN" altLang="en-US" sz="1600" b="0" dirty="0">
+                          <a:solidFill>
+                            <a:schemeClr val="tx1"/>
+                          </a:solidFill>
+                        </a:rPr>
+                        <a:t>个新的带</a:t>
+                      </a:r>
+                      <a:r>
+                        <a:rPr lang="en-US" altLang="zh-CN" sz="1600" b="0" dirty="0">
+                          <a:solidFill>
+                            <a:schemeClr val="tx1"/>
+                          </a:solidFill>
+                        </a:rPr>
+                        <a:t>cot</a:t>
+                      </a:r>
+                      <a:r>
+                        <a:rPr lang="zh-CN" altLang="en-US" sz="1600" b="0" dirty="0">
+                          <a:solidFill>
+                            <a:schemeClr val="tx1"/>
+                          </a:solidFill>
+                        </a:rPr>
+                        <a:t>的</a:t>
+                      </a:r>
+                      <a:r>
+                        <a:rPr lang="en-US" altLang="zh-CN" sz="1600" b="0" dirty="0">
+                          <a:solidFill>
+                            <a:schemeClr val="tx1"/>
+                          </a:solidFill>
+                        </a:rPr>
+                        <a:t>python</a:t>
+                      </a:r>
+                      <a:r>
+                        <a:rPr lang="zh-CN" altLang="en-US" sz="1600" b="0" dirty="0">
+                          <a:solidFill>
+                            <a:schemeClr val="tx1"/>
+                          </a:solidFill>
+                        </a:rPr>
+                        <a:t>数据集</a:t>
+                      </a:r>
+                      <a:endParaRPr lang="en-US" altLang="zh-CN" sz="1600" b="0" dirty="0">
+                        <a:solidFill>
+                          <a:schemeClr val="tx1"/>
+                        </a:solidFill>
+                      </a:endParaRPr>
+                    </a:p>
+                    <a:p>
+                      <a:pPr marL="342900" indent="-342900" algn="l">
+                        <a:lnSpc>
+                          <a:spcPct val="150000"/>
+                        </a:lnSpc>
+                        <a:buAutoNum type="arabicPeriod"/>
+                      </a:pPr>
+                      <a:r>
+                        <a:rPr lang="zh-CN" altLang="en-US" sz="1600" b="0" dirty="0">
+                          <a:solidFill>
+                            <a:schemeClr val="tx1"/>
+                          </a:solidFill>
+                        </a:rPr>
+                        <a:t>尝试在独立</a:t>
+                      </a:r>
+                      <a:r>
+                        <a:rPr lang="en-US" altLang="zh-CN" sz="1600" b="0" dirty="0">
+                          <a:solidFill>
+                            <a:schemeClr val="tx1"/>
+                          </a:solidFill>
+                        </a:rPr>
+                        <a:t>cot</a:t>
+                      </a:r>
+                      <a:r>
+                        <a:rPr lang="zh-CN" altLang="en-US" sz="1600" b="0" dirty="0">
+                          <a:solidFill>
+                            <a:schemeClr val="tx1"/>
+                          </a:solidFill>
+                        </a:rPr>
+                        <a:t>项目里实现了</a:t>
+                      </a:r>
+                      <a:r>
+                        <a:rPr lang="en-US" altLang="zh-CN" sz="1600" b="0" dirty="0">
+                          <a:solidFill>
+                            <a:schemeClr val="tx1"/>
+                          </a:solidFill>
+                        </a:rPr>
+                        <a:t>ai+</a:t>
+                      </a:r>
+                      <a:r>
+                        <a:rPr lang="zh-CN" altLang="en-US" sz="1600" b="0" dirty="0">
+                          <a:solidFill>
+                            <a:schemeClr val="tx1"/>
+                          </a:solidFill>
+                        </a:rPr>
+                        <a:t>倒叙</a:t>
+                      </a:r>
+                      <a:r>
+                        <a:rPr lang="en-US" altLang="zh-CN" sz="1600" b="0" dirty="0">
+                          <a:solidFill>
+                            <a:schemeClr val="tx1"/>
+                          </a:solidFill>
+                        </a:rPr>
+                        <a:t>cot</a:t>
+                      </a:r>
+                      <a:r>
+                        <a:rPr lang="zh-CN" altLang="en-US" sz="1600" b="0" dirty="0">
+                          <a:solidFill>
+                            <a:schemeClr val="tx1"/>
+                          </a:solidFill>
+                        </a:rPr>
+                        <a:t>的能力</a:t>
+                      </a:r>
+                      <a:endParaRPr lang="en-US" altLang="zh-CN" sz="1600" b="0" dirty="0">
                         <a:solidFill>
                           <a:schemeClr val="tx1"/>
                         </a:solidFill>
@@ -6016,7 +6215,7 @@
                   </a:ext>
                 </a:extLst>
               </a:tr>
-              <a:tr h="1406525">
+              <a:tr h="876563">
                 <a:tc>
                   <a:txBody>
                     <a:bodyPr/>
@@ -6088,13 +6287,53 @@
                     <a:bodyPr/>
                     <a:lstStyle/>
                     <a:p>
-                      <a:pPr indent="0" algn="l">
+                      <a:pPr marL="342900" indent="-342900" algn="l">
                         <a:lnSpc>
                           <a:spcPct val="150000"/>
                         </a:lnSpc>
-                        <a:buNone/>
+                        <a:buAutoNum type="arabicPeriod"/>
                       </a:pPr>
-                      <a:endParaRPr lang="zh-CN" altLang="en-US" sz="1600" b="0" dirty="0">
+                      <a:r>
+                        <a:rPr lang="zh-CN" altLang="en-US" sz="1600" b="0" dirty="0">
+                          <a:solidFill>
+                            <a:schemeClr val="tx1"/>
+                          </a:solidFill>
+                        </a:rPr>
+                        <a:t>在复杂案例中，暴露出了很多</a:t>
+                      </a:r>
+                      <a:r>
+                        <a:rPr lang="en-US" altLang="zh-CN" sz="1600" b="0" dirty="0">
+                          <a:solidFill>
+                            <a:schemeClr val="tx1"/>
+                          </a:solidFill>
+                        </a:rPr>
+                        <a:t>cot</a:t>
+                      </a:r>
+                      <a:r>
+                        <a:rPr lang="zh-CN" altLang="en-US" sz="1600" b="0" dirty="0">
+                          <a:solidFill>
+                            <a:schemeClr val="tx1"/>
+                          </a:solidFill>
+                        </a:rPr>
+                        <a:t>生成框架的一些细节</a:t>
+                      </a:r>
+                      <a:r>
+                        <a:rPr lang="en-US" altLang="zh-CN" sz="1600" b="0" dirty="0">
+                          <a:solidFill>
+                            <a:schemeClr val="tx1"/>
+                          </a:solidFill>
+                        </a:rPr>
+                        <a:t>bug</a:t>
+                      </a:r>
+                      <a:r>
+                        <a:rPr lang="zh-CN" altLang="en-US" sz="1600" b="0" dirty="0">
+                          <a:solidFill>
+                            <a:schemeClr val="tx1"/>
+                          </a:solidFill>
+                        </a:rPr>
+                        <a:t>，预期这周再逐个案例看来进行优化</a:t>
+                      </a:r>
+                      <a:endParaRPr lang="en-US" altLang="zh-CN" sz="1600" b="0" dirty="0">
                         <a:solidFill>
                           <a:schemeClr val="tx1"/>
                         </a:solidFill>

--- a/组会记录/组会1113.pptx
+++ b/组会记录/组会1113.pptx
@@ -5,31 +5,32 @@
     <p:sldMasterId id="2147483648" r:id="rId1"/>
   </p:sldMasterIdLst>
   <p:notesMasterIdLst>
-    <p:notesMasterId r:id="rId20"/>
+    <p:notesMasterId r:id="rId21"/>
   </p:notesMasterIdLst>
   <p:sldIdLst>
     <p:sldId id="257" r:id="rId3"/>
-    <p:sldId id="327" r:id="rId4"/>
-    <p:sldId id="346" r:id="rId5"/>
-    <p:sldId id="347" r:id="rId6"/>
-    <p:sldId id="348" r:id="rId7"/>
-    <p:sldId id="349" r:id="rId8"/>
-    <p:sldId id="350" r:id="rId9"/>
-    <p:sldId id="351" r:id="rId10"/>
-    <p:sldId id="352" r:id="rId11"/>
-    <p:sldId id="353" r:id="rId12"/>
-    <p:sldId id="360" r:id="rId13"/>
-    <p:sldId id="358" r:id="rId14"/>
-    <p:sldId id="357" r:id="rId15"/>
-    <p:sldId id="361" r:id="rId16"/>
-    <p:sldId id="354" r:id="rId17"/>
-    <p:sldId id="355" r:id="rId18"/>
-    <p:sldId id="356" r:id="rId19"/>
+    <p:sldId id="367" r:id="rId4"/>
+    <p:sldId id="327" r:id="rId5"/>
+    <p:sldId id="346" r:id="rId6"/>
+    <p:sldId id="347" r:id="rId7"/>
+    <p:sldId id="348" r:id="rId8"/>
+    <p:sldId id="349" r:id="rId9"/>
+    <p:sldId id="350" r:id="rId10"/>
+    <p:sldId id="351" r:id="rId11"/>
+    <p:sldId id="352" r:id="rId12"/>
+    <p:sldId id="353" r:id="rId13"/>
+    <p:sldId id="360" r:id="rId14"/>
+    <p:sldId id="358" r:id="rId15"/>
+    <p:sldId id="357" r:id="rId16"/>
+    <p:sldId id="361" r:id="rId17"/>
+    <p:sldId id="354" r:id="rId18"/>
+    <p:sldId id="355" r:id="rId19"/>
+    <p:sldId id="356" r:id="rId20"/>
   </p:sldIdLst>
   <p:sldSz cx="12192000" cy="6858000"/>
   <p:notesSz cx="6858000" cy="9144000"/>
   <p:custDataLst>
-    <p:tags r:id="rId24"/>
+    <p:tags r:id="rId25"/>
   </p:custDataLst>
   <p:defaultTextStyle>
     <a:defPPr>
@@ -3633,43 +3634,49 @@
             <a:pPr algn="l"/>
             <a:r>
               <a:rPr lang="zh-CN" altLang="en-US" sz="2400" dirty="0"/>
-              <a:t>进展分享四：</a:t>
+              <a:t>进展分享三：</a:t>
+            </a:r>
+            <a:r>
+              <a:rPr lang="zh-CN" altLang="en-US" sz="2400" dirty="0">
+                <a:sym typeface="+mn-ea"/>
+              </a:rPr>
+              <a:t>生产了</a:t>
             </a:r>
             <a:r>
               <a:rPr lang="en-US" altLang="zh-CN" sz="2400" dirty="0">
                 <a:sym typeface="+mn-ea"/>
               </a:rPr>
-              <a:t>AI+</a:t>
+              <a:t>500</a:t>
             </a:r>
             <a:r>
               <a:rPr lang="zh-CN" altLang="en-US" sz="2400" dirty="0">
                 <a:sym typeface="+mn-ea"/>
               </a:rPr>
-              <a:t>正序</a:t>
+              <a:t>个新的粗糙的带</a:t>
             </a:r>
             <a:r>
               <a:rPr lang="en-US" altLang="zh-CN" sz="2400" dirty="0">
                 <a:sym typeface="+mn-ea"/>
               </a:rPr>
-              <a:t>cot——&gt;</a:t>
+              <a:t>cot</a:t>
             </a:r>
             <a:r>
               <a:rPr lang="zh-CN" altLang="en-US" sz="2400" dirty="0">
                 <a:sym typeface="+mn-ea"/>
               </a:rPr>
-              <a:t>得到倒叙</a:t>
+              <a:t>的</a:t>
             </a:r>
             <a:r>
               <a:rPr lang="en-US" altLang="zh-CN" sz="2400" dirty="0">
                 <a:sym typeface="+mn-ea"/>
               </a:rPr>
-              <a:t>cot </a:t>
+              <a:t>python</a:t>
             </a:r>
             <a:r>
               <a:rPr lang="zh-CN" altLang="en-US" sz="2400" dirty="0">
                 <a:sym typeface="+mn-ea"/>
               </a:rPr>
-              <a:t>探索</a:t>
+              <a:t>数据集</a:t>
             </a:r>
             <a:endParaRPr lang="zh-CN" altLang="en-US" sz="2400" dirty="0">
               <a:sym typeface="+mn-ea"/>
@@ -3677,238 +3684,9 @@
           </a:p>
         </p:txBody>
       </p:sp>
-      <p:sp>
-        <p:nvSpPr>
-          <p:cNvPr id="5" name="文本框 4"/>
-          <p:cNvSpPr txBox="1"/>
-          <p:nvPr/>
-        </p:nvSpPr>
-        <p:spPr>
-          <a:xfrm>
-            <a:off x="344805" y="1064260"/>
-            <a:ext cx="11449050" cy="2861310"/>
-          </a:xfrm>
-          <a:prstGeom prst="rect">
-            <a:avLst/>
-          </a:prstGeom>
-        </p:spPr>
-        <p:txBody>
-          <a:bodyPr wrap="square">
-            <a:spAutoFit/>
-          </a:bodyPr>
-          <a:p>
-            <a:pPr>
-              <a:lnSpc>
-                <a:spcPct val="200000"/>
-              </a:lnSpc>
-            </a:pPr>
-            <a:r>
-              <a:rPr lang="zh-CN" altLang="en-US"/>
-              <a:t>思路：将去除答案的正序</a:t>
-            </a:r>
-            <a:r>
-              <a:rPr lang="en-US" altLang="zh-CN"/>
-              <a:t>cot</a:t>
-            </a:r>
-            <a:r>
-              <a:rPr lang="zh-CN" altLang="en-US"/>
-              <a:t>给</a:t>
-            </a:r>
-            <a:r>
-              <a:rPr lang="en-US" altLang="zh-CN"/>
-              <a:t>ai</a:t>
-            </a:r>
-            <a:r>
-              <a:rPr lang="zh-CN" altLang="en-US"/>
-              <a:t>，</a:t>
-            </a:r>
-            <a:r>
-              <a:rPr lang="zh-CN" altLang="en-US"/>
-              <a:t>并给</a:t>
-            </a:r>
-            <a:r>
-              <a:rPr lang="en-US" altLang="zh-CN"/>
-              <a:t>AI</a:t>
-            </a:r>
-            <a:r>
-              <a:rPr lang="zh-CN" altLang="en-US"/>
-              <a:t>合适的</a:t>
-            </a:r>
-            <a:r>
-              <a:rPr lang="en-US" altLang="zh-CN"/>
-              <a:t>prompt</a:t>
-            </a:r>
-            <a:r>
-              <a:rPr lang="zh-CN" altLang="en-US"/>
-              <a:t>来做思维引导</a:t>
-            </a:r>
-            <a:r>
-              <a:rPr lang="en-US" altLang="zh-CN"/>
-              <a:t>↓</a:t>
-            </a:r>
-            <a:endParaRPr lang="zh-CN" altLang="en-US"/>
-          </a:p>
-          <a:p>
-            <a:pPr>
-              <a:lnSpc>
-                <a:spcPct val="200000"/>
-              </a:lnSpc>
-            </a:pPr>
-            <a:r>
-              <a:rPr lang="zh-CN" altLang="en-US"/>
-              <a:t>【</a:t>
-            </a:r>
-            <a:r>
-              <a:rPr lang="en-US" altLang="zh-CN"/>
-              <a:t>Step1</a:t>
-            </a:r>
-            <a:r>
-              <a:rPr lang="zh-CN" altLang="en-US"/>
-              <a:t>】</a:t>
-            </a:r>
-            <a:r>
-              <a:rPr lang="zh-CN" altLang="en-US" b="1">
-                <a:effectLst>
-                  <a:outerShdw blurRad="38100" dist="38100" dir="2700000" algn="tl">
-                    <a:srgbClr val="000000">
-                      <a:alpha val="43137"/>
-                    </a:srgbClr>
-                  </a:outerShdw>
-                </a:effectLst>
-              </a:rPr>
-              <a:t>依赖识别</a:t>
-            </a:r>
-            <a:r>
-              <a:rPr lang="zh-CN" altLang="en-US"/>
-              <a:t>：从目标行出发，识别目标变量依赖哪些其他变量或表达式</a:t>
-            </a:r>
-            <a:endParaRPr lang="zh-CN" altLang="en-US"/>
-          </a:p>
-          <a:p>
-            <a:pPr>
-              <a:lnSpc>
-                <a:spcPct val="200000"/>
-              </a:lnSpc>
-            </a:pPr>
-            <a:r>
-              <a:rPr lang="zh-CN" altLang="en-US"/>
-              <a:t>【</a:t>
-            </a:r>
-            <a:r>
-              <a:rPr lang="en-US" altLang="zh-CN"/>
-              <a:t>Step2</a:t>
-            </a:r>
-            <a:r>
-              <a:rPr lang="zh-CN" altLang="en-US"/>
-              <a:t>】</a:t>
-            </a:r>
-            <a:r>
-              <a:rPr lang="zh-CN" altLang="en-US" b="1">
-                <a:effectLst>
-                  <a:outerShdw blurRad="38100" dist="38100" dir="2700000" algn="tl">
-                    <a:srgbClr val="000000">
-                      <a:alpha val="43137"/>
-                    </a:srgbClr>
-                  </a:outerShdw>
-                </a:effectLst>
-              </a:rPr>
-              <a:t>逆向追溯</a:t>
-            </a:r>
-            <a:r>
-              <a:rPr lang="zh-CN" altLang="en-US"/>
-              <a:t>：递归地向前查找每个依赖变量的最后赋值位置，直到找到所有常量或初始值</a:t>
-            </a:r>
-            <a:endParaRPr lang="zh-CN" altLang="en-US"/>
-          </a:p>
-          <a:p>
-            <a:pPr>
-              <a:lnSpc>
-                <a:spcPct val="200000"/>
-              </a:lnSpc>
-            </a:pPr>
-            <a:r>
-              <a:rPr lang="zh-CN" altLang="en-US"/>
-              <a:t>【</a:t>
-            </a:r>
-            <a:r>
-              <a:rPr lang="en-US" altLang="zh-CN"/>
-              <a:t>Step3</a:t>
-            </a:r>
-            <a:r>
-              <a:rPr lang="zh-CN" altLang="en-US"/>
-              <a:t>】</a:t>
-            </a:r>
-            <a:r>
-              <a:rPr lang="zh-CN" altLang="en-US" b="1">
-                <a:effectLst>
-                  <a:outerShdw blurRad="38100" dist="38100" dir="2700000" algn="tl">
-                    <a:srgbClr val="000000">
-                      <a:alpha val="43137"/>
-                    </a:srgbClr>
-                  </a:outerShdw>
-                </a:effectLst>
-              </a:rPr>
-              <a:t>正向计算</a:t>
-            </a:r>
-            <a:r>
-              <a:rPr lang="zh-CN" altLang="en-US"/>
-              <a:t>：依照逆向追溯的思维链快速正向计算确保</a:t>
-            </a:r>
-            <a:r>
-              <a:rPr lang="zh-CN" altLang="en-US"/>
-              <a:t>正确</a:t>
-            </a:r>
-            <a:endParaRPr lang="zh-CN" altLang="en-US"/>
-          </a:p>
-          <a:p>
-            <a:pPr>
-              <a:lnSpc>
-                <a:spcPct val="200000"/>
-              </a:lnSpc>
-            </a:pPr>
-            <a:r>
-              <a:rPr lang="zh-CN" altLang="en-US"/>
-              <a:t>【</a:t>
-            </a:r>
-            <a:r>
-              <a:rPr lang="en-US" altLang="zh-CN"/>
-              <a:t>Step4</a:t>
-            </a:r>
-            <a:r>
-              <a:rPr lang="zh-CN" altLang="en-US"/>
-              <a:t>】</a:t>
-            </a:r>
-            <a:r>
-              <a:rPr lang="zh-CN" altLang="en-US" b="1">
-                <a:effectLst>
-                  <a:outerShdw blurRad="38100" dist="38100" dir="2700000" algn="tl">
-                    <a:srgbClr val="000000">
-                      <a:alpha val="43137"/>
-                    </a:srgbClr>
-                  </a:outerShdw>
-                </a:effectLst>
-              </a:rPr>
-              <a:t>约束输出格式</a:t>
-            </a:r>
-            <a:r>
-              <a:rPr lang="zh-CN" altLang="en-US"/>
-              <a:t>：通过明确的格式模板和精简要求，引导</a:t>
-            </a:r>
-            <a:r>
-              <a:rPr lang="en-US" altLang="zh-CN"/>
-              <a:t>AI</a:t>
-            </a:r>
-            <a:r>
-              <a:rPr lang="zh-CN" altLang="en-US"/>
-              <a:t>按倒序思维生成推理过程而非直接给答案</a:t>
-            </a:r>
-            <a:endParaRPr lang="zh-CN" altLang="en-US"/>
-          </a:p>
-        </p:txBody>
-      </p:sp>
       <p:pic>
         <p:nvPicPr>
-          <p:cNvPr id="6" name="图片 5"/>
+          <p:cNvPr id="3" name="图片 2"/>
           <p:cNvPicPr>
             <a:picLocks noChangeAspect="1"/>
           </p:cNvPicPr>
@@ -3922,21 +3700,94 @@
         </p:blipFill>
         <p:spPr>
           <a:xfrm>
-            <a:off x="407035" y="4312285"/>
-            <a:ext cx="4362450" cy="2276475"/>
+            <a:off x="274320" y="807720"/>
+            <a:ext cx="5723255" cy="5958205"/>
           </a:xfrm>
           <a:prstGeom prst="rect">
             <a:avLst/>
           </a:prstGeom>
-          <a:ln w="19050">
-            <a:solidFill>
-              <a:schemeClr val="accent6">
-                <a:lumMod val="75000"/>
-              </a:schemeClr>
-            </a:solidFill>
-          </a:ln>
         </p:spPr>
       </p:pic>
+      <p:pic>
+        <p:nvPicPr>
+          <p:cNvPr id="4" name="图片 3"/>
+          <p:cNvPicPr>
+            <a:picLocks noChangeAspect="1"/>
+          </p:cNvPicPr>
+          <p:nvPr/>
+        </p:nvPicPr>
+        <p:blipFill>
+          <a:blip r:embed="rId2"/>
+          <a:stretch>
+            <a:fillRect/>
+          </a:stretch>
+        </p:blipFill>
+        <p:spPr>
+          <a:xfrm>
+            <a:off x="6093460" y="807720"/>
+            <a:ext cx="5964555" cy="4185920"/>
+          </a:xfrm>
+          <a:prstGeom prst="rect">
+            <a:avLst/>
+          </a:prstGeom>
+        </p:spPr>
+      </p:pic>
+      <p:sp>
+        <p:nvSpPr>
+          <p:cNvPr id="9" name="文本框 8"/>
+          <p:cNvSpPr txBox="1"/>
+          <p:nvPr/>
+        </p:nvSpPr>
+        <p:spPr>
+          <a:xfrm>
+            <a:off x="6093460" y="5288280"/>
+            <a:ext cx="5812790" cy="1198880"/>
+          </a:xfrm>
+          <a:prstGeom prst="rect">
+            <a:avLst/>
+          </a:prstGeom>
+          <a:noFill/>
+        </p:spPr>
+        <p:txBody>
+          <a:bodyPr wrap="square" rtlCol="0" anchor="t">
+            <a:spAutoFit/>
+          </a:bodyPr>
+          <a:p>
+            <a:pPr>
+              <a:lnSpc>
+                <a:spcPct val="200000"/>
+              </a:lnSpc>
+            </a:pPr>
+            <a:r>
+              <a:rPr lang="zh-CN" altLang="en-US">
+                <a:sym typeface="+mn-ea"/>
+              </a:rPr>
+              <a:t>独立框架生成的</a:t>
+            </a:r>
+            <a:r>
+              <a:rPr lang="en-US" altLang="zh-CN">
+                <a:sym typeface="+mn-ea"/>
+              </a:rPr>
+              <a:t>cot</a:t>
+            </a:r>
+            <a:r>
+              <a:rPr lang="zh-CN" altLang="en-US">
+                <a:sym typeface="+mn-ea"/>
+              </a:rPr>
+              <a:t>，基本符合预期，后续会把迁移工作再重</a:t>
+            </a:r>
+            <a:r>
+              <a:rPr lang="zh-CN" altLang="en-US">
+                <a:sym typeface="+mn-ea"/>
+              </a:rPr>
+              <a:t>优化</a:t>
+            </a:r>
+            <a:endParaRPr lang="zh-CN" altLang="en-US">
+              <a:sym typeface="+mn-ea"/>
+            </a:endParaRPr>
+          </a:p>
+        </p:txBody>
+      </p:sp>
     </p:spTree>
   </p:cSld>
   <p:clrMapOvr>
@@ -4031,9 +3882,238 @@
           </a:p>
         </p:txBody>
       </p:sp>
+      <p:sp>
+        <p:nvSpPr>
+          <p:cNvPr id="5" name="文本框 4"/>
+          <p:cNvSpPr txBox="1"/>
+          <p:nvPr/>
+        </p:nvSpPr>
+        <p:spPr>
+          <a:xfrm>
+            <a:off x="344805" y="1064260"/>
+            <a:ext cx="11449050" cy="2861310"/>
+          </a:xfrm>
+          <a:prstGeom prst="rect">
+            <a:avLst/>
+          </a:prstGeom>
+        </p:spPr>
+        <p:txBody>
+          <a:bodyPr wrap="square">
+            <a:spAutoFit/>
+          </a:bodyPr>
+          <a:p>
+            <a:pPr>
+              <a:lnSpc>
+                <a:spcPct val="200000"/>
+              </a:lnSpc>
+            </a:pPr>
+            <a:r>
+              <a:rPr lang="zh-CN" altLang="en-US"/>
+              <a:t>思路：将去除答案的正序</a:t>
+            </a:r>
+            <a:r>
+              <a:rPr lang="en-US" altLang="zh-CN"/>
+              <a:t>cot</a:t>
+            </a:r>
+            <a:r>
+              <a:rPr lang="zh-CN" altLang="en-US"/>
+              <a:t>给</a:t>
+            </a:r>
+            <a:r>
+              <a:rPr lang="en-US" altLang="zh-CN"/>
+              <a:t>ai</a:t>
+            </a:r>
+            <a:r>
+              <a:rPr lang="zh-CN" altLang="en-US"/>
+              <a:t>，</a:t>
+            </a:r>
+            <a:r>
+              <a:rPr lang="zh-CN" altLang="en-US"/>
+              <a:t>并给</a:t>
+            </a:r>
+            <a:r>
+              <a:rPr lang="en-US" altLang="zh-CN"/>
+              <a:t>AI</a:t>
+            </a:r>
+            <a:r>
+              <a:rPr lang="zh-CN" altLang="en-US"/>
+              <a:t>合适的</a:t>
+            </a:r>
+            <a:r>
+              <a:rPr lang="en-US" altLang="zh-CN"/>
+              <a:t>prompt</a:t>
+            </a:r>
+            <a:r>
+              <a:rPr lang="zh-CN" altLang="en-US"/>
+              <a:t>来做思维引导</a:t>
+            </a:r>
+            <a:r>
+              <a:rPr lang="en-US" altLang="zh-CN"/>
+              <a:t>↓</a:t>
+            </a:r>
+            <a:endParaRPr lang="zh-CN" altLang="en-US"/>
+          </a:p>
+          <a:p>
+            <a:pPr>
+              <a:lnSpc>
+                <a:spcPct val="200000"/>
+              </a:lnSpc>
+            </a:pPr>
+            <a:r>
+              <a:rPr lang="zh-CN" altLang="en-US"/>
+              <a:t>【</a:t>
+            </a:r>
+            <a:r>
+              <a:rPr lang="en-US" altLang="zh-CN"/>
+              <a:t>Step1</a:t>
+            </a:r>
+            <a:r>
+              <a:rPr lang="zh-CN" altLang="en-US"/>
+              <a:t>】</a:t>
+            </a:r>
+            <a:r>
+              <a:rPr lang="zh-CN" altLang="en-US" b="1">
+                <a:effectLst>
+                  <a:outerShdw blurRad="38100" dist="38100" dir="2700000" algn="tl">
+                    <a:srgbClr val="000000">
+                      <a:alpha val="43137"/>
+                    </a:srgbClr>
+                  </a:outerShdw>
+                </a:effectLst>
+              </a:rPr>
+              <a:t>依赖识别</a:t>
+            </a:r>
+            <a:r>
+              <a:rPr lang="zh-CN" altLang="en-US"/>
+              <a:t>：从目标行出发，识别目标变量依赖哪些其他变量或表达式</a:t>
+            </a:r>
+            <a:endParaRPr lang="zh-CN" altLang="en-US"/>
+          </a:p>
+          <a:p>
+            <a:pPr>
+              <a:lnSpc>
+                <a:spcPct val="200000"/>
+              </a:lnSpc>
+            </a:pPr>
+            <a:r>
+              <a:rPr lang="zh-CN" altLang="en-US"/>
+              <a:t>【</a:t>
+            </a:r>
+            <a:r>
+              <a:rPr lang="en-US" altLang="zh-CN"/>
+              <a:t>Step2</a:t>
+            </a:r>
+            <a:r>
+              <a:rPr lang="zh-CN" altLang="en-US"/>
+              <a:t>】</a:t>
+            </a:r>
+            <a:r>
+              <a:rPr lang="zh-CN" altLang="en-US" b="1">
+                <a:effectLst>
+                  <a:outerShdw blurRad="38100" dist="38100" dir="2700000" algn="tl">
+                    <a:srgbClr val="000000">
+                      <a:alpha val="43137"/>
+                    </a:srgbClr>
+                  </a:outerShdw>
+                </a:effectLst>
+              </a:rPr>
+              <a:t>逆向追溯</a:t>
+            </a:r>
+            <a:r>
+              <a:rPr lang="zh-CN" altLang="en-US"/>
+              <a:t>：递归地向前查找每个依赖变量的最后赋值位置，直到找到所有常量或初始值</a:t>
+            </a:r>
+            <a:endParaRPr lang="zh-CN" altLang="en-US"/>
+          </a:p>
+          <a:p>
+            <a:pPr>
+              <a:lnSpc>
+                <a:spcPct val="200000"/>
+              </a:lnSpc>
+            </a:pPr>
+            <a:r>
+              <a:rPr lang="zh-CN" altLang="en-US"/>
+              <a:t>【</a:t>
+            </a:r>
+            <a:r>
+              <a:rPr lang="en-US" altLang="zh-CN"/>
+              <a:t>Step3</a:t>
+            </a:r>
+            <a:r>
+              <a:rPr lang="zh-CN" altLang="en-US"/>
+              <a:t>】</a:t>
+            </a:r>
+            <a:r>
+              <a:rPr lang="zh-CN" altLang="en-US" b="1">
+                <a:effectLst>
+                  <a:outerShdw blurRad="38100" dist="38100" dir="2700000" algn="tl">
+                    <a:srgbClr val="000000">
+                      <a:alpha val="43137"/>
+                    </a:srgbClr>
+                  </a:outerShdw>
+                </a:effectLst>
+              </a:rPr>
+              <a:t>正向计算</a:t>
+            </a:r>
+            <a:r>
+              <a:rPr lang="zh-CN" altLang="en-US"/>
+              <a:t>：依照逆向追溯的思维链快速正向计算确保</a:t>
+            </a:r>
+            <a:r>
+              <a:rPr lang="zh-CN" altLang="en-US"/>
+              <a:t>正确</a:t>
+            </a:r>
+            <a:endParaRPr lang="zh-CN" altLang="en-US"/>
+          </a:p>
+          <a:p>
+            <a:pPr>
+              <a:lnSpc>
+                <a:spcPct val="200000"/>
+              </a:lnSpc>
+            </a:pPr>
+            <a:r>
+              <a:rPr lang="zh-CN" altLang="en-US"/>
+              <a:t>【</a:t>
+            </a:r>
+            <a:r>
+              <a:rPr lang="en-US" altLang="zh-CN"/>
+              <a:t>Step4</a:t>
+            </a:r>
+            <a:r>
+              <a:rPr lang="zh-CN" altLang="en-US"/>
+              <a:t>】</a:t>
+            </a:r>
+            <a:r>
+              <a:rPr lang="zh-CN" altLang="en-US" b="1">
+                <a:effectLst>
+                  <a:outerShdw blurRad="38100" dist="38100" dir="2700000" algn="tl">
+                    <a:srgbClr val="000000">
+                      <a:alpha val="43137"/>
+                    </a:srgbClr>
+                  </a:outerShdw>
+                </a:effectLst>
+              </a:rPr>
+              <a:t>约束输出格式</a:t>
+            </a:r>
+            <a:r>
+              <a:rPr lang="zh-CN" altLang="en-US"/>
+              <a:t>：通过明确的格式模板和精简要求，引导</a:t>
+            </a:r>
+            <a:r>
+              <a:rPr lang="en-US" altLang="zh-CN"/>
+              <a:t>AI</a:t>
+            </a:r>
+            <a:r>
+              <a:rPr lang="zh-CN" altLang="en-US"/>
+              <a:t>按倒序思维生成推理过程而非直接给答案</a:t>
+            </a:r>
+            <a:endParaRPr lang="zh-CN" altLang="en-US"/>
+          </a:p>
+        </p:txBody>
+      </p:sp>
       <p:pic>
         <p:nvPicPr>
-          <p:cNvPr id="9" name="图片 8"/>
+          <p:cNvPr id="6" name="图片 5"/>
           <p:cNvPicPr>
             <a:picLocks noChangeAspect="1"/>
           </p:cNvPicPr>
@@ -4047,46 +4127,15 @@
         </p:blipFill>
         <p:spPr>
           <a:xfrm>
-            <a:off x="344805" y="985520"/>
-            <a:ext cx="2956560" cy="1797685"/>
+            <a:off x="407035" y="4312285"/>
+            <a:ext cx="4362450" cy="2276475"/>
           </a:xfrm>
           <a:prstGeom prst="rect">
             <a:avLst/>
           </a:prstGeom>
-          <a:ln>
+          <a:ln w="19050">
             <a:solidFill>
               <a:schemeClr val="accent6">
-                <a:lumMod val="75000"/>
-              </a:schemeClr>
-            </a:solidFill>
-          </a:ln>
-        </p:spPr>
-      </p:pic>
-      <p:pic>
-        <p:nvPicPr>
-          <p:cNvPr id="3" name="图片 2"/>
-          <p:cNvPicPr>
-            <a:picLocks noChangeAspect="1"/>
-          </p:cNvPicPr>
-          <p:nvPr/>
-        </p:nvPicPr>
-        <p:blipFill>
-          <a:blip r:embed="rId2"/>
-          <a:stretch>
-            <a:fillRect/>
-          </a:stretch>
-        </p:blipFill>
-        <p:spPr>
-          <a:xfrm>
-            <a:off x="3514090" y="950595"/>
-            <a:ext cx="8353425" cy="5398135"/>
-          </a:xfrm>
-          <a:prstGeom prst="rect">
-            <a:avLst/>
-          </a:prstGeom>
-          <a:ln>
-            <a:solidFill>
-              <a:schemeClr val="accent5">
                 <a:lumMod val="75000"/>
               </a:schemeClr>
             </a:solidFill>
@@ -4187,42 +4236,9 @@
           </a:p>
         </p:txBody>
       </p:sp>
-      <p:sp>
-        <p:nvSpPr>
-          <p:cNvPr id="7" name="文本框 6"/>
-          <p:cNvSpPr txBox="1"/>
-          <p:nvPr/>
-        </p:nvSpPr>
-        <p:spPr>
-          <a:xfrm>
-            <a:off x="9250680" y="219075"/>
-            <a:ext cx="1708785" cy="368300"/>
-          </a:xfrm>
-          <a:prstGeom prst="rect">
-            <a:avLst/>
-          </a:prstGeom>
-          <a:noFill/>
-        </p:spPr>
-        <p:txBody>
-          <a:bodyPr wrap="square" rtlCol="0">
-            <a:spAutoFit/>
-          </a:bodyPr>
-          <a:p>
-            <a:r>
-              <a:rPr lang="zh-CN" altLang="en-US"/>
-              <a:t>倒序</a:t>
-            </a:r>
-            <a:r>
-              <a:rPr lang="en-US" altLang="zh-CN"/>
-              <a:t>cot</a:t>
-            </a:r>
-            <a:endParaRPr lang="zh-CN" altLang="en-US"/>
-          </a:p>
-        </p:txBody>
-      </p:sp>
       <p:pic>
         <p:nvPicPr>
-          <p:cNvPr id="5" name="图片 4"/>
+          <p:cNvPr id="9" name="图片 8"/>
           <p:cNvPicPr>
             <a:picLocks noChangeAspect="1"/>
           </p:cNvPicPr>
@@ -4236,17 +4252,24 @@
         </p:blipFill>
         <p:spPr>
           <a:xfrm>
-            <a:off x="274320" y="985520"/>
-            <a:ext cx="6576695" cy="5640070"/>
+            <a:off x="344805" y="985520"/>
+            <a:ext cx="2956560" cy="1797685"/>
           </a:xfrm>
           <a:prstGeom prst="rect">
             <a:avLst/>
           </a:prstGeom>
+          <a:ln>
+            <a:solidFill>
+              <a:schemeClr val="accent6">
+                <a:lumMod val="75000"/>
+              </a:schemeClr>
+            </a:solidFill>
+          </a:ln>
         </p:spPr>
       </p:pic>
       <p:pic>
         <p:nvPicPr>
-          <p:cNvPr id="6" name="图片 5"/>
+          <p:cNvPr id="3" name="图片 2"/>
           <p:cNvPicPr>
             <a:picLocks noChangeAspect="1"/>
           </p:cNvPicPr>
@@ -4260,63 +4283,15 @@
         </p:blipFill>
         <p:spPr>
           <a:xfrm>
-            <a:off x="4839970" y="952500"/>
-            <a:ext cx="4327525" cy="5672455"/>
-          </a:xfrm>
-          <a:prstGeom prst="rect">
-            <a:avLst/>
-          </a:prstGeom>
-        </p:spPr>
-      </p:pic>
-      <p:pic>
-        <p:nvPicPr>
-          <p:cNvPr id="8" name="图片 7"/>
-          <p:cNvPicPr>
-            <a:picLocks noChangeAspect="1"/>
-          </p:cNvPicPr>
-          <p:nvPr/>
-        </p:nvPicPr>
-        <p:blipFill>
-          <a:blip r:embed="rId3"/>
-          <a:stretch>
-            <a:fillRect/>
-          </a:stretch>
-        </p:blipFill>
-        <p:spPr>
-          <a:xfrm>
-            <a:off x="8743315" y="4743450"/>
-            <a:ext cx="3208655" cy="2035175"/>
-          </a:xfrm>
-          <a:prstGeom prst="rect">
-            <a:avLst/>
-          </a:prstGeom>
-        </p:spPr>
-      </p:pic>
-      <p:pic>
-        <p:nvPicPr>
-          <p:cNvPr id="9" name="图片 8"/>
-          <p:cNvPicPr>
-            <a:picLocks noChangeAspect="1"/>
-          </p:cNvPicPr>
-          <p:nvPr/>
-        </p:nvPicPr>
-        <p:blipFill>
-          <a:blip r:embed="rId4"/>
-          <a:stretch>
-            <a:fillRect/>
-          </a:stretch>
-        </p:blipFill>
-        <p:spPr>
-          <a:xfrm>
-            <a:off x="9060180" y="985520"/>
-            <a:ext cx="2956560" cy="1797685"/>
+            <a:off x="3514090" y="950595"/>
+            <a:ext cx="8353425" cy="5398135"/>
           </a:xfrm>
           <a:prstGeom prst="rect">
             <a:avLst/>
           </a:prstGeom>
           <a:ln>
             <a:solidFill>
-              <a:schemeClr val="accent6">
+              <a:schemeClr val="accent5">
                 <a:lumMod val="75000"/>
               </a:schemeClr>
             </a:solidFill>
@@ -4417,9 +4392,42 @@
           </a:p>
         </p:txBody>
       </p:sp>
+      <p:sp>
+        <p:nvSpPr>
+          <p:cNvPr id="7" name="文本框 6"/>
+          <p:cNvSpPr txBox="1"/>
+          <p:nvPr/>
+        </p:nvSpPr>
+        <p:spPr>
+          <a:xfrm>
+            <a:off x="9250680" y="219075"/>
+            <a:ext cx="1708785" cy="368300"/>
+          </a:xfrm>
+          <a:prstGeom prst="rect">
+            <a:avLst/>
+          </a:prstGeom>
+          <a:noFill/>
+        </p:spPr>
+        <p:txBody>
+          <a:bodyPr wrap="square" rtlCol="0">
+            <a:spAutoFit/>
+          </a:bodyPr>
+          <a:p>
+            <a:r>
+              <a:rPr lang="zh-CN" altLang="en-US"/>
+              <a:t>倒序</a:t>
+            </a:r>
+            <a:r>
+              <a:rPr lang="en-US" altLang="zh-CN"/>
+              <a:t>cot</a:t>
+            </a:r>
+            <a:endParaRPr lang="zh-CN" altLang="en-US"/>
+          </a:p>
+        </p:txBody>
+      </p:sp>
       <p:pic>
         <p:nvPicPr>
-          <p:cNvPr id="9" name="图片 8"/>
+          <p:cNvPr id="5" name="图片 4"/>
           <p:cNvPicPr>
             <a:picLocks noChangeAspect="1"/>
           </p:cNvPicPr>
@@ -4433,79 +4441,17 @@
         </p:blipFill>
         <p:spPr>
           <a:xfrm>
-            <a:off x="344805" y="985520"/>
-            <a:ext cx="2956560" cy="1797685"/>
+            <a:off x="274320" y="985520"/>
+            <a:ext cx="6576695" cy="5640070"/>
           </a:xfrm>
           <a:prstGeom prst="rect">
             <a:avLst/>
           </a:prstGeom>
-          <a:ln>
-            <a:solidFill>
-              <a:schemeClr val="accent6">
-                <a:lumMod val="75000"/>
-              </a:schemeClr>
-            </a:solidFill>
-          </a:ln>
         </p:spPr>
       </p:pic>
-      <p:sp>
-        <p:nvSpPr>
-          <p:cNvPr id="8" name="文本框 7"/>
-          <p:cNvSpPr txBox="1"/>
-          <p:nvPr/>
-        </p:nvSpPr>
-        <p:spPr>
-          <a:xfrm>
-            <a:off x="344805" y="3300095"/>
-            <a:ext cx="1976755" cy="922020"/>
-          </a:xfrm>
-          <a:prstGeom prst="rect">
-            <a:avLst/>
-          </a:prstGeom>
-          <a:noFill/>
-        </p:spPr>
-        <p:txBody>
-          <a:bodyPr wrap="square" rtlCol="0">
-            <a:spAutoFit/>
-          </a:bodyPr>
-          <a:p>
-            <a:r>
-              <a:rPr lang="zh-CN" altLang="en-US"/>
-              <a:t>亮点</a:t>
-            </a:r>
-            <a:r>
-              <a:rPr lang="en-US" altLang="zh-CN"/>
-              <a:t>cot</a:t>
-            </a:r>
-            <a:r>
-              <a:rPr lang="zh-CN" altLang="en-US"/>
-              <a:t>片段</a:t>
-            </a:r>
-            <a:r>
-              <a:rPr lang="zh-CN" altLang="en-US"/>
-              <a:t>分析</a:t>
-            </a:r>
-            <a:endParaRPr lang="zh-CN" altLang="en-US"/>
-          </a:p>
-          <a:p>
-            <a:endParaRPr lang="zh-CN" altLang="en-US"/>
-          </a:p>
-          <a:p>
-            <a:r>
-              <a:rPr lang="zh-CN" altLang="en-US"/>
-              <a:t>缺陷</a:t>
-            </a:r>
-            <a:r>
-              <a:rPr lang="zh-CN" altLang="en-US"/>
-              <a:t>总结</a:t>
-            </a:r>
-            <a:endParaRPr lang="zh-CN" altLang="en-US"/>
-          </a:p>
-        </p:txBody>
-      </p:sp>
       <p:pic>
         <p:nvPicPr>
-          <p:cNvPr id="10" name="图片 9"/>
+          <p:cNvPr id="6" name="图片 5"/>
           <p:cNvPicPr>
             <a:picLocks noChangeAspect="1"/>
           </p:cNvPicPr>
@@ -4519,57 +4465,17 @@
         </p:blipFill>
         <p:spPr>
           <a:xfrm>
-            <a:off x="3718560" y="985520"/>
-            <a:ext cx="7964805" cy="1574800"/>
+            <a:off x="4839970" y="952500"/>
+            <a:ext cx="4327525" cy="5672455"/>
           </a:xfrm>
           <a:prstGeom prst="rect">
             <a:avLst/>
           </a:prstGeom>
-          <a:ln>
-            <a:solidFill>
-              <a:schemeClr val="accent5">
-                <a:lumMod val="75000"/>
-              </a:schemeClr>
-            </a:solidFill>
-          </a:ln>
         </p:spPr>
       </p:pic>
-      <p:sp>
-        <p:nvSpPr>
-          <p:cNvPr id="11" name="文本框 10"/>
-          <p:cNvSpPr txBox="1"/>
-          <p:nvPr/>
-        </p:nvSpPr>
-        <p:spPr>
-          <a:xfrm>
-            <a:off x="3718560" y="2560320"/>
-            <a:ext cx="5187315" cy="368300"/>
-          </a:xfrm>
-          <a:prstGeom prst="rect">
-            <a:avLst/>
-          </a:prstGeom>
-          <a:noFill/>
-        </p:spPr>
-        <p:txBody>
-          <a:bodyPr wrap="square" rtlCol="0">
-            <a:spAutoFit/>
-          </a:bodyPr>
-          <a:p>
-            <a:r>
-              <a:rPr lang="zh-CN" altLang="en-US"/>
-              <a:t>亮点：分析了依赖，开始逆序</a:t>
-            </a:r>
-            <a:r>
-              <a:rPr lang="zh-CN" altLang="en-US"/>
-              <a:t>思考</a:t>
-            </a:r>
-            <a:endParaRPr lang="zh-CN" altLang="en-US"/>
-          </a:p>
-        </p:txBody>
-      </p:sp>
       <p:pic>
         <p:nvPicPr>
-          <p:cNvPr id="12" name="图片 11"/>
+          <p:cNvPr id="8" name="图片 7"/>
           <p:cNvPicPr>
             <a:picLocks noChangeAspect="1"/>
           </p:cNvPicPr>
@@ -4583,57 +4489,17 @@
         </p:blipFill>
         <p:spPr>
           <a:xfrm>
-            <a:off x="3718560" y="2976245"/>
-            <a:ext cx="6067425" cy="1266825"/>
+            <a:off x="8743315" y="4743450"/>
+            <a:ext cx="3208655" cy="2035175"/>
           </a:xfrm>
           <a:prstGeom prst="rect">
             <a:avLst/>
           </a:prstGeom>
-          <a:ln>
-            <a:solidFill>
-              <a:schemeClr val="accent5">
-                <a:lumMod val="75000"/>
-              </a:schemeClr>
-            </a:solidFill>
-          </a:ln>
         </p:spPr>
       </p:pic>
-      <p:sp>
-        <p:nvSpPr>
-          <p:cNvPr id="13" name="文本框 12"/>
-          <p:cNvSpPr txBox="1"/>
-          <p:nvPr/>
-        </p:nvSpPr>
-        <p:spPr>
-          <a:xfrm>
-            <a:off x="3718560" y="4352290"/>
-            <a:ext cx="5187315" cy="368300"/>
-          </a:xfrm>
-          <a:prstGeom prst="rect">
-            <a:avLst/>
-          </a:prstGeom>
-          <a:noFill/>
-        </p:spPr>
-        <p:txBody>
-          <a:bodyPr wrap="square" rtlCol="0">
-            <a:spAutoFit/>
-          </a:bodyPr>
-          <a:p>
-            <a:r>
-              <a:rPr lang="zh-CN" altLang="en-US"/>
-              <a:t>亮点：适当分析了循环的</a:t>
-            </a:r>
-            <a:r>
-              <a:rPr lang="zh-CN" altLang="en-US"/>
-              <a:t>影响</a:t>
-            </a:r>
-            <a:endParaRPr lang="zh-CN" altLang="en-US"/>
-          </a:p>
-        </p:txBody>
-      </p:sp>
       <p:pic>
         <p:nvPicPr>
-          <p:cNvPr id="15" name="图片 14"/>
+          <p:cNvPr id="9" name="图片 8"/>
           <p:cNvPicPr>
             <a:picLocks noChangeAspect="1"/>
           </p:cNvPicPr>
@@ -4647,95 +4513,15 @@
         </p:blipFill>
         <p:spPr>
           <a:xfrm>
-            <a:off x="3718560" y="4777105"/>
-            <a:ext cx="7030720" cy="907415"/>
+            <a:off x="9060180" y="985520"/>
+            <a:ext cx="2956560" cy="1797685"/>
           </a:xfrm>
           <a:prstGeom prst="rect">
             <a:avLst/>
           </a:prstGeom>
           <a:ln>
             <a:solidFill>
-              <a:schemeClr val="accent5">
-                <a:lumMod val="75000"/>
-              </a:schemeClr>
-            </a:solidFill>
-          </a:ln>
-        </p:spPr>
-      </p:pic>
-      <p:sp>
-        <p:nvSpPr>
-          <p:cNvPr id="16" name="文本框 15"/>
-          <p:cNvSpPr txBox="1"/>
-          <p:nvPr/>
-        </p:nvSpPr>
-        <p:spPr>
-          <a:xfrm>
-            <a:off x="3718560" y="5798820"/>
-            <a:ext cx="7030085" cy="368300"/>
-          </a:xfrm>
-          <a:prstGeom prst="rect">
-            <a:avLst/>
-          </a:prstGeom>
-          <a:noFill/>
-        </p:spPr>
-        <p:txBody>
-          <a:bodyPr wrap="square" rtlCol="0">
-            <a:spAutoFit/>
-          </a:bodyPr>
-          <a:p>
-            <a:r>
-              <a:rPr lang="zh-CN" altLang="en-US"/>
-              <a:t>缺陷：由于是</a:t>
-            </a:r>
-            <a:r>
-              <a:rPr lang="en-US" altLang="zh-CN"/>
-              <a:t>ai</a:t>
-            </a:r>
-            <a:r>
-              <a:rPr lang="zh-CN" altLang="en-US"/>
-              <a:t>，所以反复</a:t>
-            </a:r>
-            <a:r>
-              <a:rPr lang="en-US" altLang="zh-CN"/>
-              <a:t>wait</a:t>
-            </a:r>
-            <a:r>
-              <a:rPr lang="zh-CN" altLang="en-US"/>
-              <a:t>重新思考，整体过于冗长且逻辑</a:t>
-            </a:r>
-            <a:r>
-              <a:rPr lang="zh-CN" altLang="en-US"/>
-              <a:t>混乱</a:t>
-            </a:r>
-            <a:endParaRPr lang="zh-CN" altLang="en-US"/>
-          </a:p>
-        </p:txBody>
-      </p:sp>
-      <p:pic>
-        <p:nvPicPr>
-          <p:cNvPr id="17" name="图片 16"/>
-          <p:cNvPicPr>
-            <a:picLocks noChangeAspect="1"/>
-          </p:cNvPicPr>
-          <p:nvPr/>
-        </p:nvPicPr>
-        <p:blipFill>
-          <a:blip r:embed="rId5"/>
-          <a:stretch>
-            <a:fillRect/>
-          </a:stretch>
-        </p:blipFill>
-        <p:spPr>
-          <a:xfrm>
-            <a:off x="10800715" y="4720590"/>
-            <a:ext cx="1066800" cy="971550"/>
-          </a:xfrm>
-          <a:prstGeom prst="rect">
-            <a:avLst/>
-          </a:prstGeom>
-          <a:ln>
-            <a:solidFill>
-              <a:schemeClr val="accent5">
+              <a:schemeClr val="accent6">
                 <a:lumMod val="75000"/>
               </a:schemeClr>
             </a:solidFill>
@@ -4836,171 +4622,331 @@
           </a:p>
         </p:txBody>
       </p:sp>
-      <p:sp>
-        <p:nvSpPr>
-          <p:cNvPr id="5" name="文本框 4"/>
+      <p:pic>
+        <p:nvPicPr>
+          <p:cNvPr id="9" name="图片 8"/>
+          <p:cNvPicPr>
+            <a:picLocks noChangeAspect="1"/>
+          </p:cNvPicPr>
+          <p:nvPr/>
+        </p:nvPicPr>
+        <p:blipFill>
+          <a:blip r:embed="rId1"/>
+          <a:stretch>
+            <a:fillRect/>
+          </a:stretch>
+        </p:blipFill>
+        <p:spPr>
+          <a:xfrm>
+            <a:off x="344805" y="985520"/>
+            <a:ext cx="2956560" cy="1797685"/>
+          </a:xfrm>
+          <a:prstGeom prst="rect">
+            <a:avLst/>
+          </a:prstGeom>
+          <a:ln>
+            <a:solidFill>
+              <a:schemeClr val="accent6">
+                <a:lumMod val="75000"/>
+              </a:schemeClr>
+            </a:solidFill>
+          </a:ln>
+        </p:spPr>
+      </p:pic>
+      <p:sp>
+        <p:nvSpPr>
+          <p:cNvPr id="8" name="文本框 7"/>
           <p:cNvSpPr txBox="1"/>
           <p:nvPr/>
         </p:nvSpPr>
         <p:spPr>
           <a:xfrm>
-            <a:off x="344805" y="1064260"/>
-            <a:ext cx="11449050" cy="3784600"/>
+            <a:off x="344805" y="3300095"/>
+            <a:ext cx="1976755" cy="922020"/>
           </a:xfrm>
           <a:prstGeom prst="rect">
             <a:avLst/>
           </a:prstGeom>
-        </p:spPr>
-        <p:txBody>
-          <a:bodyPr wrap="square">
+          <a:noFill/>
+        </p:spPr>
+        <p:txBody>
+          <a:bodyPr wrap="square" rtlCol="0">
             <a:spAutoFit/>
           </a:bodyPr>
           <a:p>
-            <a:pPr>
-              <a:lnSpc>
-                <a:spcPct val="200000"/>
-              </a:lnSpc>
-            </a:pPr>
-            <a:r>
-              <a:rPr lang="zh-CN" altLang="en-US" sz="2000"/>
-              <a:t>总结：</a:t>
-            </a:r>
-            <a:r>
-              <a:rPr lang="en-US" altLang="zh-CN" sz="2000"/>
-              <a:t>AI</a:t>
-            </a:r>
-            <a:r>
-              <a:rPr lang="zh-CN" altLang="en-US" sz="2000"/>
-              <a:t>确实很好的理解了逆向思考的这一需求，且能完整走通逆向思考步骤，给出合适的</a:t>
-            </a:r>
-            <a:r>
-              <a:rPr lang="en-US" altLang="zh-CN" sz="2000"/>
+            <a:r>
+              <a:rPr lang="zh-CN" altLang="en-US"/>
+              <a:t>亮点</a:t>
+            </a:r>
+            <a:r>
+              <a:rPr lang="en-US" altLang="zh-CN"/>
               <a:t>cot</a:t>
             </a:r>
             <a:r>
-              <a:rPr lang="zh-CN" altLang="en-US" sz="2000"/>
-              <a:t>。</a:t>
-            </a:r>
-            <a:endParaRPr lang="zh-CN" altLang="en-US" sz="2000"/>
-          </a:p>
-          <a:p>
-            <a:pPr>
-              <a:lnSpc>
-                <a:spcPct val="200000"/>
-              </a:lnSpc>
-            </a:pPr>
-            <a:r>
-              <a:rPr lang="zh-CN" altLang="en-US" sz="2000"/>
-              <a:t>但有明显缺陷是其容易陷入思维死循环，且最终</a:t>
-            </a:r>
-            <a:r>
-              <a:rPr lang="en-US" altLang="zh-CN" sz="2000"/>
-              <a:t>cot</a:t>
-            </a:r>
-            <a:r>
-              <a:rPr lang="zh-CN" altLang="en-US" sz="2000"/>
-              <a:t>不如直接硬编码</a:t>
-            </a:r>
-            <a:r>
-              <a:rPr lang="en-US" altLang="zh-CN" sz="2000"/>
-              <a:t>cot</a:t>
-            </a:r>
-            <a:r>
-              <a:rPr lang="zh-CN" altLang="en-US" sz="2000"/>
-              <a:t>简洁明了。</a:t>
-            </a:r>
-            <a:r>
-              <a:rPr lang="en-US" altLang="zh-CN" sz="2000"/>
-              <a:t>ai cot</a:t>
-            </a:r>
-            <a:r>
-              <a:rPr lang="zh-CN" altLang="en-US" sz="2000"/>
-              <a:t>更</a:t>
-            </a:r>
-            <a:r>
-              <a:rPr lang="zh-CN" altLang="en-US" sz="2000"/>
-              <a:t>冗杂。</a:t>
-            </a:r>
-            <a:endParaRPr lang="zh-CN" altLang="en-US" sz="2000"/>
-          </a:p>
-          <a:p>
-            <a:pPr>
-              <a:lnSpc>
-                <a:spcPct val="200000"/>
-              </a:lnSpc>
-            </a:pPr>
-            <a:endParaRPr lang="zh-CN" altLang="en-US" sz="2000"/>
-          </a:p>
-          <a:p>
-            <a:pPr>
-              <a:lnSpc>
-                <a:spcPct val="200000"/>
-              </a:lnSpc>
-            </a:pPr>
-            <a:r>
-              <a:rPr lang="zh-CN" altLang="en-US" sz="2000"/>
-              <a:t>解决方案思考：</a:t>
-            </a:r>
-            <a:endParaRPr lang="zh-CN" altLang="en-US" sz="2000"/>
-          </a:p>
-          <a:p>
-            <a:pPr>
-              <a:lnSpc>
-                <a:spcPct val="200000"/>
-              </a:lnSpc>
-            </a:pPr>
-            <a:r>
-              <a:rPr lang="en-US" altLang="zh-CN" sz="2000"/>
-              <a:t>1. </a:t>
-            </a:r>
-            <a:r>
-              <a:rPr lang="zh-CN" altLang="en-US" sz="2000"/>
-              <a:t>限制</a:t>
-            </a:r>
-            <a:r>
-              <a:rPr lang="en-US" altLang="zh-CN" sz="2000"/>
+              <a:rPr lang="zh-CN" altLang="en-US"/>
+              <a:t>片段</a:t>
+            </a:r>
+            <a:r>
+              <a:rPr lang="zh-CN" altLang="en-US"/>
+              <a:t>分析</a:t>
+            </a:r>
+            <a:endParaRPr lang="zh-CN" altLang="en-US"/>
+          </a:p>
+          <a:p>
+            <a:endParaRPr lang="zh-CN" altLang="en-US"/>
+          </a:p>
+          <a:p>
+            <a:r>
+              <a:rPr lang="zh-CN" altLang="en-US"/>
+              <a:t>缺陷</a:t>
+            </a:r>
+            <a:r>
+              <a:rPr lang="zh-CN" altLang="en-US"/>
+              <a:t>总结</a:t>
+            </a:r>
+            <a:endParaRPr lang="zh-CN" altLang="en-US"/>
+          </a:p>
+        </p:txBody>
+      </p:sp>
+      <p:pic>
+        <p:nvPicPr>
+          <p:cNvPr id="10" name="图片 9"/>
+          <p:cNvPicPr>
+            <a:picLocks noChangeAspect="1"/>
+          </p:cNvPicPr>
+          <p:nvPr/>
+        </p:nvPicPr>
+        <p:blipFill>
+          <a:blip r:embed="rId2"/>
+          <a:stretch>
+            <a:fillRect/>
+          </a:stretch>
+        </p:blipFill>
+        <p:spPr>
+          <a:xfrm>
+            <a:off x="3718560" y="985520"/>
+            <a:ext cx="7964805" cy="1574800"/>
+          </a:xfrm>
+          <a:prstGeom prst="rect">
+            <a:avLst/>
+          </a:prstGeom>
+          <a:ln>
+            <a:solidFill>
+              <a:schemeClr val="accent5">
+                <a:lumMod val="75000"/>
+              </a:schemeClr>
+            </a:solidFill>
+          </a:ln>
+        </p:spPr>
+      </p:pic>
+      <p:sp>
+        <p:nvSpPr>
+          <p:cNvPr id="11" name="文本框 10"/>
+          <p:cNvSpPr txBox="1"/>
+          <p:nvPr/>
+        </p:nvSpPr>
+        <p:spPr>
+          <a:xfrm>
+            <a:off x="3718560" y="2560320"/>
+            <a:ext cx="5187315" cy="368300"/>
+          </a:xfrm>
+          <a:prstGeom prst="rect">
+            <a:avLst/>
+          </a:prstGeom>
+          <a:noFill/>
+        </p:spPr>
+        <p:txBody>
+          <a:bodyPr wrap="square" rtlCol="0">
+            <a:spAutoFit/>
+          </a:bodyPr>
+          <a:p>
+            <a:r>
+              <a:rPr lang="zh-CN" altLang="en-US"/>
+              <a:t>亮点：分析了依赖，开始逆序</a:t>
+            </a:r>
+            <a:r>
+              <a:rPr lang="zh-CN" altLang="en-US"/>
+              <a:t>思考</a:t>
+            </a:r>
+            <a:endParaRPr lang="zh-CN" altLang="en-US"/>
+          </a:p>
+        </p:txBody>
+      </p:sp>
+      <p:pic>
+        <p:nvPicPr>
+          <p:cNvPr id="12" name="图片 11"/>
+          <p:cNvPicPr>
+            <a:picLocks noChangeAspect="1"/>
+          </p:cNvPicPr>
+          <p:nvPr/>
+        </p:nvPicPr>
+        <p:blipFill>
+          <a:blip r:embed="rId3"/>
+          <a:stretch>
+            <a:fillRect/>
+          </a:stretch>
+        </p:blipFill>
+        <p:spPr>
+          <a:xfrm>
+            <a:off x="3718560" y="2976245"/>
+            <a:ext cx="6067425" cy="1266825"/>
+          </a:xfrm>
+          <a:prstGeom prst="rect">
+            <a:avLst/>
+          </a:prstGeom>
+          <a:ln>
+            <a:solidFill>
+              <a:schemeClr val="accent5">
+                <a:lumMod val="75000"/>
+              </a:schemeClr>
+            </a:solidFill>
+          </a:ln>
+        </p:spPr>
+      </p:pic>
+      <p:sp>
+        <p:nvSpPr>
+          <p:cNvPr id="13" name="文本框 12"/>
+          <p:cNvSpPr txBox="1"/>
+          <p:nvPr/>
+        </p:nvSpPr>
+        <p:spPr>
+          <a:xfrm>
+            <a:off x="3718560" y="4352290"/>
+            <a:ext cx="5187315" cy="368300"/>
+          </a:xfrm>
+          <a:prstGeom prst="rect">
+            <a:avLst/>
+          </a:prstGeom>
+          <a:noFill/>
+        </p:spPr>
+        <p:txBody>
+          <a:bodyPr wrap="square" rtlCol="0">
+            <a:spAutoFit/>
+          </a:bodyPr>
+          <a:p>
+            <a:r>
+              <a:rPr lang="zh-CN" altLang="en-US"/>
+              <a:t>亮点：适当分析了循环的</a:t>
+            </a:r>
+            <a:r>
+              <a:rPr lang="zh-CN" altLang="en-US"/>
+              <a:t>影响</a:t>
+            </a:r>
+            <a:endParaRPr lang="zh-CN" altLang="en-US"/>
+          </a:p>
+        </p:txBody>
+      </p:sp>
+      <p:pic>
+        <p:nvPicPr>
+          <p:cNvPr id="15" name="图片 14"/>
+          <p:cNvPicPr>
+            <a:picLocks noChangeAspect="1"/>
+          </p:cNvPicPr>
+          <p:nvPr/>
+        </p:nvPicPr>
+        <p:blipFill>
+          <a:blip r:embed="rId4"/>
+          <a:stretch>
+            <a:fillRect/>
+          </a:stretch>
+        </p:blipFill>
+        <p:spPr>
+          <a:xfrm>
+            <a:off x="3718560" y="4777105"/>
+            <a:ext cx="7030720" cy="907415"/>
+          </a:xfrm>
+          <a:prstGeom prst="rect">
+            <a:avLst/>
+          </a:prstGeom>
+          <a:ln>
+            <a:solidFill>
+              <a:schemeClr val="accent5">
+                <a:lumMod val="75000"/>
+              </a:schemeClr>
+            </a:solidFill>
+          </a:ln>
+        </p:spPr>
+      </p:pic>
+      <p:sp>
+        <p:nvSpPr>
+          <p:cNvPr id="16" name="文本框 15"/>
+          <p:cNvSpPr txBox="1"/>
+          <p:nvPr/>
+        </p:nvSpPr>
+        <p:spPr>
+          <a:xfrm>
+            <a:off x="3718560" y="5798820"/>
+            <a:ext cx="7030085" cy="368300"/>
+          </a:xfrm>
+          <a:prstGeom prst="rect">
+            <a:avLst/>
+          </a:prstGeom>
+          <a:noFill/>
+        </p:spPr>
+        <p:txBody>
+          <a:bodyPr wrap="square" rtlCol="0">
+            <a:spAutoFit/>
+          </a:bodyPr>
+          <a:p>
+            <a:r>
+              <a:rPr lang="zh-CN" altLang="en-US"/>
+              <a:t>缺陷：由于是</a:t>
+            </a:r>
+            <a:r>
+              <a:rPr lang="en-US" altLang="zh-CN"/>
               <a:t>ai</a:t>
             </a:r>
             <a:r>
-              <a:rPr lang="zh-CN" altLang="en-US" sz="2000"/>
-              <a:t>回答长度、要求其用简短的话回复（面临丢失信息跳</a:t>
-            </a:r>
-            <a:r>
-              <a:rPr lang="zh-CN" altLang="en-US" sz="2000"/>
-              <a:t>步骤风险）</a:t>
-            </a:r>
-            <a:endParaRPr lang="zh-CN" altLang="en-US" sz="2000"/>
-          </a:p>
-          <a:p>
-            <a:pPr>
-              <a:lnSpc>
-                <a:spcPct val="200000"/>
-              </a:lnSpc>
-            </a:pPr>
-            <a:r>
-              <a:rPr lang="en-US" altLang="zh-CN" sz="2000"/>
-              <a:t>2. </a:t>
-            </a:r>
-            <a:r>
-              <a:rPr lang="zh-CN" altLang="en-US" sz="2000"/>
-              <a:t>调用能力更高</a:t>
-            </a:r>
-            <a:r>
-              <a:rPr lang="en-US" altLang="zh-CN" sz="2000"/>
-              <a:t>ai</a:t>
-            </a:r>
-            <a:r>
-              <a:rPr lang="zh-CN" altLang="en-US" sz="2000"/>
-              <a:t>尝试，目前是校园算力平台中开源</a:t>
-            </a:r>
-            <a:r>
-              <a:rPr lang="en-US" altLang="zh-CN" sz="2000"/>
-              <a:t>qwen</a:t>
-            </a:r>
-            <a:endParaRPr lang="en-US" altLang="zh-CN" sz="2000"/>
-          </a:p>
-        </p:txBody>
-      </p:sp>
+              <a:rPr lang="zh-CN" altLang="en-US"/>
+              <a:t>，所以反复</a:t>
+            </a:r>
+            <a:r>
+              <a:rPr lang="en-US" altLang="zh-CN"/>
+              <a:t>wait</a:t>
+            </a:r>
+            <a:r>
+              <a:rPr lang="zh-CN" altLang="en-US"/>
+              <a:t>重新思考，整体过于冗长且逻辑</a:t>
+            </a:r>
+            <a:r>
+              <a:rPr lang="zh-CN" altLang="en-US"/>
+              <a:t>混乱</a:t>
+            </a:r>
+            <a:endParaRPr lang="zh-CN" altLang="en-US"/>
+          </a:p>
+        </p:txBody>
+      </p:sp>
+      <p:pic>
+        <p:nvPicPr>
+          <p:cNvPr id="17" name="图片 16"/>
+          <p:cNvPicPr>
+            <a:picLocks noChangeAspect="1"/>
+          </p:cNvPicPr>
+          <p:nvPr/>
+        </p:nvPicPr>
+        <p:blipFill>
+          <a:blip r:embed="rId5"/>
+          <a:stretch>
+            <a:fillRect/>
+          </a:stretch>
+        </p:blipFill>
+        <p:spPr>
+          <a:xfrm>
+            <a:off x="10800715" y="4720590"/>
+            <a:ext cx="1066800" cy="971550"/>
+          </a:xfrm>
+          <a:prstGeom prst="rect">
+            <a:avLst/>
+          </a:prstGeom>
+          <a:ln>
+            <a:solidFill>
+              <a:schemeClr val="accent5">
+                <a:lumMod val="75000"/>
+              </a:schemeClr>
+            </a:solidFill>
+          </a:ln>
+        </p:spPr>
+      </p:pic>
     </p:spTree>
   </p:cSld>
   <p:clrMapOvr>
@@ -5051,43 +4997,43 @@
             <a:pPr algn="l"/>
             <a:r>
               <a:rPr lang="zh-CN" altLang="en-US" sz="2400" dirty="0"/>
-              <a:t>进展分享五：</a:t>
+              <a:t>进展分享四：</a:t>
+            </a:r>
+            <a:r>
+              <a:rPr lang="en-US" altLang="zh-CN" sz="2400" dirty="0">
+                <a:sym typeface="+mn-ea"/>
+              </a:rPr>
+              <a:t>AI+</a:t>
             </a:r>
             <a:r>
               <a:rPr lang="zh-CN" altLang="en-US" sz="2400" dirty="0">
                 <a:sym typeface="+mn-ea"/>
               </a:rPr>
-              <a:t>思路相近的一个工作</a:t>
+              <a:t>正序</a:t>
             </a:r>
             <a:r>
               <a:rPr lang="en-US" altLang="zh-CN" sz="2400" dirty="0">
                 <a:sym typeface="+mn-ea"/>
               </a:rPr>
-              <a:t> code+</a:t>
+              <a:t>cot——&gt;</a:t>
             </a:r>
             <a:r>
               <a:rPr lang="zh-CN" altLang="en-US" sz="2400" dirty="0">
                 <a:sym typeface="+mn-ea"/>
               </a:rPr>
-              <a:t>执行轨迹</a:t>
+              <a:t>得到倒叙</a:t>
             </a:r>
             <a:r>
               <a:rPr lang="en-US" altLang="zh-CN" sz="2400" dirty="0">
                 <a:sym typeface="+mn-ea"/>
               </a:rPr>
-              <a:t>—&gt;AI—&gt;</a:t>
+              <a:t>cot </a:t>
             </a:r>
             <a:r>
               <a:rPr lang="zh-CN" altLang="en-US" sz="2400" dirty="0">
                 <a:sym typeface="+mn-ea"/>
               </a:rPr>
-              <a:t>自然语言</a:t>
-            </a:r>
-            <a:r>
-              <a:rPr lang="en-US" altLang="zh-CN" sz="2400" dirty="0">
-                <a:sym typeface="+mn-ea"/>
-              </a:rPr>
-              <a:t>cot</a:t>
+              <a:t>探索</a:t>
             </a:r>
             <a:endParaRPr lang="zh-CN" altLang="en-US" sz="2400" dirty="0">
               <a:sym typeface="+mn-ea"/>
@@ -5097,72 +5043,14 @@
       </p:sp>
       <p:sp>
         <p:nvSpPr>
-          <p:cNvPr id="3" name="文本框 2"/>
+          <p:cNvPr id="5" name="文本框 4"/>
           <p:cNvSpPr txBox="1"/>
           <p:nvPr/>
         </p:nvSpPr>
         <p:spPr>
           <a:xfrm>
-            <a:off x="344805" y="970915"/>
-            <a:ext cx="10856595" cy="736600"/>
-          </a:xfrm>
-          <a:prstGeom prst="rect">
-            <a:avLst/>
-          </a:prstGeom>
-          <a:ln>
-            <a:solidFill>
-              <a:schemeClr val="bg1">
-                <a:lumMod val="85000"/>
-              </a:schemeClr>
-            </a:solidFill>
-          </a:ln>
-        </p:spPr>
-        <p:txBody>
-          <a:bodyPr wrap="square">
-            <a:noAutofit/>
-          </a:bodyPr>
-          <a:p>
-            <a:pPr marL="95250" indent="0">
-              <a:lnSpc>
-                <a:spcPct val="150000"/>
-              </a:lnSpc>
-              <a:spcBef>
-                <a:spcPts val="200"/>
-              </a:spcBef>
-              <a:spcAft>
-                <a:spcPts val="400"/>
-              </a:spcAft>
-            </a:pPr>
-            <a:r>
-              <a:rPr lang="en-US" altLang="zh-CN" sz="2800" b="1" i="0">
-                <a:solidFill>
-                  <a:srgbClr val="000000"/>
-                </a:solidFill>
-                <a:latin typeface="黑体" panose="02010609060101010101" charset="-122"/>
-                <a:ea typeface="黑体" panose="02010609060101010101" charset="-122"/>
-              </a:rPr>
-              <a:t>Code Execution as Grounded Supervision for LLM Reasoning</a:t>
-            </a:r>
-            <a:endParaRPr lang="en-US" altLang="zh-CN" sz="2800" b="1" i="0">
-              <a:solidFill>
-                <a:srgbClr val="000000"/>
-              </a:solidFill>
-              <a:latin typeface="黑体" panose="02010609060101010101" charset="-122"/>
-              <a:ea typeface="黑体" panose="02010609060101010101" charset="-122"/>
-            </a:endParaRPr>
-          </a:p>
-        </p:txBody>
-      </p:sp>
-      <p:sp>
-        <p:nvSpPr>
-          <p:cNvPr id="4" name="文本框 3"/>
-          <p:cNvSpPr txBox="1"/>
-          <p:nvPr/>
-        </p:nvSpPr>
-        <p:spPr>
-          <a:xfrm>
-            <a:off x="344805" y="2164715"/>
-            <a:ext cx="10856595" cy="3322955"/>
+            <a:off x="344805" y="1064260"/>
+            <a:ext cx="11449050" cy="3784600"/>
           </a:xfrm>
           <a:prstGeom prst="rect">
             <a:avLst/>
@@ -5173,298 +5061,148 @@
             <a:spAutoFit/>
           </a:bodyPr>
           <a:p>
-            <a:pPr marL="0" indent="0">
+            <a:pPr>
               <a:lnSpc>
-                <a:spcPct val="150000"/>
+                <a:spcPct val="200000"/>
               </a:lnSpc>
             </a:pPr>
             <a:r>
-              <a:rPr lang="zh-CN" altLang="en-US" sz="2000" b="0" i="0">
-                <a:solidFill>
-                  <a:srgbClr val="000000"/>
-                </a:solidFill>
-                <a:latin typeface="Lucida Grande"/>
-                <a:ea typeface="Lucida Grande"/>
-              </a:rPr>
-              <a:t>事实证明，通过思维链 （</a:t>
-            </a:r>
-            <a:r>
-              <a:rPr lang="en-US" altLang="zh-CN" sz="2000" b="0" i="0">
-                <a:solidFill>
-                  <a:srgbClr val="000000"/>
-                </a:solidFill>
-                <a:latin typeface="Lucida Grande"/>
-                <a:ea typeface="Lucida Grande"/>
-              </a:rPr>
-              <a:t>CoT</a:t>
-            </a:r>
-            <a:r>
-              <a:rPr lang="zh-CN" altLang="en-US" sz="2000" b="0" i="0">
-                <a:solidFill>
-                  <a:srgbClr val="000000"/>
-                </a:solidFill>
-                <a:latin typeface="Lucida Grande"/>
-                <a:ea typeface="Lucida Grande"/>
-              </a:rPr>
-              <a:t>） 监督训练大型语言模型 （</a:t>
-            </a:r>
-            <a:r>
-              <a:rPr lang="en-US" altLang="zh-CN" sz="2000" b="0" i="0">
-                <a:solidFill>
-                  <a:srgbClr val="000000"/>
-                </a:solidFill>
-                <a:latin typeface="Lucida Grande"/>
-                <a:ea typeface="Lucida Grande"/>
-              </a:rPr>
-              <a:t>LLM</a:t>
-            </a:r>
-            <a:r>
-              <a:rPr lang="zh-CN" altLang="en-US" sz="2000" b="0" i="0">
-                <a:solidFill>
-                  <a:srgbClr val="000000"/>
-                </a:solidFill>
-                <a:latin typeface="Lucida Grande"/>
-                <a:ea typeface="Lucida Grande"/>
-              </a:rPr>
-              <a:t>） 可以有效增强其推理能力。然而，获得可靠和准确的推理监督仍然是一个重大挑战。我们提出了一种可扩展的方法，</a:t>
-            </a:r>
-            <a:r>
-              <a:rPr lang="zh-CN" altLang="en-US" sz="2000" b="1" i="0">
-                <a:solidFill>
-                  <a:srgbClr val="000000"/>
-                </a:solidFill>
-                <a:effectLst>
-                  <a:outerShdw blurRad="38100" dist="38100" dir="2700000" algn="tl">
-                    <a:srgbClr val="000000">
-                      <a:alpha val="43137"/>
-                    </a:srgbClr>
-                  </a:outerShdw>
-                </a:effectLst>
-                <a:latin typeface="Lucida Grande"/>
-                <a:ea typeface="Lucida Grande"/>
-              </a:rPr>
-              <a:t>利用程序执行的确定性来生成高质量的 </a:t>
-            </a:r>
-            <a:r>
-              <a:rPr lang="en-US" altLang="zh-CN" sz="2000" b="1" i="0">
-                <a:solidFill>
-                  <a:srgbClr val="000000"/>
-                </a:solidFill>
-                <a:effectLst>
-                  <a:outerShdw blurRad="38100" dist="38100" dir="2700000" algn="tl">
-                    <a:srgbClr val="000000">
-                      <a:alpha val="43137"/>
-                    </a:srgbClr>
-                  </a:outerShdw>
-                </a:effectLst>
-                <a:latin typeface="Lucida Grande"/>
-                <a:ea typeface="Lucida Grande"/>
-              </a:rPr>
-              <a:t>CoT </a:t>
-            </a:r>
-            <a:r>
-              <a:rPr lang="zh-CN" altLang="en-US" sz="2000" b="1" i="0">
-                <a:solidFill>
-                  <a:srgbClr val="000000"/>
-                </a:solidFill>
-                <a:effectLst>
-                  <a:outerShdw blurRad="38100" dist="38100" dir="2700000" algn="tl">
-                    <a:srgbClr val="000000">
-                      <a:alpha val="43137"/>
-                    </a:srgbClr>
-                  </a:outerShdw>
-                </a:effectLst>
-                <a:latin typeface="Lucida Grande"/>
-                <a:ea typeface="Lucida Grande"/>
-              </a:rPr>
-              <a:t>监督数据集</a:t>
-            </a:r>
-            <a:r>
-              <a:rPr lang="zh-CN" altLang="en-US" sz="2000" b="0" i="0">
-                <a:solidFill>
-                  <a:srgbClr val="000000"/>
-                </a:solidFill>
-                <a:latin typeface="Lucida Grande"/>
-                <a:ea typeface="Lucida Grande"/>
-              </a:rPr>
-              <a:t>。与依赖昂贵的人工注释或容易出错的 </a:t>
-            </a:r>
-            <a:r>
-              <a:rPr lang="en-US" altLang="zh-CN" sz="2000" b="0" i="0">
-                <a:solidFill>
-                  <a:srgbClr val="000000"/>
-                </a:solidFill>
-                <a:latin typeface="Lucida Grande"/>
-                <a:ea typeface="Lucida Grande"/>
-              </a:rPr>
-              <a:t>LLM </a:t>
-            </a:r>
-            <a:r>
-              <a:rPr lang="zh-CN" altLang="en-US" sz="2000" b="0" i="0">
-                <a:solidFill>
-                  <a:srgbClr val="000000"/>
-                </a:solidFill>
-                <a:latin typeface="Lucida Grande"/>
-                <a:ea typeface="Lucida Grande"/>
-              </a:rPr>
-              <a:t>生成的 </a:t>
-            </a:r>
-            <a:r>
-              <a:rPr lang="en-US" altLang="zh-CN" sz="2000" b="0" i="0">
-                <a:solidFill>
-                  <a:srgbClr val="000000"/>
-                </a:solidFill>
-                <a:latin typeface="Lucida Grande"/>
-                <a:ea typeface="Lucida Grande"/>
-              </a:rPr>
-              <a:t>CoT </a:t>
-            </a:r>
-            <a:r>
-              <a:rPr lang="zh-CN" altLang="en-US" sz="2000" b="0" i="0">
-                <a:solidFill>
-                  <a:srgbClr val="000000"/>
-                </a:solidFill>
-                <a:latin typeface="Lucida Grande"/>
-                <a:ea typeface="Lucida Grande"/>
-              </a:rPr>
-              <a:t>的现有推理数据集生成方法不同，我们的方法从代码执行中提取可验证的分步推理跟踪，并将其转换为自然语言 </a:t>
-            </a:r>
-            <a:r>
-              <a:rPr lang="en-US" altLang="zh-CN" sz="2000" b="0" i="0">
-                <a:solidFill>
-                  <a:srgbClr val="000000"/>
-                </a:solidFill>
-                <a:latin typeface="Lucida Grande"/>
-                <a:ea typeface="Lucida Grande"/>
-              </a:rPr>
-              <a:t>CoT </a:t>
-            </a:r>
-            <a:r>
-              <a:rPr lang="zh-CN" altLang="en-US" sz="2000" b="0" i="0">
-                <a:solidFill>
-                  <a:srgbClr val="000000"/>
-                </a:solidFill>
-                <a:latin typeface="Lucida Grande"/>
-                <a:ea typeface="Lucida Grande"/>
-              </a:rPr>
-              <a:t>推理。跨领域推理基准的实验表明，我们的方法有效地为</a:t>
-            </a:r>
-            <a:r>
-              <a:rPr lang="en-US" altLang="zh-CN" sz="2000" b="0" i="0">
-                <a:solidFill>
-                  <a:srgbClr val="000000"/>
-                </a:solidFill>
-                <a:latin typeface="Lucida Grande"/>
-                <a:ea typeface="Lucida Grande"/>
-              </a:rPr>
-              <a:t>LLM</a:t>
-            </a:r>
-            <a:r>
-              <a:rPr lang="zh-CN" altLang="en-US" sz="2000" b="0" i="0">
-                <a:solidFill>
-                  <a:srgbClr val="000000"/>
-                </a:solidFill>
-                <a:latin typeface="Lucida Grande"/>
-                <a:ea typeface="Lucida Grande"/>
-              </a:rPr>
-              <a:t>提供了跨不同任务的可转移推理能力。此外，消融研究验证了我们的方法</a:t>
-            </a:r>
-            <a:r>
-              <a:rPr lang="zh-CN" altLang="en-US" sz="2000" b="1" i="0">
-                <a:solidFill>
-                  <a:srgbClr val="000000"/>
-                </a:solidFill>
-                <a:latin typeface="Lucida Grande"/>
-                <a:ea typeface="Lucida Grande"/>
-              </a:rPr>
-              <a:t>可以产生高度准确的推理数据，并通过减少无意义的重复和过度思考来减少推理过程中的总体标记长度</a:t>
-            </a:r>
-            <a:r>
-              <a:rPr lang="zh-CN" altLang="en-US" sz="2000" b="0" i="0">
-                <a:solidFill>
-                  <a:srgbClr val="000000"/>
-                </a:solidFill>
-                <a:latin typeface="Lucida Grande"/>
-                <a:ea typeface="Lucida Grande"/>
-              </a:rPr>
+              <a:rPr lang="zh-CN" altLang="en-US" sz="2000"/>
+              <a:t>总结：</a:t>
+            </a:r>
+            <a:r>
+              <a:rPr lang="en-US" altLang="zh-CN" sz="2000"/>
+              <a:t>AI</a:t>
+            </a:r>
+            <a:r>
+              <a:rPr lang="zh-CN" altLang="en-US" sz="2000"/>
+              <a:t>确实很好的理解了逆向思考的这一需求，且能完整走通逆向思考步骤，给出合适的</a:t>
+            </a:r>
+            <a:r>
+              <a:rPr lang="en-US" altLang="zh-CN" sz="2000"/>
+              <a:t>cot</a:t>
+            </a:r>
+            <a:r>
+              <a:rPr lang="zh-CN" altLang="en-US" sz="2000"/>
               <a:t>。</a:t>
             </a:r>
-            <a:endParaRPr lang="zh-CN" altLang="en-US" sz="2000" b="0" i="0">
-              <a:solidFill>
-                <a:srgbClr val="000000"/>
-              </a:solidFill>
-              <a:latin typeface="Lucida Grande"/>
-              <a:ea typeface="Lucida Grande"/>
-            </a:endParaRPr>
-          </a:p>
-        </p:txBody>
-      </p:sp>
-      <p:sp>
-        <p:nvSpPr>
-          <p:cNvPr id="7" name="文本框 6"/>
-          <p:cNvSpPr txBox="1"/>
-          <p:nvPr/>
-        </p:nvSpPr>
-        <p:spPr>
-          <a:xfrm>
-            <a:off x="6535420" y="5716270"/>
-            <a:ext cx="5656580" cy="1189355"/>
-          </a:xfrm>
-          <a:prstGeom prst="rect">
-            <a:avLst/>
-          </a:prstGeom>
-          <a:noFill/>
-        </p:spPr>
-        <p:txBody>
-          <a:bodyPr wrap="square" rtlCol="0">
-            <a:noAutofit/>
-          </a:bodyPr>
-          <a:p>
-            <a:r>
-              <a:rPr lang="en-US" altLang="zh-CN" sz="7200" b="1">
-                <a:ln w="10160">
-                  <a:solidFill>
-                    <a:schemeClr val="tx1">
-                      <a:lumMod val="75000"/>
-                      <a:lumOff val="25000"/>
-                    </a:schemeClr>
-                  </a:solidFill>
-                  <a:prstDash val="solid"/>
-                </a:ln>
-                <a:solidFill>
-                  <a:srgbClr val="FFFFFF"/>
-                </a:solidFill>
-                <a:effectLst>
-                  <a:outerShdw blurRad="38100" dist="22860" dir="5400000" algn="tl" rotWithShape="0">
-                    <a:srgbClr val="000000">
-                      <a:alpha val="30000"/>
-                    </a:srgbClr>
-                  </a:outerShdw>
-                </a:effectLst>
-              </a:rPr>
-              <a:t>EMNLP 2025</a:t>
-            </a:r>
-            <a:endParaRPr lang="en-US" altLang="zh-CN" sz="7200" b="1">
-              <a:ln w="10160">
-                <a:solidFill>
-                  <a:schemeClr val="tx1">
-                    <a:lumMod val="75000"/>
-                    <a:lumOff val="25000"/>
-                  </a:schemeClr>
-                </a:solidFill>
-                <a:prstDash val="solid"/>
-              </a:ln>
-              <a:solidFill>
-                <a:srgbClr val="FFFFFF"/>
-              </a:solidFill>
-              <a:effectLst>
-                <a:outerShdw blurRad="38100" dist="22860" dir="5400000" algn="tl" rotWithShape="0">
-                  <a:srgbClr val="000000">
-                    <a:alpha val="30000"/>
-                  </a:srgbClr>
-                </a:outerShdw>
-              </a:effectLst>
-            </a:endParaRPr>
+            <a:endParaRPr lang="zh-CN" altLang="en-US" sz="2000"/>
+          </a:p>
+          <a:p>
+            <a:pPr>
+              <a:lnSpc>
+                <a:spcPct val="200000"/>
+              </a:lnSpc>
+            </a:pPr>
+            <a:r>
+              <a:rPr lang="zh-CN" altLang="en-US" sz="2000"/>
+              <a:t>但有明显缺陷是其容易陷入思维死循环，且最终</a:t>
+            </a:r>
+            <a:r>
+              <a:rPr lang="en-US" altLang="zh-CN" sz="2000"/>
+              <a:t>cot</a:t>
+            </a:r>
+            <a:r>
+              <a:rPr lang="zh-CN" altLang="en-US" sz="2000"/>
+              <a:t>不如直接硬编码</a:t>
+            </a:r>
+            <a:r>
+              <a:rPr lang="en-US" altLang="zh-CN" sz="2000"/>
+              <a:t>cot</a:t>
+            </a:r>
+            <a:r>
+              <a:rPr lang="zh-CN" altLang="en-US" sz="2000"/>
+              <a:t>简洁明了。</a:t>
+            </a:r>
+            <a:r>
+              <a:rPr lang="en-US" altLang="zh-CN" sz="2000"/>
+              <a:t>ai cot</a:t>
+            </a:r>
+            <a:r>
+              <a:rPr lang="zh-CN" altLang="en-US" sz="2000"/>
+              <a:t>更</a:t>
+            </a:r>
+            <a:r>
+              <a:rPr lang="zh-CN" altLang="en-US" sz="2000"/>
+              <a:t>冗杂。</a:t>
+            </a:r>
+            <a:endParaRPr lang="zh-CN" altLang="en-US" sz="2000"/>
+          </a:p>
+          <a:p>
+            <a:pPr>
+              <a:lnSpc>
+                <a:spcPct val="200000"/>
+              </a:lnSpc>
+            </a:pPr>
+            <a:endParaRPr lang="zh-CN" altLang="en-US" sz="2000"/>
+          </a:p>
+          <a:p>
+            <a:pPr>
+              <a:lnSpc>
+                <a:spcPct val="200000"/>
+              </a:lnSpc>
+            </a:pPr>
+            <a:r>
+              <a:rPr lang="zh-CN" altLang="en-US" sz="2000"/>
+              <a:t>解决方案思考：</a:t>
+            </a:r>
+            <a:endParaRPr lang="zh-CN" altLang="en-US" sz="2000"/>
+          </a:p>
+          <a:p>
+            <a:pPr>
+              <a:lnSpc>
+                <a:spcPct val="200000"/>
+              </a:lnSpc>
+            </a:pPr>
+            <a:r>
+              <a:rPr lang="en-US" altLang="zh-CN" sz="2000"/>
+              <a:t>1. </a:t>
+            </a:r>
+            <a:r>
+              <a:rPr lang="zh-CN" altLang="en-US" sz="2000"/>
+              <a:t>限制</a:t>
+            </a:r>
+            <a:r>
+              <a:rPr lang="en-US" altLang="zh-CN" sz="2000"/>
+              <a:t>ai</a:t>
+            </a:r>
+            <a:r>
+              <a:rPr lang="zh-CN" altLang="en-US" sz="2000"/>
+              <a:t>回答长度、要求其用简短的话回复（面临丢失信息跳</a:t>
+            </a:r>
+            <a:r>
+              <a:rPr lang="zh-CN" altLang="en-US" sz="2000"/>
+              <a:t>步骤风险）</a:t>
+            </a:r>
+            <a:endParaRPr lang="zh-CN" altLang="en-US" sz="2000"/>
+          </a:p>
+          <a:p>
+            <a:pPr>
+              <a:lnSpc>
+                <a:spcPct val="200000"/>
+              </a:lnSpc>
+            </a:pPr>
+            <a:r>
+              <a:rPr lang="en-US" altLang="zh-CN" sz="2000"/>
+              <a:t>2. </a:t>
+            </a:r>
+            <a:r>
+              <a:rPr lang="zh-CN" altLang="en-US" sz="2000"/>
+              <a:t>调用能力更高</a:t>
+            </a:r>
+            <a:r>
+              <a:rPr lang="en-US" altLang="zh-CN" sz="2000"/>
+              <a:t>ai</a:t>
+            </a:r>
+            <a:r>
+              <a:rPr lang="zh-CN" altLang="en-US" sz="2000"/>
+              <a:t>尝试，目前是校园算力平台中开源</a:t>
+            </a:r>
+            <a:r>
+              <a:rPr lang="en-US" altLang="zh-CN" sz="2000"/>
+              <a:t>qwen</a:t>
+            </a:r>
+            <a:endParaRPr lang="en-US" altLang="zh-CN" sz="2000"/>
           </a:p>
         </p:txBody>
       </p:sp>
@@ -5562,211 +5300,320 @@
           </a:p>
         </p:txBody>
       </p:sp>
-      <p:pic>
-        <p:nvPicPr>
-          <p:cNvPr id="5" name="图片 4"/>
-          <p:cNvPicPr>
-            <a:picLocks noChangeAspect="1"/>
-          </p:cNvPicPr>
-          <p:nvPr/>
-        </p:nvPicPr>
-        <p:blipFill>
-          <a:blip r:embed="rId1"/>
-          <a:stretch>
-            <a:fillRect/>
-          </a:stretch>
-        </p:blipFill>
-        <p:spPr>
-          <a:xfrm>
-            <a:off x="220980" y="725805"/>
-            <a:ext cx="11802745" cy="2380615"/>
-          </a:xfrm>
-          <a:prstGeom prst="rect">
-            <a:avLst/>
-          </a:prstGeom>
-        </p:spPr>
-      </p:pic>
-      <p:sp>
-        <p:nvSpPr>
-          <p:cNvPr id="6" name="矩形 5"/>
-          <p:cNvSpPr/>
-          <p:nvPr/>
-        </p:nvSpPr>
-        <p:spPr>
-          <a:xfrm>
-            <a:off x="874395" y="3291205"/>
-            <a:ext cx="4509135" cy="3348990"/>
-          </a:xfrm>
-          <a:prstGeom prst="rect">
-            <a:avLst/>
-          </a:prstGeom>
-        </p:spPr>
-        <p:style>
-          <a:lnRef idx="2">
-            <a:schemeClr val="accent1"/>
-          </a:lnRef>
-          <a:fillRef idx="0">
-            <a:srgbClr val="FFFFFF"/>
-          </a:fillRef>
-          <a:effectRef idx="0">
-            <a:srgbClr val="FFFFFF"/>
-          </a:effectRef>
-          <a:fontRef idx="minor">
-            <a:schemeClr val="tx1"/>
-          </a:fontRef>
-        </p:style>
-        <p:txBody>
-          <a:bodyPr rtlCol="0" anchor="ctr"/>
-          <a:p>
-            <a:pPr algn="ctr"/>
-            <a:endParaRPr lang="zh-CN" altLang="en-US"/>
-          </a:p>
-        </p:txBody>
-      </p:sp>
-      <p:sp>
-        <p:nvSpPr>
-          <p:cNvPr id="9" name="矩形 8"/>
-          <p:cNvSpPr/>
-          <p:nvPr/>
-        </p:nvSpPr>
-        <p:spPr>
-          <a:xfrm>
-            <a:off x="2398395" y="3291205"/>
-            <a:ext cx="1577975" cy="447040"/>
-          </a:xfrm>
-          <a:prstGeom prst="rect">
-            <a:avLst/>
-          </a:prstGeom>
-          <a:solidFill>
-            <a:schemeClr val="tx2">
-              <a:lumMod val="50000"/>
-              <a:lumOff val="50000"/>
-            </a:schemeClr>
-          </a:solidFill>
-        </p:spPr>
-        <p:style>
-          <a:lnRef idx="2">
-            <a:schemeClr val="accent1">
-              <a:lumMod val="75000"/>
-            </a:schemeClr>
-          </a:lnRef>
-          <a:fillRef idx="1">
-            <a:schemeClr val="accent1"/>
-          </a:fillRef>
-          <a:effectRef idx="0">
-            <a:srgbClr val="FFFFFF"/>
-          </a:effectRef>
-          <a:fontRef idx="minor">
-            <a:schemeClr val="lt1"/>
-          </a:fontRef>
-        </p:style>
-        <p:txBody>
-          <a:bodyPr rtlCol="0" anchor="ctr"/>
-          <a:p>
-            <a:pPr algn="ctr"/>
-            <a:r>
-              <a:rPr lang="en-US"/>
-              <a:t>OURS</a:t>
-            </a:r>
-            <a:endParaRPr lang="en-US"/>
-          </a:p>
-        </p:txBody>
-      </p:sp>
-      <p:sp>
-        <p:nvSpPr>
-          <p:cNvPr id="10" name="文本框 9"/>
+      <p:sp>
+        <p:nvSpPr>
+          <p:cNvPr id="3" name="文本框 2"/>
           <p:cNvSpPr txBox="1"/>
           <p:nvPr/>
         </p:nvSpPr>
         <p:spPr>
           <a:xfrm>
-            <a:off x="1136650" y="3945255"/>
-            <a:ext cx="4109085" cy="368300"/>
+            <a:off x="344805" y="970915"/>
+            <a:ext cx="10856595" cy="736600"/>
           </a:xfrm>
           <a:prstGeom prst="rect">
             <a:avLst/>
           </a:prstGeom>
-          <a:noFill/>
-        </p:spPr>
-        <p:txBody>
-          <a:bodyPr wrap="square" rtlCol="0">
+          <a:ln>
+            <a:solidFill>
+              <a:schemeClr val="bg1">
+                <a:lumMod val="85000"/>
+              </a:schemeClr>
+            </a:solidFill>
+          </a:ln>
+        </p:spPr>
+        <p:txBody>
+          <a:bodyPr wrap="square">
+            <a:noAutofit/>
+          </a:bodyPr>
+          <a:p>
+            <a:pPr marL="95250" indent="0">
+              <a:lnSpc>
+                <a:spcPct val="150000"/>
+              </a:lnSpc>
+              <a:spcBef>
+                <a:spcPts val="200"/>
+              </a:spcBef>
+              <a:spcAft>
+                <a:spcPts val="400"/>
+              </a:spcAft>
+            </a:pPr>
+            <a:r>
+              <a:rPr lang="en-US" altLang="zh-CN" sz="2800" b="1" i="0">
+                <a:solidFill>
+                  <a:srgbClr val="000000"/>
+                </a:solidFill>
+                <a:latin typeface="黑体" panose="02010609060101010101" charset="-122"/>
+                <a:ea typeface="黑体" panose="02010609060101010101" charset="-122"/>
+              </a:rPr>
+              <a:t>Code Execution as Grounded Supervision for LLM Reasoning</a:t>
+            </a:r>
+            <a:endParaRPr lang="en-US" altLang="zh-CN" sz="2800" b="1" i="0">
+              <a:solidFill>
+                <a:srgbClr val="000000"/>
+              </a:solidFill>
+              <a:latin typeface="黑体" panose="02010609060101010101" charset="-122"/>
+              <a:ea typeface="黑体" panose="02010609060101010101" charset="-122"/>
+            </a:endParaRPr>
+          </a:p>
+        </p:txBody>
+      </p:sp>
+      <p:sp>
+        <p:nvSpPr>
+          <p:cNvPr id="4" name="文本框 3"/>
+          <p:cNvSpPr txBox="1"/>
+          <p:nvPr/>
+        </p:nvSpPr>
+        <p:spPr>
+          <a:xfrm>
+            <a:off x="344805" y="2164715"/>
+            <a:ext cx="10856595" cy="3322955"/>
+          </a:xfrm>
+          <a:prstGeom prst="rect">
+            <a:avLst/>
+          </a:prstGeom>
+        </p:spPr>
+        <p:txBody>
+          <a:bodyPr wrap="square">
             <a:spAutoFit/>
           </a:bodyPr>
           <a:p>
-            <a:pPr algn="ctr"/>
-            <a:r>
-              <a:rPr lang="zh-CN" altLang="en-US"/>
-              <a:t>真实可运行</a:t>
-            </a:r>
-            <a:r>
-              <a:rPr lang="en-US" altLang="zh-CN"/>
-              <a:t>Code+</a:t>
-            </a:r>
-            <a:r>
-              <a:rPr lang="zh-CN" altLang="en-US"/>
-              <a:t>目标行号</a:t>
-            </a:r>
-            <a:r>
-              <a:rPr lang="en-US" altLang="zh-CN"/>
-              <a:t>+</a:t>
-            </a:r>
-            <a:r>
-              <a:rPr lang="zh-CN" altLang="en-US"/>
-              <a:t>目标</a:t>
-            </a:r>
-            <a:r>
-              <a:rPr lang="zh-CN" altLang="en-US"/>
-              <a:t>变量</a:t>
-            </a:r>
-            <a:endParaRPr lang="zh-CN" altLang="en-US"/>
-          </a:p>
-        </p:txBody>
-      </p:sp>
-      <p:cxnSp>
-        <p:nvCxnSpPr>
-          <p:cNvPr id="11" name="直接箭头连接符 10"/>
-          <p:cNvCxnSpPr>
-            <a:stCxn id="10" idx="2"/>
-          </p:cNvCxnSpPr>
-          <p:nvPr/>
-        </p:nvCxnSpPr>
-        <p:spPr>
-          <a:xfrm>
-            <a:off x="3191510" y="4313555"/>
-            <a:ext cx="3810" cy="365125"/>
-          </a:xfrm>
-          <a:prstGeom prst="straightConnector1">
-            <a:avLst/>
-          </a:prstGeom>
-          <a:ln>
-            <a:tailEnd type="arrow"/>
-          </a:ln>
-        </p:spPr>
-        <p:style>
-          <a:lnRef idx="2">
-            <a:schemeClr val="accent1"/>
-          </a:lnRef>
-          <a:fillRef idx="0">
-            <a:schemeClr val="accent1"/>
-          </a:fillRef>
-          <a:effectRef idx="1">
-            <a:schemeClr val="accent1"/>
-          </a:effectRef>
-          <a:fontRef idx="minor">
-            <a:schemeClr val="tx1"/>
-          </a:fontRef>
-        </p:style>
-      </p:cxnSp>
-      <p:sp>
-        <p:nvSpPr>
-          <p:cNvPr id="12" name="文本框 11"/>
+            <a:pPr marL="0" indent="0">
+              <a:lnSpc>
+                <a:spcPct val="150000"/>
+              </a:lnSpc>
+            </a:pPr>
+            <a:r>
+              <a:rPr lang="zh-CN" altLang="en-US" sz="2000" b="0" i="0">
+                <a:solidFill>
+                  <a:srgbClr val="000000"/>
+                </a:solidFill>
+                <a:latin typeface="Lucida Grande"/>
+                <a:ea typeface="Lucida Grande"/>
+              </a:rPr>
+              <a:t>事实证明，通过思维链 （</a:t>
+            </a:r>
+            <a:r>
+              <a:rPr lang="en-US" altLang="zh-CN" sz="2000" b="0" i="0">
+                <a:solidFill>
+                  <a:srgbClr val="000000"/>
+                </a:solidFill>
+                <a:latin typeface="Lucida Grande"/>
+                <a:ea typeface="Lucida Grande"/>
+              </a:rPr>
+              <a:t>CoT</a:t>
+            </a:r>
+            <a:r>
+              <a:rPr lang="zh-CN" altLang="en-US" sz="2000" b="0" i="0">
+                <a:solidFill>
+                  <a:srgbClr val="000000"/>
+                </a:solidFill>
+                <a:latin typeface="Lucida Grande"/>
+                <a:ea typeface="Lucida Grande"/>
+              </a:rPr>
+              <a:t>） 监督训练大型语言模型 （</a:t>
+            </a:r>
+            <a:r>
+              <a:rPr lang="en-US" altLang="zh-CN" sz="2000" b="0" i="0">
+                <a:solidFill>
+                  <a:srgbClr val="000000"/>
+                </a:solidFill>
+                <a:latin typeface="Lucida Grande"/>
+                <a:ea typeface="Lucida Grande"/>
+              </a:rPr>
+              <a:t>LLM</a:t>
+            </a:r>
+            <a:r>
+              <a:rPr lang="zh-CN" altLang="en-US" sz="2000" b="0" i="0">
+                <a:solidFill>
+                  <a:srgbClr val="000000"/>
+                </a:solidFill>
+                <a:latin typeface="Lucida Grande"/>
+                <a:ea typeface="Lucida Grande"/>
+              </a:rPr>
+              <a:t>） 可以有效增强其推理能力。然而，获得可靠和准确的推理监督仍然是一个重大挑战。我们提出了一种可扩展的方法，</a:t>
+            </a:r>
+            <a:r>
+              <a:rPr lang="zh-CN" altLang="en-US" sz="2000" b="1" i="0">
+                <a:solidFill>
+                  <a:srgbClr val="000000"/>
+                </a:solidFill>
+                <a:effectLst>
+                  <a:outerShdw blurRad="38100" dist="38100" dir="2700000" algn="tl">
+                    <a:srgbClr val="000000">
+                      <a:alpha val="43137"/>
+                    </a:srgbClr>
+                  </a:outerShdw>
+                </a:effectLst>
+                <a:latin typeface="Lucida Grande"/>
+                <a:ea typeface="Lucida Grande"/>
+              </a:rPr>
+              <a:t>利用程序执行的确定性来生成高质量的 </a:t>
+            </a:r>
+            <a:r>
+              <a:rPr lang="en-US" altLang="zh-CN" sz="2000" b="1" i="0">
+                <a:solidFill>
+                  <a:srgbClr val="000000"/>
+                </a:solidFill>
+                <a:effectLst>
+                  <a:outerShdw blurRad="38100" dist="38100" dir="2700000" algn="tl">
+                    <a:srgbClr val="000000">
+                      <a:alpha val="43137"/>
+                    </a:srgbClr>
+                  </a:outerShdw>
+                </a:effectLst>
+                <a:latin typeface="Lucida Grande"/>
+                <a:ea typeface="Lucida Grande"/>
+              </a:rPr>
+              <a:t>CoT </a:t>
+            </a:r>
+            <a:r>
+              <a:rPr lang="zh-CN" altLang="en-US" sz="2000" b="1" i="0">
+                <a:solidFill>
+                  <a:srgbClr val="000000"/>
+                </a:solidFill>
+                <a:effectLst>
+                  <a:outerShdw blurRad="38100" dist="38100" dir="2700000" algn="tl">
+                    <a:srgbClr val="000000">
+                      <a:alpha val="43137"/>
+                    </a:srgbClr>
+                  </a:outerShdw>
+                </a:effectLst>
+                <a:latin typeface="Lucida Grande"/>
+                <a:ea typeface="Lucida Grande"/>
+              </a:rPr>
+              <a:t>监督数据集</a:t>
+            </a:r>
+            <a:r>
+              <a:rPr lang="zh-CN" altLang="en-US" sz="2000" b="0" i="0">
+                <a:solidFill>
+                  <a:srgbClr val="000000"/>
+                </a:solidFill>
+                <a:latin typeface="Lucida Grande"/>
+                <a:ea typeface="Lucida Grande"/>
+              </a:rPr>
+              <a:t>。与依赖昂贵的人工注释或容易出错的 </a:t>
+            </a:r>
+            <a:r>
+              <a:rPr lang="en-US" altLang="zh-CN" sz="2000" b="0" i="0">
+                <a:solidFill>
+                  <a:srgbClr val="000000"/>
+                </a:solidFill>
+                <a:latin typeface="Lucida Grande"/>
+                <a:ea typeface="Lucida Grande"/>
+              </a:rPr>
+              <a:t>LLM </a:t>
+            </a:r>
+            <a:r>
+              <a:rPr lang="zh-CN" altLang="en-US" sz="2000" b="0" i="0">
+                <a:solidFill>
+                  <a:srgbClr val="000000"/>
+                </a:solidFill>
+                <a:latin typeface="Lucida Grande"/>
+                <a:ea typeface="Lucida Grande"/>
+              </a:rPr>
+              <a:t>生成的 </a:t>
+            </a:r>
+            <a:r>
+              <a:rPr lang="en-US" altLang="zh-CN" sz="2000" b="0" i="0">
+                <a:solidFill>
+                  <a:srgbClr val="000000"/>
+                </a:solidFill>
+                <a:latin typeface="Lucida Grande"/>
+                <a:ea typeface="Lucida Grande"/>
+              </a:rPr>
+              <a:t>CoT </a:t>
+            </a:r>
+            <a:r>
+              <a:rPr lang="zh-CN" altLang="en-US" sz="2000" b="0" i="0">
+                <a:solidFill>
+                  <a:srgbClr val="000000"/>
+                </a:solidFill>
+                <a:latin typeface="Lucida Grande"/>
+                <a:ea typeface="Lucida Grande"/>
+              </a:rPr>
+              <a:t>的现有推理数据集生成方法不同，我们的方法从代码执行中提取可验证的分步推理跟踪，并将其转换为自然语言 </a:t>
+            </a:r>
+            <a:r>
+              <a:rPr lang="en-US" altLang="zh-CN" sz="2000" b="0" i="0">
+                <a:solidFill>
+                  <a:srgbClr val="000000"/>
+                </a:solidFill>
+                <a:latin typeface="Lucida Grande"/>
+                <a:ea typeface="Lucida Grande"/>
+              </a:rPr>
+              <a:t>CoT </a:t>
+            </a:r>
+            <a:r>
+              <a:rPr lang="zh-CN" altLang="en-US" sz="2000" b="0" i="0">
+                <a:solidFill>
+                  <a:srgbClr val="000000"/>
+                </a:solidFill>
+                <a:latin typeface="Lucida Grande"/>
+                <a:ea typeface="Lucida Grande"/>
+              </a:rPr>
+              <a:t>推理。跨领域推理基准的实验表明，我们的方法有效地为</a:t>
+            </a:r>
+            <a:r>
+              <a:rPr lang="en-US" altLang="zh-CN" sz="2000" b="0" i="0">
+                <a:solidFill>
+                  <a:srgbClr val="000000"/>
+                </a:solidFill>
+                <a:latin typeface="Lucida Grande"/>
+                <a:ea typeface="Lucida Grande"/>
+              </a:rPr>
+              <a:t>LLM</a:t>
+            </a:r>
+            <a:r>
+              <a:rPr lang="zh-CN" altLang="en-US" sz="2000" b="0" i="0">
+                <a:solidFill>
+                  <a:srgbClr val="000000"/>
+                </a:solidFill>
+                <a:latin typeface="Lucida Grande"/>
+                <a:ea typeface="Lucida Grande"/>
+              </a:rPr>
+              <a:t>提供了跨不同任务的可转移推理能力。此外，消融研究验证了我们的方法</a:t>
+            </a:r>
+            <a:r>
+              <a:rPr lang="zh-CN" altLang="en-US" sz="2000" b="1" i="0">
+                <a:solidFill>
+                  <a:srgbClr val="000000"/>
+                </a:solidFill>
+                <a:latin typeface="Lucida Grande"/>
+                <a:ea typeface="Lucida Grande"/>
+              </a:rPr>
+              <a:t>可以产生高度准确的推理数据，并通过减少无意义的重复和过度思考来减少推理过程中的总体标记长度</a:t>
+            </a:r>
+            <a:r>
+              <a:rPr lang="zh-CN" altLang="en-US" sz="2000" b="0" i="0">
+                <a:solidFill>
+                  <a:srgbClr val="000000"/>
+                </a:solidFill>
+                <a:latin typeface="Lucida Grande"/>
+                <a:ea typeface="Lucida Grande"/>
+              </a:rPr>
+              <a:t>。</a:t>
+            </a:r>
+            <a:endParaRPr lang="zh-CN" altLang="en-US" sz="2000" b="0" i="0">
+              <a:solidFill>
+                <a:srgbClr val="000000"/>
+              </a:solidFill>
+              <a:latin typeface="Lucida Grande"/>
+              <a:ea typeface="Lucida Grande"/>
+            </a:endParaRPr>
+          </a:p>
+        </p:txBody>
+      </p:sp>
+      <p:sp>
+        <p:nvSpPr>
+          <p:cNvPr id="7" name="文本框 6"/>
           <p:cNvSpPr txBox="1"/>
           <p:nvPr/>
         </p:nvSpPr>
         <p:spPr>
           <a:xfrm>
-            <a:off x="1696085" y="4676775"/>
-            <a:ext cx="2982595" cy="368300"/>
+            <a:off x="6535420" y="5716270"/>
+            <a:ext cx="5656580" cy="1189355"/>
           </a:xfrm>
           <a:prstGeom prst="rect">
             <a:avLst/>
@@ -5775,639 +5622,54 @@
         </p:spPr>
         <p:txBody>
           <a:bodyPr wrap="square" rtlCol="0">
-            <a:spAutoFit/>
+            <a:noAutofit/>
           </a:bodyPr>
           <a:p>
-            <a:pPr algn="ctr"/>
-            <a:r>
-              <a:rPr lang="zh-CN" altLang="en-US"/>
-              <a:t>代码执行轨迹</a:t>
-            </a:r>
-            <a:r>
-              <a:rPr lang="en-US" altLang="zh-CN"/>
-              <a:t> </a:t>
-            </a:r>
-            <a:r>
-              <a:rPr lang="en-US" altLang="zh-CN"/>
-              <a:t>trace</a:t>
-            </a:r>
-            <a:endParaRPr lang="en-US" altLang="zh-CN"/>
-          </a:p>
-        </p:txBody>
-      </p:sp>
-      <p:cxnSp>
-        <p:nvCxnSpPr>
-          <p:cNvPr id="13" name="直接箭头连接符 12"/>
-          <p:cNvCxnSpPr>
-            <a:stCxn id="12" idx="2"/>
-          </p:cNvCxnSpPr>
-          <p:nvPr/>
-        </p:nvCxnSpPr>
-        <p:spPr>
-          <a:xfrm>
-            <a:off x="3187700" y="5045075"/>
-            <a:ext cx="3810" cy="365125"/>
-          </a:xfrm>
-          <a:prstGeom prst="straightConnector1">
-            <a:avLst/>
-          </a:prstGeom>
-          <a:ln>
-            <a:tailEnd type="arrow"/>
-          </a:ln>
-        </p:spPr>
-        <p:style>
-          <a:lnRef idx="2">
-            <a:schemeClr val="accent1"/>
-          </a:lnRef>
-          <a:fillRef idx="0">
-            <a:schemeClr val="accent1"/>
-          </a:fillRef>
-          <a:effectRef idx="1">
-            <a:schemeClr val="accent1"/>
-          </a:effectRef>
-          <a:fontRef idx="minor">
-            <a:schemeClr val="tx1"/>
-          </a:fontRef>
-        </p:style>
-      </p:cxnSp>
-      <p:sp>
-        <p:nvSpPr>
-          <p:cNvPr id="14" name="文本框 13"/>
-          <p:cNvSpPr txBox="1"/>
-          <p:nvPr/>
-        </p:nvSpPr>
-        <p:spPr>
-          <a:xfrm>
-            <a:off x="1696085" y="5408295"/>
-            <a:ext cx="2982595" cy="368300"/>
-          </a:xfrm>
-          <a:prstGeom prst="rect">
-            <a:avLst/>
-          </a:prstGeom>
-          <a:noFill/>
-        </p:spPr>
-        <p:txBody>
-          <a:bodyPr wrap="square" rtlCol="0">
-            <a:spAutoFit/>
-          </a:bodyPr>
-          <a:p>
-            <a:pPr algn="ctr"/>
-            <a:r>
-              <a:rPr lang="zh-CN" altLang="en-US"/>
-              <a:t>剪枝后的执行流</a:t>
-            </a:r>
-            <a:r>
-              <a:rPr lang="en-US" altLang="zh-CN"/>
-              <a:t> trim-trace</a:t>
-            </a:r>
-            <a:endParaRPr lang="en-US" altLang="zh-CN"/>
-          </a:p>
-        </p:txBody>
-      </p:sp>
-      <p:cxnSp>
-        <p:nvCxnSpPr>
-          <p:cNvPr id="15" name="直接箭头连接符 14"/>
-          <p:cNvCxnSpPr>
-            <a:stCxn id="14" idx="2"/>
-          </p:cNvCxnSpPr>
-          <p:nvPr/>
-        </p:nvCxnSpPr>
-        <p:spPr>
-          <a:xfrm>
-            <a:off x="3187700" y="5776595"/>
-            <a:ext cx="3810" cy="365125"/>
-          </a:xfrm>
-          <a:prstGeom prst="straightConnector1">
-            <a:avLst/>
-          </a:prstGeom>
-          <a:ln>
-            <a:tailEnd type="arrow"/>
-          </a:ln>
-        </p:spPr>
-        <p:style>
-          <a:lnRef idx="2">
-            <a:schemeClr val="accent1"/>
-          </a:lnRef>
-          <a:fillRef idx="0">
-            <a:schemeClr val="accent1"/>
-          </a:fillRef>
-          <a:effectRef idx="1">
-            <a:schemeClr val="accent1"/>
-          </a:effectRef>
-          <a:fontRef idx="minor">
-            <a:schemeClr val="tx1"/>
-          </a:fontRef>
-        </p:style>
-      </p:cxnSp>
-      <p:sp>
-        <p:nvSpPr>
-          <p:cNvPr id="16" name="文本框 15"/>
-          <p:cNvSpPr txBox="1"/>
-          <p:nvPr/>
-        </p:nvSpPr>
-        <p:spPr>
-          <a:xfrm>
-            <a:off x="1696085" y="6139815"/>
-            <a:ext cx="2982595" cy="368300"/>
-          </a:xfrm>
-          <a:prstGeom prst="rect">
-            <a:avLst/>
-          </a:prstGeom>
-          <a:noFill/>
-        </p:spPr>
-        <p:txBody>
-          <a:bodyPr wrap="square" rtlCol="0">
-            <a:spAutoFit/>
-          </a:bodyPr>
-          <a:p>
-            <a:pPr algn="ctr"/>
-            <a:r>
-              <a:rPr lang="en-US" altLang="zh-CN"/>
-              <a:t>AST</a:t>
-            </a:r>
-            <a:r>
-              <a:rPr lang="zh-CN" altLang="en-US"/>
-              <a:t>模板匹配逻辑得到</a:t>
-            </a:r>
-            <a:r>
-              <a:rPr lang="en-US" altLang="zh-CN"/>
-              <a:t> </a:t>
-            </a:r>
-            <a:r>
-              <a:rPr lang="en-US" altLang="zh-CN"/>
-              <a:t>COT</a:t>
-            </a:r>
-            <a:endParaRPr lang="en-US" altLang="zh-CN"/>
-          </a:p>
-        </p:txBody>
-      </p:sp>
-      <p:sp>
-        <p:nvSpPr>
-          <p:cNvPr id="17" name="矩形 16"/>
-          <p:cNvSpPr/>
-          <p:nvPr/>
-        </p:nvSpPr>
-        <p:spPr>
-          <a:xfrm>
-            <a:off x="6658610" y="3291205"/>
-            <a:ext cx="4509135" cy="3348990"/>
-          </a:xfrm>
-          <a:prstGeom prst="rect">
-            <a:avLst/>
-          </a:prstGeom>
-          <a:noFill/>
-          <a:ln>
-            <a:solidFill>
-              <a:schemeClr val="accent2"/>
-            </a:solidFill>
-          </a:ln>
-          <a:extLst>
-            <a:ext uri="{909E8E84-426E-40DD-AFC4-6F175D3DCCD1}">
-              <a14:hiddenFill xmlns:a14="http://schemas.microsoft.com/office/drawing/2010/main">
+            <a:r>
+              <a:rPr lang="en-US" altLang="zh-CN" sz="7200" b="1">
+                <a:ln w="10160">
+                  <a:solidFill>
+                    <a:schemeClr val="tx1">
+                      <a:lumMod val="75000"/>
+                      <a:lumOff val="25000"/>
+                    </a:schemeClr>
+                  </a:solidFill>
+                  <a:prstDash val="solid"/>
+                </a:ln>
                 <a:solidFill>
-                  <a:schemeClr val="accent2">
-                    <a:lumMod val="40000"/>
-                    <a:lumOff val="60000"/>
+                  <a:srgbClr val="FFFFFF"/>
+                </a:solidFill>
+                <a:effectLst>
+                  <a:outerShdw blurRad="38100" dist="22860" dir="5400000" algn="tl" rotWithShape="0">
+                    <a:srgbClr val="000000">
+                      <a:alpha val="30000"/>
+                    </a:srgbClr>
+                  </a:outerShdw>
+                </a:effectLst>
+              </a:rPr>
+              <a:t>EMNLP 2025</a:t>
+            </a:r>
+            <a:endParaRPr lang="en-US" altLang="zh-CN" sz="7200" b="1">
+              <a:ln w="10160">
+                <a:solidFill>
+                  <a:schemeClr val="tx1">
+                    <a:lumMod val="75000"/>
+                    <a:lumOff val="25000"/>
                   </a:schemeClr>
                 </a:solidFill>
-              </a14:hiddenFill>
-            </a:ext>
-          </a:extLst>
-        </p:spPr>
-        <p:style>
-          <a:lnRef idx="2">
-            <a:schemeClr val="accent1"/>
-          </a:lnRef>
-          <a:fillRef idx="0">
-            <a:srgbClr val="FFFFFF"/>
-          </a:fillRef>
-          <a:effectRef idx="0">
-            <a:srgbClr val="FFFFFF"/>
-          </a:effectRef>
-          <a:fontRef idx="minor">
-            <a:schemeClr val="tx1"/>
-          </a:fontRef>
-        </p:style>
-        <p:txBody>
-          <a:bodyPr rtlCol="0" anchor="ctr"/>
-          <a:p>
-            <a:pPr algn="ctr"/>
-            <a:endParaRPr lang="zh-CN" altLang="en-US"/>
-          </a:p>
-        </p:txBody>
-      </p:sp>
-      <p:sp>
-        <p:nvSpPr>
-          <p:cNvPr id="18" name="矩形 17"/>
-          <p:cNvSpPr/>
-          <p:nvPr/>
-        </p:nvSpPr>
-        <p:spPr>
-          <a:xfrm>
-            <a:off x="8182610" y="3291205"/>
-            <a:ext cx="1577975" cy="447040"/>
-          </a:xfrm>
-          <a:prstGeom prst="rect">
-            <a:avLst/>
-          </a:prstGeom>
-          <a:solidFill>
-            <a:schemeClr val="accent2">
-              <a:lumMod val="60000"/>
-              <a:lumOff val="40000"/>
-            </a:schemeClr>
-          </a:solidFill>
-          <a:ln>
-            <a:solidFill>
-              <a:schemeClr val="accent2"/>
-            </a:solidFill>
-          </a:ln>
-        </p:spPr>
-        <p:style>
-          <a:lnRef idx="2">
-            <a:schemeClr val="accent1">
-              <a:lumMod val="75000"/>
-            </a:schemeClr>
-          </a:lnRef>
-          <a:fillRef idx="1">
-            <a:schemeClr val="accent1"/>
-          </a:fillRef>
-          <a:effectRef idx="0">
-            <a:srgbClr val="FFFFFF"/>
-          </a:effectRef>
-          <a:fontRef idx="minor">
-            <a:schemeClr val="lt1"/>
-          </a:fontRef>
-        </p:style>
-        <p:txBody>
-          <a:bodyPr rtlCol="0" anchor="ctr"/>
-          <a:p>
-            <a:pPr algn="ctr"/>
-            <a:r>
-              <a:rPr lang="en-US"/>
-              <a:t>Jungs</a:t>
-            </a:r>
-            <a:endParaRPr lang="en-US"/>
-          </a:p>
-        </p:txBody>
-      </p:sp>
-      <p:sp>
-        <p:nvSpPr>
-          <p:cNvPr id="19" name="文本框 18"/>
-          <p:cNvSpPr txBox="1"/>
-          <p:nvPr/>
-        </p:nvSpPr>
-        <p:spPr>
-          <a:xfrm>
-            <a:off x="6920865" y="3945255"/>
-            <a:ext cx="4109085" cy="368300"/>
-          </a:xfrm>
-          <a:prstGeom prst="rect">
-            <a:avLst/>
-          </a:prstGeom>
-          <a:noFill/>
-          <a:ln>
-            <a:noFill/>
-          </a:ln>
-          <a:extLst>
-            <a:ext uri="{909E8E84-426E-40DD-AFC4-6F175D3DCCD1}">
-              <a14:hiddenFill xmlns:a14="http://schemas.microsoft.com/office/drawing/2010/main">
-                <a:solidFill>
-                  <a:schemeClr val="accent2">
-                    <a:lumMod val="40000"/>
-                    <a:lumOff val="60000"/>
-                  </a:schemeClr>
-                </a:solidFill>
-              </a14:hiddenFill>
-            </a:ext>
-          </a:extLst>
-        </p:spPr>
-        <p:txBody>
-          <a:bodyPr wrap="square" rtlCol="0">
-            <a:spAutoFit/>
-          </a:bodyPr>
-          <a:p>
-            <a:pPr algn="ctr"/>
-            <a:r>
-              <a:rPr lang="zh-CN" altLang="en-US"/>
-              <a:t>单个函数</a:t>
-            </a:r>
-            <a:r>
-              <a:rPr lang="en-US" altLang="zh-CN"/>
-              <a:t>+</a:t>
-            </a:r>
-            <a:r>
-              <a:rPr lang="zh-CN" altLang="en-US"/>
-              <a:t>输入</a:t>
-            </a:r>
-            <a:endParaRPr lang="zh-CN" altLang="en-US"/>
-          </a:p>
-        </p:txBody>
-      </p:sp>
-      <p:cxnSp>
-        <p:nvCxnSpPr>
-          <p:cNvPr id="20" name="直接箭头连接符 19"/>
-          <p:cNvCxnSpPr>
-            <a:stCxn id="19" idx="2"/>
-          </p:cNvCxnSpPr>
-          <p:nvPr/>
-        </p:nvCxnSpPr>
-        <p:spPr>
-          <a:xfrm>
-            <a:off x="8975725" y="4313555"/>
-            <a:ext cx="3810" cy="365125"/>
-          </a:xfrm>
-          <a:prstGeom prst="straightConnector1">
-            <a:avLst/>
-          </a:prstGeom>
-          <a:noFill/>
-          <a:ln>
-            <a:solidFill>
-              <a:schemeClr val="accent2"/>
-            </a:solidFill>
-            <a:tailEnd type="arrow"/>
-          </a:ln>
-          <a:extLst>
-            <a:ext uri="{909E8E84-426E-40DD-AFC4-6F175D3DCCD1}">
-              <a14:hiddenFill xmlns:a14="http://schemas.microsoft.com/office/drawing/2010/main">
-                <a:solidFill>
-                  <a:schemeClr val="accent2">
-                    <a:lumMod val="40000"/>
-                    <a:lumOff val="60000"/>
-                  </a:schemeClr>
-                </a:solidFill>
-              </a14:hiddenFill>
-            </a:ext>
-          </a:extLst>
-        </p:spPr>
-        <p:style>
-          <a:lnRef idx="2">
-            <a:schemeClr val="accent1"/>
-          </a:lnRef>
-          <a:fillRef idx="0">
-            <a:schemeClr val="accent1"/>
-          </a:fillRef>
-          <a:effectRef idx="1">
-            <a:schemeClr val="accent1"/>
-          </a:effectRef>
-          <a:fontRef idx="minor">
-            <a:schemeClr val="tx1"/>
-          </a:fontRef>
-        </p:style>
-      </p:cxnSp>
-      <p:sp>
-        <p:nvSpPr>
-          <p:cNvPr id="21" name="文本框 20"/>
-          <p:cNvSpPr txBox="1"/>
-          <p:nvPr/>
-        </p:nvSpPr>
-        <p:spPr>
-          <a:xfrm>
-            <a:off x="7480300" y="4676775"/>
-            <a:ext cx="2982595" cy="368300"/>
-          </a:xfrm>
-          <a:prstGeom prst="rect">
-            <a:avLst/>
-          </a:prstGeom>
-          <a:noFill/>
-          <a:ln>
-            <a:noFill/>
-          </a:ln>
-          <a:extLst>
-            <a:ext uri="{909E8E84-426E-40DD-AFC4-6F175D3DCCD1}">
-              <a14:hiddenFill xmlns:a14="http://schemas.microsoft.com/office/drawing/2010/main">
-                <a:solidFill>
-                  <a:schemeClr val="accent2">
-                    <a:lumMod val="40000"/>
-                    <a:lumOff val="60000"/>
-                  </a:schemeClr>
-                </a:solidFill>
-              </a14:hiddenFill>
-            </a:ext>
-          </a:extLst>
-        </p:spPr>
-        <p:txBody>
-          <a:bodyPr wrap="square" rtlCol="0">
-            <a:spAutoFit/>
-          </a:bodyPr>
-          <a:p>
-            <a:pPr algn="ctr"/>
-            <a:r>
-              <a:rPr lang="zh-CN" altLang="en-US"/>
-              <a:t>代码执行轨迹</a:t>
-            </a:r>
-            <a:r>
-              <a:rPr lang="en-US" altLang="zh-CN"/>
-              <a:t> </a:t>
-            </a:r>
-            <a:r>
-              <a:rPr lang="en-US" altLang="zh-CN"/>
-              <a:t>trace</a:t>
-            </a:r>
-            <a:endParaRPr lang="en-US" altLang="zh-CN"/>
-          </a:p>
-        </p:txBody>
-      </p:sp>
-      <p:cxnSp>
-        <p:nvCxnSpPr>
-          <p:cNvPr id="22" name="直接箭头连接符 21"/>
-          <p:cNvCxnSpPr>
-            <a:stCxn id="21" idx="2"/>
-          </p:cNvCxnSpPr>
-          <p:nvPr/>
-        </p:nvCxnSpPr>
-        <p:spPr>
-          <a:xfrm>
-            <a:off x="8971915" y="5045075"/>
-            <a:ext cx="3810" cy="365125"/>
-          </a:xfrm>
-          <a:prstGeom prst="straightConnector1">
-            <a:avLst/>
-          </a:prstGeom>
-          <a:noFill/>
-          <a:ln>
-            <a:solidFill>
-              <a:schemeClr val="accent2"/>
-            </a:solidFill>
-            <a:tailEnd type="arrow"/>
-          </a:ln>
-          <a:extLst>
-            <a:ext uri="{909E8E84-426E-40DD-AFC4-6F175D3DCCD1}">
-              <a14:hiddenFill xmlns:a14="http://schemas.microsoft.com/office/drawing/2010/main">
-                <a:solidFill>
-                  <a:schemeClr val="accent2">
-                    <a:lumMod val="40000"/>
-                    <a:lumOff val="60000"/>
-                  </a:schemeClr>
-                </a:solidFill>
-              </a14:hiddenFill>
-            </a:ext>
-          </a:extLst>
-        </p:spPr>
-        <p:style>
-          <a:lnRef idx="2">
-            <a:schemeClr val="accent1"/>
-          </a:lnRef>
-          <a:fillRef idx="0">
-            <a:schemeClr val="accent1"/>
-          </a:fillRef>
-          <a:effectRef idx="1">
-            <a:schemeClr val="accent1"/>
-          </a:effectRef>
-          <a:fontRef idx="minor">
-            <a:schemeClr val="tx1"/>
-          </a:fontRef>
-        </p:style>
-      </p:cxnSp>
-      <p:sp>
-        <p:nvSpPr>
-          <p:cNvPr id="23" name="文本框 22"/>
-          <p:cNvSpPr txBox="1"/>
-          <p:nvPr/>
-        </p:nvSpPr>
-        <p:spPr>
-          <a:xfrm>
-            <a:off x="7480300" y="5408295"/>
-            <a:ext cx="2982595" cy="368300"/>
-          </a:xfrm>
-          <a:prstGeom prst="rect">
-            <a:avLst/>
-          </a:prstGeom>
-          <a:noFill/>
-          <a:ln>
-            <a:noFill/>
-          </a:ln>
-          <a:extLst>
-            <a:ext uri="{909E8E84-426E-40DD-AFC4-6F175D3DCCD1}">
-              <a14:hiddenFill xmlns:a14="http://schemas.microsoft.com/office/drawing/2010/main">
-                <a:solidFill>
-                  <a:schemeClr val="accent2">
-                    <a:lumMod val="40000"/>
-                    <a:lumOff val="60000"/>
-                  </a:schemeClr>
-                </a:solidFill>
-              </a14:hiddenFill>
-            </a:ext>
-          </a:extLst>
-        </p:spPr>
-        <p:txBody>
-          <a:bodyPr wrap="square" rtlCol="0">
-            <a:spAutoFit/>
-          </a:bodyPr>
-          <a:p>
-            <a:pPr algn="ctr"/>
-            <a:r>
-              <a:rPr lang="en-US" altLang="zh-CN"/>
-              <a:t>AI+</a:t>
-            </a:r>
-            <a:r>
-              <a:rPr lang="zh-CN" altLang="en-US"/>
-              <a:t>合适</a:t>
-            </a:r>
-            <a:r>
-              <a:rPr lang="en-US" altLang="zh-CN"/>
-              <a:t>prompt</a:t>
-            </a:r>
-            <a:endParaRPr lang="en-US" altLang="zh-CN"/>
-          </a:p>
-        </p:txBody>
-      </p:sp>
-      <p:cxnSp>
-        <p:nvCxnSpPr>
-          <p:cNvPr id="24" name="直接箭头连接符 23"/>
-          <p:cNvCxnSpPr>
-            <a:stCxn id="23" idx="2"/>
-          </p:cNvCxnSpPr>
-          <p:nvPr/>
-        </p:nvCxnSpPr>
-        <p:spPr>
-          <a:xfrm>
-            <a:off x="8971915" y="5776595"/>
-            <a:ext cx="3810" cy="365125"/>
-          </a:xfrm>
-          <a:prstGeom prst="straightConnector1">
-            <a:avLst/>
-          </a:prstGeom>
-          <a:noFill/>
-          <a:ln>
-            <a:solidFill>
-              <a:schemeClr val="accent2"/>
-            </a:solidFill>
-            <a:tailEnd type="arrow"/>
-          </a:ln>
-          <a:extLst>
-            <a:ext uri="{909E8E84-426E-40DD-AFC4-6F175D3DCCD1}">
-              <a14:hiddenFill xmlns:a14="http://schemas.microsoft.com/office/drawing/2010/main">
-                <a:solidFill>
-                  <a:schemeClr val="accent2">
-                    <a:lumMod val="40000"/>
-                    <a:lumOff val="60000"/>
-                  </a:schemeClr>
-                </a:solidFill>
-              </a14:hiddenFill>
-            </a:ext>
-          </a:extLst>
-        </p:spPr>
-        <p:style>
-          <a:lnRef idx="2">
-            <a:schemeClr val="accent1"/>
-          </a:lnRef>
-          <a:fillRef idx="0">
-            <a:schemeClr val="accent1"/>
-          </a:fillRef>
-          <a:effectRef idx="1">
-            <a:schemeClr val="accent1"/>
-          </a:effectRef>
-          <a:fontRef idx="minor">
-            <a:schemeClr val="tx1"/>
-          </a:fontRef>
-        </p:style>
-      </p:cxnSp>
-      <p:sp>
-        <p:nvSpPr>
-          <p:cNvPr id="25" name="文本框 24"/>
-          <p:cNvSpPr txBox="1"/>
-          <p:nvPr/>
-        </p:nvSpPr>
-        <p:spPr>
-          <a:xfrm>
-            <a:off x="7480300" y="6139815"/>
-            <a:ext cx="2982595" cy="368300"/>
-          </a:xfrm>
-          <a:prstGeom prst="rect">
-            <a:avLst/>
-          </a:prstGeom>
-          <a:noFill/>
-          <a:ln>
-            <a:noFill/>
-          </a:ln>
-          <a:extLst>
-            <a:ext uri="{909E8E84-426E-40DD-AFC4-6F175D3DCCD1}">
-              <a14:hiddenFill xmlns:a14="http://schemas.microsoft.com/office/drawing/2010/main">
-                <a:solidFill>
-                  <a:schemeClr val="accent2">
-                    <a:lumMod val="40000"/>
-                    <a:lumOff val="60000"/>
-                  </a:schemeClr>
-                </a:solidFill>
-              </a14:hiddenFill>
-            </a:ext>
-          </a:extLst>
-        </p:spPr>
-        <p:txBody>
-          <a:bodyPr wrap="square" rtlCol="0">
-            <a:spAutoFit/>
-          </a:bodyPr>
-          <a:p>
-            <a:pPr algn="ctr"/>
-            <a:r>
-              <a:rPr lang="zh-CN" altLang="en-US"/>
-              <a:t>直接得到对应的</a:t>
-            </a:r>
-            <a:r>
-              <a:rPr lang="en-US" altLang="zh-CN"/>
-              <a:t>COT</a:t>
-            </a:r>
-            <a:endParaRPr lang="en-US" altLang="zh-CN"/>
+                <a:prstDash val="solid"/>
+              </a:ln>
+              <a:solidFill>
+                <a:srgbClr val="FFFFFF"/>
+              </a:solidFill>
+              <a:effectLst>
+                <a:outerShdw blurRad="38100" dist="22860" dir="5400000" algn="tl" rotWithShape="0">
+                  <a:srgbClr val="000000">
+                    <a:alpha val="30000"/>
+                  </a:srgbClr>
+                </a:outerShdw>
+              </a:effectLst>
+            </a:endParaRPr>
           </a:p>
         </p:txBody>
       </p:sp>
@@ -6507,7 +5769,7 @@
       </p:sp>
       <p:pic>
         <p:nvPicPr>
-          <p:cNvPr id="3" name="图片 2"/>
+          <p:cNvPr id="5" name="图片 4"/>
           <p:cNvPicPr>
             <a:picLocks noChangeAspect="1"/>
           </p:cNvPicPr>
@@ -6521,8 +5783,8 @@
         </p:blipFill>
         <p:spPr>
           <a:xfrm>
-            <a:off x="381635" y="727075"/>
-            <a:ext cx="9571990" cy="2866390"/>
+            <a:off x="220980" y="725805"/>
+            <a:ext cx="11802745" cy="2380615"/>
           </a:xfrm>
           <a:prstGeom prst="rect">
             <a:avLst/>
@@ -6531,81 +5793,14 @@
       </p:pic>
       <p:sp>
         <p:nvSpPr>
-          <p:cNvPr id="4" name="文本框 3"/>
-          <p:cNvSpPr txBox="1"/>
+          <p:cNvPr id="6" name="矩形 5"/>
+          <p:cNvSpPr/>
           <p:nvPr/>
         </p:nvSpPr>
         <p:spPr>
           <a:xfrm>
-            <a:off x="10114280" y="1184275"/>
-            <a:ext cx="1776095" cy="1938020"/>
-          </a:xfrm>
-          <a:prstGeom prst="rect">
-            <a:avLst/>
-          </a:prstGeom>
-          <a:noFill/>
-          <a:ln>
-            <a:solidFill>
-              <a:schemeClr val="accent6">
-                <a:lumMod val="75000"/>
-              </a:schemeClr>
-            </a:solidFill>
-          </a:ln>
-        </p:spPr>
-        <p:txBody>
-          <a:bodyPr wrap="square" rtlCol="0" anchor="t">
-            <a:spAutoFit/>
-          </a:bodyPr>
-          <a:p>
-            <a:pPr>
-              <a:lnSpc>
-                <a:spcPct val="150000"/>
-              </a:lnSpc>
-            </a:pPr>
-            <a:r>
-              <a:rPr lang="zh-CN" altLang="en-US" sz="2000" dirty="0">
-                <a:sym typeface="+mn-ea"/>
-              </a:rPr>
-              <a:t>结果分析，整体比</a:t>
-            </a:r>
-            <a:r>
-              <a:rPr lang="en-US" altLang="zh-CN" sz="2000" dirty="0">
-                <a:sym typeface="+mn-ea"/>
-              </a:rPr>
-              <a:t>CodeI/O</a:t>
-            </a:r>
-            <a:r>
-              <a:rPr lang="zh-CN" altLang="en-US" sz="2000" dirty="0">
-                <a:sym typeface="+mn-ea"/>
-              </a:rPr>
-              <a:t>效果好一些，但</a:t>
-            </a:r>
-            <a:r>
-              <a:rPr lang="zh-CN" altLang="en-US" sz="2000" dirty="0">
-                <a:sym typeface="+mn-ea"/>
-              </a:rPr>
-              <a:t>差不多</a:t>
-            </a:r>
-            <a:endParaRPr lang="zh-CN" altLang="en-US" sz="2000" dirty="0">
-              <a:sym typeface="+mn-ea"/>
-            </a:endParaRPr>
-          </a:p>
-        </p:txBody>
-      </p:sp>
-      <p:sp>
-        <p:nvSpPr>
-          <p:cNvPr id="7" name="矩形 6"/>
-          <p:cNvSpPr/>
-          <p:nvPr>
-            <p:custDataLst>
-              <p:tags r:id="rId2"/>
-            </p:custDataLst>
-          </p:nvPr>
-        </p:nvSpPr>
-        <p:spPr>
-          <a:xfrm>
-            <a:off x="591820" y="3823335"/>
-            <a:ext cx="4509135" cy="2527935"/>
+            <a:off x="874395" y="3291205"/>
+            <a:ext cx="4509135" cy="3348990"/>
           </a:xfrm>
           <a:prstGeom prst="rect">
             <a:avLst/>
@@ -6635,18 +5830,14 @@
       </p:sp>
       <p:sp>
         <p:nvSpPr>
-          <p:cNvPr id="8" name="矩形 7"/>
+          <p:cNvPr id="9" name="矩形 8"/>
           <p:cNvSpPr/>
-          <p:nvPr>
-            <p:custDataLst>
-              <p:tags r:id="rId3"/>
-            </p:custDataLst>
-          </p:nvPr>
-        </p:nvSpPr>
-        <p:spPr>
-          <a:xfrm>
-            <a:off x="1901190" y="3823335"/>
-            <a:ext cx="1951355" cy="447040"/>
+          <p:nvPr/>
+        </p:nvSpPr>
+        <p:spPr>
+          <a:xfrm>
+            <a:off x="2398395" y="3291205"/>
+            <a:ext cx="1577975" cy="447040"/>
           </a:xfrm>
           <a:prstGeom prst="rect">
             <a:avLst/>
@@ -6680,29 +5871,21 @@
             <a:pPr algn="ctr"/>
             <a:r>
               <a:rPr lang="en-US"/>
-              <a:t>Jungs </a:t>
-            </a:r>
-            <a:r>
-              <a:rPr lang="zh-CN" altLang="en-US"/>
-              <a:t>训练集</a:t>
-            </a:r>
-            <a:endParaRPr lang="zh-CN" altLang="en-US"/>
-          </a:p>
-        </p:txBody>
-      </p:sp>
-      <p:sp>
-        <p:nvSpPr>
-          <p:cNvPr id="26" name="文本框 25"/>
+              <a:t>OURS</a:t>
+            </a:r>
+            <a:endParaRPr lang="en-US"/>
+          </a:p>
+        </p:txBody>
+      </p:sp>
+      <p:sp>
+        <p:nvSpPr>
+          <p:cNvPr id="10" name="文本框 9"/>
           <p:cNvSpPr txBox="1"/>
-          <p:nvPr>
-            <p:custDataLst>
-              <p:tags r:id="rId4"/>
-            </p:custDataLst>
-          </p:nvPr>
-        </p:nvSpPr>
-        <p:spPr>
-          <a:xfrm>
-            <a:off x="854075" y="4624705"/>
+          <p:nvPr/>
+        </p:nvSpPr>
+        <p:spPr>
+          <a:xfrm>
+            <a:off x="1136650" y="3945255"/>
             <a:ext cx="4109085" cy="368300"/>
           </a:xfrm>
           <a:prstGeom prst="rect">
@@ -6717,12 +5900,93 @@
           <a:p>
             <a:pPr algn="ctr"/>
             <a:r>
+              <a:rPr lang="zh-CN" altLang="en-US"/>
+              <a:t>真实可运行</a:t>
+            </a:r>
+            <a:r>
               <a:rPr lang="en-US" altLang="zh-CN"/>
-              <a:t>Python-Edu </a:t>
-            </a:r>
-            <a:r>
-              <a:rPr lang="zh-CN" altLang="en-US"/>
-              <a:t>数据集</a:t>
+              <a:t>Code+</a:t>
+            </a:r>
+            <a:r>
+              <a:rPr lang="zh-CN" altLang="en-US"/>
+              <a:t>目标行号</a:t>
+            </a:r>
+            <a:r>
+              <a:rPr lang="en-US" altLang="zh-CN"/>
+              <a:t>+</a:t>
+            </a:r>
+            <a:r>
+              <a:rPr lang="zh-CN" altLang="en-US"/>
+              <a:t>目标</a:t>
+            </a:r>
+            <a:r>
+              <a:rPr lang="zh-CN" altLang="en-US"/>
+              <a:t>变量</a:t>
+            </a:r>
+            <a:endParaRPr lang="zh-CN" altLang="en-US"/>
+          </a:p>
+        </p:txBody>
+      </p:sp>
+      <p:cxnSp>
+        <p:nvCxnSpPr>
+          <p:cNvPr id="11" name="直接箭头连接符 10"/>
+          <p:cNvCxnSpPr>
+            <a:stCxn id="10" idx="2"/>
+          </p:cNvCxnSpPr>
+          <p:nvPr/>
+        </p:nvCxnSpPr>
+        <p:spPr>
+          <a:xfrm>
+            <a:off x="3191510" y="4313555"/>
+            <a:ext cx="3810" cy="365125"/>
+          </a:xfrm>
+          <a:prstGeom prst="straightConnector1">
+            <a:avLst/>
+          </a:prstGeom>
+          <a:ln>
+            <a:tailEnd type="arrow"/>
+          </a:ln>
+        </p:spPr>
+        <p:style>
+          <a:lnRef idx="2">
+            <a:schemeClr val="accent1"/>
+          </a:lnRef>
+          <a:fillRef idx="0">
+            <a:schemeClr val="accent1"/>
+          </a:fillRef>
+          <a:effectRef idx="1">
+            <a:schemeClr val="accent1"/>
+          </a:effectRef>
+          <a:fontRef idx="minor">
+            <a:schemeClr val="tx1"/>
+          </a:fontRef>
+        </p:style>
+      </p:cxnSp>
+      <p:sp>
+        <p:nvSpPr>
+          <p:cNvPr id="12" name="文本框 11"/>
+          <p:cNvSpPr txBox="1"/>
+          <p:nvPr/>
+        </p:nvSpPr>
+        <p:spPr>
+          <a:xfrm>
+            <a:off x="1696085" y="4676775"/>
+            <a:ext cx="2982595" cy="368300"/>
+          </a:xfrm>
+          <a:prstGeom prst="rect">
+            <a:avLst/>
+          </a:prstGeom>
+          <a:noFill/>
+        </p:spPr>
+        <p:txBody>
+          <a:bodyPr wrap="square" rtlCol="0">
+            <a:spAutoFit/>
+          </a:bodyPr>
+          <a:p>
+            <a:pPr algn="ctr"/>
+            <a:r>
+              <a:rPr lang="zh-CN" altLang="en-US"/>
+              <a:t>代码执行轨迹</a:t>
             </a:r>
             <a:r>
               <a:rPr lang="en-US" altLang="zh-CN"/>
@@ -6730,26 +5994,168 @@
             </a:r>
             <a:r>
               <a:rPr lang="en-US" altLang="zh-CN"/>
-              <a:t>Code</a:t>
+              <a:t>trace</a:t>
             </a:r>
             <a:endParaRPr lang="en-US" altLang="zh-CN"/>
           </a:p>
         </p:txBody>
       </p:sp>
-      <p:sp>
-        <p:nvSpPr>
-          <p:cNvPr id="33" name="矩形 32"/>
+      <p:cxnSp>
+        <p:nvCxnSpPr>
+          <p:cNvPr id="13" name="直接箭头连接符 12"/>
+          <p:cNvCxnSpPr>
+            <a:stCxn id="12" idx="2"/>
+          </p:cNvCxnSpPr>
+          <p:nvPr/>
+        </p:nvCxnSpPr>
+        <p:spPr>
+          <a:xfrm>
+            <a:off x="3187700" y="5045075"/>
+            <a:ext cx="3810" cy="365125"/>
+          </a:xfrm>
+          <a:prstGeom prst="straightConnector1">
+            <a:avLst/>
+          </a:prstGeom>
+          <a:ln>
+            <a:tailEnd type="arrow"/>
+          </a:ln>
+        </p:spPr>
+        <p:style>
+          <a:lnRef idx="2">
+            <a:schemeClr val="accent1"/>
+          </a:lnRef>
+          <a:fillRef idx="0">
+            <a:schemeClr val="accent1"/>
+          </a:fillRef>
+          <a:effectRef idx="1">
+            <a:schemeClr val="accent1"/>
+          </a:effectRef>
+          <a:fontRef idx="minor">
+            <a:schemeClr val="tx1"/>
+          </a:fontRef>
+        </p:style>
+      </p:cxnSp>
+      <p:sp>
+        <p:nvSpPr>
+          <p:cNvPr id="14" name="文本框 13"/>
+          <p:cNvSpPr txBox="1"/>
+          <p:nvPr/>
+        </p:nvSpPr>
+        <p:spPr>
+          <a:xfrm>
+            <a:off x="1696085" y="5408295"/>
+            <a:ext cx="2982595" cy="368300"/>
+          </a:xfrm>
+          <a:prstGeom prst="rect">
+            <a:avLst/>
+          </a:prstGeom>
+          <a:noFill/>
+        </p:spPr>
+        <p:txBody>
+          <a:bodyPr wrap="square" rtlCol="0">
+            <a:spAutoFit/>
+          </a:bodyPr>
+          <a:p>
+            <a:pPr algn="ctr"/>
+            <a:r>
+              <a:rPr lang="zh-CN" altLang="en-US"/>
+              <a:t>剪枝后的执行流</a:t>
+            </a:r>
+            <a:r>
+              <a:rPr lang="en-US" altLang="zh-CN"/>
+              <a:t> trim-trace</a:t>
+            </a:r>
+            <a:endParaRPr lang="en-US" altLang="zh-CN"/>
+          </a:p>
+        </p:txBody>
+      </p:sp>
+      <p:cxnSp>
+        <p:nvCxnSpPr>
+          <p:cNvPr id="15" name="直接箭头连接符 14"/>
+          <p:cNvCxnSpPr>
+            <a:stCxn id="14" idx="2"/>
+          </p:cNvCxnSpPr>
+          <p:nvPr/>
+        </p:nvCxnSpPr>
+        <p:spPr>
+          <a:xfrm>
+            <a:off x="3187700" y="5776595"/>
+            <a:ext cx="3810" cy="365125"/>
+          </a:xfrm>
+          <a:prstGeom prst="straightConnector1">
+            <a:avLst/>
+          </a:prstGeom>
+          <a:ln>
+            <a:tailEnd type="arrow"/>
+          </a:ln>
+        </p:spPr>
+        <p:style>
+          <a:lnRef idx="2">
+            <a:schemeClr val="accent1"/>
+          </a:lnRef>
+          <a:fillRef idx="0">
+            <a:schemeClr val="accent1"/>
+          </a:fillRef>
+          <a:effectRef idx="1">
+            <a:schemeClr val="accent1"/>
+          </a:effectRef>
+          <a:fontRef idx="minor">
+            <a:schemeClr val="tx1"/>
+          </a:fontRef>
+        </p:style>
+      </p:cxnSp>
+      <p:sp>
+        <p:nvSpPr>
+          <p:cNvPr id="16" name="文本框 15"/>
+          <p:cNvSpPr txBox="1"/>
+          <p:nvPr/>
+        </p:nvSpPr>
+        <p:spPr>
+          <a:xfrm>
+            <a:off x="1696085" y="6139815"/>
+            <a:ext cx="2982595" cy="368300"/>
+          </a:xfrm>
+          <a:prstGeom prst="rect">
+            <a:avLst/>
+          </a:prstGeom>
+          <a:noFill/>
+        </p:spPr>
+        <p:txBody>
+          <a:bodyPr wrap="square" rtlCol="0">
+            <a:spAutoFit/>
+          </a:bodyPr>
+          <a:p>
+            <a:pPr algn="ctr"/>
+            <a:r>
+              <a:rPr lang="en-US" altLang="zh-CN"/>
+              <a:t>AST</a:t>
+            </a:r>
+            <a:r>
+              <a:rPr lang="zh-CN" altLang="en-US"/>
+              <a:t>模板匹配逻辑得到</a:t>
+            </a:r>
+            <a:r>
+              <a:rPr lang="en-US" altLang="zh-CN"/>
+              <a:t> </a:t>
+            </a:r>
+            <a:r>
+              <a:rPr lang="en-US" altLang="zh-CN"/>
+              <a:t>COT</a:t>
+            </a:r>
+            <a:endParaRPr lang="en-US" altLang="zh-CN"/>
+          </a:p>
+        </p:txBody>
+      </p:sp>
+      <p:sp>
+        <p:nvSpPr>
+          <p:cNvPr id="17" name="矩形 16"/>
           <p:cNvSpPr/>
-          <p:nvPr>
-            <p:custDataLst>
-              <p:tags r:id="rId5"/>
-            </p:custDataLst>
-          </p:nvPr>
-        </p:nvSpPr>
-        <p:spPr>
-          <a:xfrm>
-            <a:off x="6376035" y="3823335"/>
-            <a:ext cx="4509135" cy="2527935"/>
+          <p:nvPr/>
+        </p:nvSpPr>
+        <p:spPr>
+          <a:xfrm>
+            <a:off x="6658610" y="3291205"/>
+            <a:ext cx="4509135" cy="3348990"/>
           </a:xfrm>
           <a:prstGeom prst="rect">
             <a:avLst/>
@@ -6797,18 +6203,14 @@
       </p:sp>
       <p:sp>
         <p:nvSpPr>
-          <p:cNvPr id="34" name="矩形 33"/>
+          <p:cNvPr id="18" name="矩形 17"/>
           <p:cNvSpPr/>
-          <p:nvPr>
-            <p:custDataLst>
-              <p:tags r:id="rId6"/>
-            </p:custDataLst>
-          </p:nvPr>
-        </p:nvSpPr>
-        <p:spPr>
-          <a:xfrm>
-            <a:off x="7741285" y="3823335"/>
-            <a:ext cx="1860550" cy="447040"/>
+          <p:nvPr/>
+        </p:nvSpPr>
+        <p:spPr>
+          <a:xfrm>
+            <a:off x="8182610" y="3291205"/>
+            <a:ext cx="1577975" cy="447040"/>
           </a:xfrm>
           <a:prstGeom prst="rect">
             <a:avLst/>
@@ -6847,29 +6249,21 @@
             <a:pPr algn="ctr"/>
             <a:r>
               <a:rPr lang="en-US"/>
-              <a:t>CodeI/O </a:t>
-            </a:r>
-            <a:r>
-              <a:rPr lang="zh-CN" altLang="en-US"/>
-              <a:t>训练集</a:t>
-            </a:r>
-            <a:endParaRPr lang="zh-CN" altLang="en-US"/>
-          </a:p>
-        </p:txBody>
-      </p:sp>
-      <p:sp>
-        <p:nvSpPr>
-          <p:cNvPr id="35" name="文本框 34"/>
+              <a:t>Jungs</a:t>
+            </a:r>
+            <a:endParaRPr lang="en-US"/>
+          </a:p>
+        </p:txBody>
+      </p:sp>
+      <p:sp>
+        <p:nvSpPr>
+          <p:cNvPr id="19" name="文本框 18"/>
           <p:cNvSpPr txBox="1"/>
-          <p:nvPr>
-            <p:custDataLst>
-              <p:tags r:id="rId7"/>
-            </p:custDataLst>
-          </p:nvPr>
-        </p:nvSpPr>
-        <p:spPr>
-          <a:xfrm>
-            <a:off x="6700520" y="4624705"/>
+          <p:nvPr/>
+        </p:nvSpPr>
+        <p:spPr>
+          <a:xfrm>
+            <a:off x="6920865" y="3945255"/>
             <a:ext cx="4109085" cy="368300"/>
           </a:xfrm>
           <a:prstGeom prst="rect">
@@ -6900,6 +6294,817 @@
             <a:pPr algn="ctr"/>
             <a:r>
               <a:rPr lang="zh-CN" altLang="en-US"/>
+              <a:t>单个函数</a:t>
+            </a:r>
+            <a:r>
+              <a:rPr lang="en-US" altLang="zh-CN"/>
+              <a:t>+</a:t>
+            </a:r>
+            <a:r>
+              <a:rPr lang="zh-CN" altLang="en-US"/>
+              <a:t>输入</a:t>
+            </a:r>
+            <a:endParaRPr lang="zh-CN" altLang="en-US"/>
+          </a:p>
+        </p:txBody>
+      </p:sp>
+      <p:cxnSp>
+        <p:nvCxnSpPr>
+          <p:cNvPr id="20" name="直接箭头连接符 19"/>
+          <p:cNvCxnSpPr>
+            <a:stCxn id="19" idx="2"/>
+          </p:cNvCxnSpPr>
+          <p:nvPr/>
+        </p:nvCxnSpPr>
+        <p:spPr>
+          <a:xfrm>
+            <a:off x="8975725" y="4313555"/>
+            <a:ext cx="3810" cy="365125"/>
+          </a:xfrm>
+          <a:prstGeom prst="straightConnector1">
+            <a:avLst/>
+          </a:prstGeom>
+          <a:noFill/>
+          <a:ln>
+            <a:solidFill>
+              <a:schemeClr val="accent2"/>
+            </a:solidFill>
+            <a:tailEnd type="arrow"/>
+          </a:ln>
+          <a:extLst>
+            <a:ext uri="{909E8E84-426E-40DD-AFC4-6F175D3DCCD1}">
+              <a14:hiddenFill xmlns:a14="http://schemas.microsoft.com/office/drawing/2010/main">
+                <a:solidFill>
+                  <a:schemeClr val="accent2">
+                    <a:lumMod val="40000"/>
+                    <a:lumOff val="60000"/>
+                  </a:schemeClr>
+                </a:solidFill>
+              </a14:hiddenFill>
+            </a:ext>
+          </a:extLst>
+        </p:spPr>
+        <p:style>
+          <a:lnRef idx="2">
+            <a:schemeClr val="accent1"/>
+          </a:lnRef>
+          <a:fillRef idx="0">
+            <a:schemeClr val="accent1"/>
+          </a:fillRef>
+          <a:effectRef idx="1">
+            <a:schemeClr val="accent1"/>
+          </a:effectRef>
+          <a:fontRef idx="minor">
+            <a:schemeClr val="tx1"/>
+          </a:fontRef>
+        </p:style>
+      </p:cxnSp>
+      <p:sp>
+        <p:nvSpPr>
+          <p:cNvPr id="21" name="文本框 20"/>
+          <p:cNvSpPr txBox="1"/>
+          <p:nvPr/>
+        </p:nvSpPr>
+        <p:spPr>
+          <a:xfrm>
+            <a:off x="7480300" y="4676775"/>
+            <a:ext cx="2982595" cy="368300"/>
+          </a:xfrm>
+          <a:prstGeom prst="rect">
+            <a:avLst/>
+          </a:prstGeom>
+          <a:noFill/>
+          <a:ln>
+            <a:noFill/>
+          </a:ln>
+          <a:extLst>
+            <a:ext uri="{909E8E84-426E-40DD-AFC4-6F175D3DCCD1}">
+              <a14:hiddenFill xmlns:a14="http://schemas.microsoft.com/office/drawing/2010/main">
+                <a:solidFill>
+                  <a:schemeClr val="accent2">
+                    <a:lumMod val="40000"/>
+                    <a:lumOff val="60000"/>
+                  </a:schemeClr>
+                </a:solidFill>
+              </a14:hiddenFill>
+            </a:ext>
+          </a:extLst>
+        </p:spPr>
+        <p:txBody>
+          <a:bodyPr wrap="square" rtlCol="0">
+            <a:spAutoFit/>
+          </a:bodyPr>
+          <a:p>
+            <a:pPr algn="ctr"/>
+            <a:r>
+              <a:rPr lang="zh-CN" altLang="en-US"/>
+              <a:t>代码执行轨迹</a:t>
+            </a:r>
+            <a:r>
+              <a:rPr lang="en-US" altLang="zh-CN"/>
+              <a:t> </a:t>
+            </a:r>
+            <a:r>
+              <a:rPr lang="en-US" altLang="zh-CN"/>
+              <a:t>trace</a:t>
+            </a:r>
+            <a:endParaRPr lang="en-US" altLang="zh-CN"/>
+          </a:p>
+        </p:txBody>
+      </p:sp>
+      <p:cxnSp>
+        <p:nvCxnSpPr>
+          <p:cNvPr id="22" name="直接箭头连接符 21"/>
+          <p:cNvCxnSpPr>
+            <a:stCxn id="21" idx="2"/>
+          </p:cNvCxnSpPr>
+          <p:nvPr/>
+        </p:nvCxnSpPr>
+        <p:spPr>
+          <a:xfrm>
+            <a:off x="8971915" y="5045075"/>
+            <a:ext cx="3810" cy="365125"/>
+          </a:xfrm>
+          <a:prstGeom prst="straightConnector1">
+            <a:avLst/>
+          </a:prstGeom>
+          <a:noFill/>
+          <a:ln>
+            <a:solidFill>
+              <a:schemeClr val="accent2"/>
+            </a:solidFill>
+            <a:tailEnd type="arrow"/>
+          </a:ln>
+          <a:extLst>
+            <a:ext uri="{909E8E84-426E-40DD-AFC4-6F175D3DCCD1}">
+              <a14:hiddenFill xmlns:a14="http://schemas.microsoft.com/office/drawing/2010/main">
+                <a:solidFill>
+                  <a:schemeClr val="accent2">
+                    <a:lumMod val="40000"/>
+                    <a:lumOff val="60000"/>
+                  </a:schemeClr>
+                </a:solidFill>
+              </a14:hiddenFill>
+            </a:ext>
+          </a:extLst>
+        </p:spPr>
+        <p:style>
+          <a:lnRef idx="2">
+            <a:schemeClr val="accent1"/>
+          </a:lnRef>
+          <a:fillRef idx="0">
+            <a:schemeClr val="accent1"/>
+          </a:fillRef>
+          <a:effectRef idx="1">
+            <a:schemeClr val="accent1"/>
+          </a:effectRef>
+          <a:fontRef idx="minor">
+            <a:schemeClr val="tx1"/>
+          </a:fontRef>
+        </p:style>
+      </p:cxnSp>
+      <p:sp>
+        <p:nvSpPr>
+          <p:cNvPr id="23" name="文本框 22"/>
+          <p:cNvSpPr txBox="1"/>
+          <p:nvPr/>
+        </p:nvSpPr>
+        <p:spPr>
+          <a:xfrm>
+            <a:off x="7480300" y="5408295"/>
+            <a:ext cx="2982595" cy="368300"/>
+          </a:xfrm>
+          <a:prstGeom prst="rect">
+            <a:avLst/>
+          </a:prstGeom>
+          <a:noFill/>
+          <a:ln>
+            <a:noFill/>
+          </a:ln>
+          <a:extLst>
+            <a:ext uri="{909E8E84-426E-40DD-AFC4-6F175D3DCCD1}">
+              <a14:hiddenFill xmlns:a14="http://schemas.microsoft.com/office/drawing/2010/main">
+                <a:solidFill>
+                  <a:schemeClr val="accent2">
+                    <a:lumMod val="40000"/>
+                    <a:lumOff val="60000"/>
+                  </a:schemeClr>
+                </a:solidFill>
+              </a14:hiddenFill>
+            </a:ext>
+          </a:extLst>
+        </p:spPr>
+        <p:txBody>
+          <a:bodyPr wrap="square" rtlCol="0">
+            <a:spAutoFit/>
+          </a:bodyPr>
+          <a:p>
+            <a:pPr algn="ctr"/>
+            <a:r>
+              <a:rPr lang="en-US" altLang="zh-CN"/>
+              <a:t>AI+</a:t>
+            </a:r>
+            <a:r>
+              <a:rPr lang="zh-CN" altLang="en-US"/>
+              <a:t>合适</a:t>
+            </a:r>
+            <a:r>
+              <a:rPr lang="en-US" altLang="zh-CN"/>
+              <a:t>prompt</a:t>
+            </a:r>
+            <a:endParaRPr lang="en-US" altLang="zh-CN"/>
+          </a:p>
+        </p:txBody>
+      </p:sp>
+      <p:cxnSp>
+        <p:nvCxnSpPr>
+          <p:cNvPr id="24" name="直接箭头连接符 23"/>
+          <p:cNvCxnSpPr>
+            <a:stCxn id="23" idx="2"/>
+          </p:cNvCxnSpPr>
+          <p:nvPr/>
+        </p:nvCxnSpPr>
+        <p:spPr>
+          <a:xfrm>
+            <a:off x="8971915" y="5776595"/>
+            <a:ext cx="3810" cy="365125"/>
+          </a:xfrm>
+          <a:prstGeom prst="straightConnector1">
+            <a:avLst/>
+          </a:prstGeom>
+          <a:noFill/>
+          <a:ln>
+            <a:solidFill>
+              <a:schemeClr val="accent2"/>
+            </a:solidFill>
+            <a:tailEnd type="arrow"/>
+          </a:ln>
+          <a:extLst>
+            <a:ext uri="{909E8E84-426E-40DD-AFC4-6F175D3DCCD1}">
+              <a14:hiddenFill xmlns:a14="http://schemas.microsoft.com/office/drawing/2010/main">
+                <a:solidFill>
+                  <a:schemeClr val="accent2">
+                    <a:lumMod val="40000"/>
+                    <a:lumOff val="60000"/>
+                  </a:schemeClr>
+                </a:solidFill>
+              </a14:hiddenFill>
+            </a:ext>
+          </a:extLst>
+        </p:spPr>
+        <p:style>
+          <a:lnRef idx="2">
+            <a:schemeClr val="accent1"/>
+          </a:lnRef>
+          <a:fillRef idx="0">
+            <a:schemeClr val="accent1"/>
+          </a:fillRef>
+          <a:effectRef idx="1">
+            <a:schemeClr val="accent1"/>
+          </a:effectRef>
+          <a:fontRef idx="minor">
+            <a:schemeClr val="tx1"/>
+          </a:fontRef>
+        </p:style>
+      </p:cxnSp>
+      <p:sp>
+        <p:nvSpPr>
+          <p:cNvPr id="25" name="文本框 24"/>
+          <p:cNvSpPr txBox="1"/>
+          <p:nvPr/>
+        </p:nvSpPr>
+        <p:spPr>
+          <a:xfrm>
+            <a:off x="7480300" y="6139815"/>
+            <a:ext cx="2982595" cy="368300"/>
+          </a:xfrm>
+          <a:prstGeom prst="rect">
+            <a:avLst/>
+          </a:prstGeom>
+          <a:noFill/>
+          <a:ln>
+            <a:noFill/>
+          </a:ln>
+          <a:extLst>
+            <a:ext uri="{909E8E84-426E-40DD-AFC4-6F175D3DCCD1}">
+              <a14:hiddenFill xmlns:a14="http://schemas.microsoft.com/office/drawing/2010/main">
+                <a:solidFill>
+                  <a:schemeClr val="accent2">
+                    <a:lumMod val="40000"/>
+                    <a:lumOff val="60000"/>
+                  </a:schemeClr>
+                </a:solidFill>
+              </a14:hiddenFill>
+            </a:ext>
+          </a:extLst>
+        </p:spPr>
+        <p:txBody>
+          <a:bodyPr wrap="square" rtlCol="0">
+            <a:spAutoFit/>
+          </a:bodyPr>
+          <a:p>
+            <a:pPr algn="ctr"/>
+            <a:r>
+              <a:rPr lang="zh-CN" altLang="en-US"/>
+              <a:t>直接得到对应的</a:t>
+            </a:r>
+            <a:r>
+              <a:rPr lang="en-US" altLang="zh-CN"/>
+              <a:t>COT</a:t>
+            </a:r>
+            <a:endParaRPr lang="en-US" altLang="zh-CN"/>
+          </a:p>
+        </p:txBody>
+      </p:sp>
+    </p:spTree>
+  </p:cSld>
+  <p:clrMapOvr>
+    <a:masterClrMapping/>
+  </p:clrMapOvr>
+</p:sld>
+</file>
+
+<file path=ppt/slides/slide18.xml><?xml version="1.0" encoding="utf-8"?>
+<p:sld xmlns:a="http://schemas.openxmlformats.org/drawingml/2006/main" xmlns:r="http://schemas.openxmlformats.org/officeDocument/2006/relationships" xmlns:p="http://schemas.openxmlformats.org/presentationml/2006/main">
+  <p:cSld>
+    <p:spTree>
+      <p:nvGrpSpPr>
+        <p:cNvPr id="1" name=""/>
+        <p:cNvGrpSpPr/>
+        <p:nvPr/>
+      </p:nvGrpSpPr>
+      <p:grpSpPr>
+        <a:xfrm>
+          <a:off x="0" y="0"/>
+          <a:ext cx="0" cy="0"/>
+          <a:chOff x="0" y="0"/>
+          <a:chExt cx="0" cy="0"/>
+        </a:xfrm>
+      </p:grpSpPr>
+      <p:sp>
+        <p:nvSpPr>
+          <p:cNvPr id="2" name="文本框 1"/>
+          <p:cNvSpPr txBox="1"/>
+          <p:nvPr/>
+        </p:nvSpPr>
+        <p:spPr>
+          <a:xfrm>
+            <a:off x="344805" y="302895"/>
+            <a:ext cx="10258425" cy="460375"/>
+          </a:xfrm>
+          <a:prstGeom prst="rect">
+            <a:avLst/>
+          </a:prstGeom>
+          <a:noFill/>
+        </p:spPr>
+        <p:txBody>
+          <a:bodyPr wrap="square" rtlCol="0">
+            <a:spAutoFit/>
+          </a:bodyPr>
+          <a:lstStyle/>
+          <a:p>
+            <a:pPr algn="l"/>
+            <a:r>
+              <a:rPr lang="zh-CN" altLang="en-US" sz="2400" dirty="0"/>
+              <a:t>进展分享五：</a:t>
+            </a:r>
+            <a:r>
+              <a:rPr lang="zh-CN" altLang="en-US" sz="2400" dirty="0">
+                <a:sym typeface="+mn-ea"/>
+              </a:rPr>
+              <a:t>思路相近的一个工作</a:t>
+            </a:r>
+            <a:r>
+              <a:rPr lang="en-US" altLang="zh-CN" sz="2400" dirty="0">
+                <a:sym typeface="+mn-ea"/>
+              </a:rPr>
+              <a:t> code+</a:t>
+            </a:r>
+            <a:r>
+              <a:rPr lang="zh-CN" altLang="en-US" sz="2400" dirty="0">
+                <a:sym typeface="+mn-ea"/>
+              </a:rPr>
+              <a:t>执行轨迹</a:t>
+            </a:r>
+            <a:r>
+              <a:rPr lang="en-US" altLang="zh-CN" sz="2400" dirty="0">
+                <a:sym typeface="+mn-ea"/>
+              </a:rPr>
+              <a:t>—&gt;AI—&gt;</a:t>
+            </a:r>
+            <a:r>
+              <a:rPr lang="zh-CN" altLang="en-US" sz="2400" dirty="0">
+                <a:sym typeface="+mn-ea"/>
+              </a:rPr>
+              <a:t>自然语言</a:t>
+            </a:r>
+            <a:r>
+              <a:rPr lang="en-US" altLang="zh-CN" sz="2400" dirty="0">
+                <a:sym typeface="+mn-ea"/>
+              </a:rPr>
+              <a:t>cot</a:t>
+            </a:r>
+            <a:endParaRPr lang="zh-CN" altLang="en-US" sz="2400" dirty="0">
+              <a:sym typeface="+mn-ea"/>
+            </a:endParaRPr>
+          </a:p>
+        </p:txBody>
+      </p:sp>
+      <p:pic>
+        <p:nvPicPr>
+          <p:cNvPr id="3" name="图片 2"/>
+          <p:cNvPicPr>
+            <a:picLocks noChangeAspect="1"/>
+          </p:cNvPicPr>
+          <p:nvPr/>
+        </p:nvPicPr>
+        <p:blipFill>
+          <a:blip r:embed="rId1"/>
+          <a:stretch>
+            <a:fillRect/>
+          </a:stretch>
+        </p:blipFill>
+        <p:spPr>
+          <a:xfrm>
+            <a:off x="381635" y="727075"/>
+            <a:ext cx="9571990" cy="2866390"/>
+          </a:xfrm>
+          <a:prstGeom prst="rect">
+            <a:avLst/>
+          </a:prstGeom>
+        </p:spPr>
+      </p:pic>
+      <p:sp>
+        <p:nvSpPr>
+          <p:cNvPr id="4" name="文本框 3"/>
+          <p:cNvSpPr txBox="1"/>
+          <p:nvPr/>
+        </p:nvSpPr>
+        <p:spPr>
+          <a:xfrm>
+            <a:off x="10114280" y="1184275"/>
+            <a:ext cx="1776095" cy="1938020"/>
+          </a:xfrm>
+          <a:prstGeom prst="rect">
+            <a:avLst/>
+          </a:prstGeom>
+          <a:noFill/>
+          <a:ln>
+            <a:solidFill>
+              <a:schemeClr val="accent6">
+                <a:lumMod val="75000"/>
+              </a:schemeClr>
+            </a:solidFill>
+          </a:ln>
+        </p:spPr>
+        <p:txBody>
+          <a:bodyPr wrap="square" rtlCol="0" anchor="t">
+            <a:spAutoFit/>
+          </a:bodyPr>
+          <a:p>
+            <a:pPr>
+              <a:lnSpc>
+                <a:spcPct val="150000"/>
+              </a:lnSpc>
+            </a:pPr>
+            <a:r>
+              <a:rPr lang="zh-CN" altLang="en-US" sz="2000" dirty="0">
+                <a:sym typeface="+mn-ea"/>
+              </a:rPr>
+              <a:t>结果分析，整体比</a:t>
+            </a:r>
+            <a:r>
+              <a:rPr lang="en-US" altLang="zh-CN" sz="2000" dirty="0">
+                <a:sym typeface="+mn-ea"/>
+              </a:rPr>
+              <a:t>CodeI/O</a:t>
+            </a:r>
+            <a:r>
+              <a:rPr lang="zh-CN" altLang="en-US" sz="2000" dirty="0">
+                <a:sym typeface="+mn-ea"/>
+              </a:rPr>
+              <a:t>效果好一些，但</a:t>
+            </a:r>
+            <a:r>
+              <a:rPr lang="zh-CN" altLang="en-US" sz="2000" dirty="0">
+                <a:sym typeface="+mn-ea"/>
+              </a:rPr>
+              <a:t>差不多</a:t>
+            </a:r>
+            <a:endParaRPr lang="zh-CN" altLang="en-US" sz="2000" dirty="0">
+              <a:sym typeface="+mn-ea"/>
+            </a:endParaRPr>
+          </a:p>
+        </p:txBody>
+      </p:sp>
+      <p:sp>
+        <p:nvSpPr>
+          <p:cNvPr id="7" name="矩形 6"/>
+          <p:cNvSpPr/>
+          <p:nvPr>
+            <p:custDataLst>
+              <p:tags r:id="rId2"/>
+            </p:custDataLst>
+          </p:nvPr>
+        </p:nvSpPr>
+        <p:spPr>
+          <a:xfrm>
+            <a:off x="591820" y="3823335"/>
+            <a:ext cx="4509135" cy="2527935"/>
+          </a:xfrm>
+          <a:prstGeom prst="rect">
+            <a:avLst/>
+          </a:prstGeom>
+        </p:spPr>
+        <p:style>
+          <a:lnRef idx="2">
+            <a:schemeClr val="accent1"/>
+          </a:lnRef>
+          <a:fillRef idx="0">
+            <a:srgbClr val="FFFFFF"/>
+          </a:fillRef>
+          <a:effectRef idx="0">
+            <a:srgbClr val="FFFFFF"/>
+          </a:effectRef>
+          <a:fontRef idx="minor">
+            <a:schemeClr val="tx1"/>
+          </a:fontRef>
+        </p:style>
+        <p:txBody>
+          <a:bodyPr rtlCol="0" anchor="ctr"/>
+          <a:p>
+            <a:pPr algn="ctr"/>
+            <a:endParaRPr lang="zh-CN" altLang="en-US"/>
+          </a:p>
+        </p:txBody>
+      </p:sp>
+      <p:sp>
+        <p:nvSpPr>
+          <p:cNvPr id="8" name="矩形 7"/>
+          <p:cNvSpPr/>
+          <p:nvPr>
+            <p:custDataLst>
+              <p:tags r:id="rId3"/>
+            </p:custDataLst>
+          </p:nvPr>
+        </p:nvSpPr>
+        <p:spPr>
+          <a:xfrm>
+            <a:off x="1901190" y="3823335"/>
+            <a:ext cx="1951355" cy="447040"/>
+          </a:xfrm>
+          <a:prstGeom prst="rect">
+            <a:avLst/>
+          </a:prstGeom>
+          <a:solidFill>
+            <a:schemeClr val="tx2">
+              <a:lumMod val="50000"/>
+              <a:lumOff val="50000"/>
+            </a:schemeClr>
+          </a:solidFill>
+        </p:spPr>
+        <p:style>
+          <a:lnRef idx="2">
+            <a:schemeClr val="accent1">
+              <a:lumMod val="75000"/>
+            </a:schemeClr>
+          </a:lnRef>
+          <a:fillRef idx="1">
+            <a:schemeClr val="accent1"/>
+          </a:fillRef>
+          <a:effectRef idx="0">
+            <a:srgbClr val="FFFFFF"/>
+          </a:effectRef>
+          <a:fontRef idx="minor">
+            <a:schemeClr val="lt1"/>
+          </a:fontRef>
+        </p:style>
+        <p:txBody>
+          <a:bodyPr rtlCol="0" anchor="ctr"/>
+          <a:p>
+            <a:pPr algn="ctr"/>
+            <a:r>
+              <a:rPr lang="en-US"/>
+              <a:t>Jungs </a:t>
+            </a:r>
+            <a:r>
+              <a:rPr lang="zh-CN" altLang="en-US"/>
+              <a:t>训练集</a:t>
+            </a:r>
+            <a:endParaRPr lang="zh-CN" altLang="en-US"/>
+          </a:p>
+        </p:txBody>
+      </p:sp>
+      <p:sp>
+        <p:nvSpPr>
+          <p:cNvPr id="26" name="文本框 25"/>
+          <p:cNvSpPr txBox="1"/>
+          <p:nvPr>
+            <p:custDataLst>
+              <p:tags r:id="rId4"/>
+            </p:custDataLst>
+          </p:nvPr>
+        </p:nvSpPr>
+        <p:spPr>
+          <a:xfrm>
+            <a:off x="854075" y="4624705"/>
+            <a:ext cx="4109085" cy="368300"/>
+          </a:xfrm>
+          <a:prstGeom prst="rect">
+            <a:avLst/>
+          </a:prstGeom>
+          <a:noFill/>
+        </p:spPr>
+        <p:txBody>
+          <a:bodyPr wrap="square" rtlCol="0">
+            <a:spAutoFit/>
+          </a:bodyPr>
+          <a:p>
+            <a:pPr algn="ctr"/>
+            <a:r>
+              <a:rPr lang="en-US" altLang="zh-CN"/>
+              <a:t>Python-Edu </a:t>
+            </a:r>
+            <a:r>
+              <a:rPr lang="zh-CN" altLang="en-US"/>
+              <a:t>数据集</a:t>
+            </a:r>
+            <a:r>
+              <a:rPr lang="en-US" altLang="zh-CN"/>
+              <a:t> </a:t>
+            </a:r>
+            <a:r>
+              <a:rPr lang="en-US" altLang="zh-CN"/>
+              <a:t>Code</a:t>
+            </a:r>
+            <a:endParaRPr lang="en-US" altLang="zh-CN"/>
+          </a:p>
+        </p:txBody>
+      </p:sp>
+      <p:sp>
+        <p:nvSpPr>
+          <p:cNvPr id="33" name="矩形 32"/>
+          <p:cNvSpPr/>
+          <p:nvPr>
+            <p:custDataLst>
+              <p:tags r:id="rId5"/>
+            </p:custDataLst>
+          </p:nvPr>
+        </p:nvSpPr>
+        <p:spPr>
+          <a:xfrm>
+            <a:off x="6376035" y="3823335"/>
+            <a:ext cx="4509135" cy="2527935"/>
+          </a:xfrm>
+          <a:prstGeom prst="rect">
+            <a:avLst/>
+          </a:prstGeom>
+          <a:noFill/>
+          <a:ln>
+            <a:solidFill>
+              <a:schemeClr val="accent2"/>
+            </a:solidFill>
+          </a:ln>
+          <a:extLst>
+            <a:ext uri="{909E8E84-426E-40DD-AFC4-6F175D3DCCD1}">
+              <a14:hiddenFill xmlns:a14="http://schemas.microsoft.com/office/drawing/2010/main">
+                <a:solidFill>
+                  <a:schemeClr val="accent2">
+                    <a:lumMod val="40000"/>
+                    <a:lumOff val="60000"/>
+                  </a:schemeClr>
+                </a:solidFill>
+              </a14:hiddenFill>
+            </a:ext>
+          </a:extLst>
+        </p:spPr>
+        <p:style>
+          <a:lnRef idx="2">
+            <a:schemeClr val="accent1"/>
+          </a:lnRef>
+          <a:fillRef idx="0">
+            <a:srgbClr val="FFFFFF"/>
+          </a:fillRef>
+          <a:effectRef idx="0">
+            <a:srgbClr val="FFFFFF"/>
+          </a:effectRef>
+          <a:fontRef idx="minor">
+            <a:schemeClr val="tx1"/>
+          </a:fontRef>
+        </p:style>
+        <p:txBody>
+          <a:bodyPr rtlCol="0" anchor="ctr"/>
+          <a:p>
+            <a:pPr algn="ctr"/>
+            <a:endParaRPr lang="zh-CN" altLang="en-US"/>
+          </a:p>
+        </p:txBody>
+      </p:sp>
+      <p:sp>
+        <p:nvSpPr>
+          <p:cNvPr id="34" name="矩形 33"/>
+          <p:cNvSpPr/>
+          <p:nvPr>
+            <p:custDataLst>
+              <p:tags r:id="rId6"/>
+            </p:custDataLst>
+          </p:nvPr>
+        </p:nvSpPr>
+        <p:spPr>
+          <a:xfrm>
+            <a:off x="7741285" y="3823335"/>
+            <a:ext cx="1860550" cy="447040"/>
+          </a:xfrm>
+          <a:prstGeom prst="rect">
+            <a:avLst/>
+          </a:prstGeom>
+          <a:solidFill>
+            <a:schemeClr val="accent2">
+              <a:lumMod val="60000"/>
+              <a:lumOff val="40000"/>
+            </a:schemeClr>
+          </a:solidFill>
+          <a:ln>
+            <a:solidFill>
+              <a:schemeClr val="accent2"/>
+            </a:solidFill>
+          </a:ln>
+        </p:spPr>
+        <p:style>
+          <a:lnRef idx="2">
+            <a:schemeClr val="accent1">
+              <a:lumMod val="75000"/>
+            </a:schemeClr>
+          </a:lnRef>
+          <a:fillRef idx="1">
+            <a:schemeClr val="accent1"/>
+          </a:fillRef>
+          <a:effectRef idx="0">
+            <a:srgbClr val="FFFFFF"/>
+          </a:effectRef>
+          <a:fontRef idx="minor">
+            <a:schemeClr val="lt1"/>
+          </a:fontRef>
+        </p:style>
+        <p:txBody>
+          <a:bodyPr rtlCol="0" anchor="ctr"/>
+          <a:p>
+            <a:pPr algn="ctr"/>
+            <a:r>
+              <a:rPr lang="en-US"/>
+              <a:t>CodeI/O </a:t>
+            </a:r>
+            <a:r>
+              <a:rPr lang="zh-CN" altLang="en-US"/>
+              <a:t>训练集</a:t>
+            </a:r>
+            <a:endParaRPr lang="zh-CN" altLang="en-US"/>
+          </a:p>
+        </p:txBody>
+      </p:sp>
+      <p:sp>
+        <p:nvSpPr>
+          <p:cNvPr id="35" name="文本框 34"/>
+          <p:cNvSpPr txBox="1"/>
+          <p:nvPr>
+            <p:custDataLst>
+              <p:tags r:id="rId7"/>
+            </p:custDataLst>
+          </p:nvPr>
+        </p:nvSpPr>
+        <p:spPr>
+          <a:xfrm>
+            <a:off x="6700520" y="4624705"/>
+            <a:ext cx="4109085" cy="368300"/>
+          </a:xfrm>
+          <a:prstGeom prst="rect">
+            <a:avLst/>
+          </a:prstGeom>
+          <a:noFill/>
+          <a:ln>
+            <a:noFill/>
+          </a:ln>
+          <a:extLst>
+            <a:ext uri="{909E8E84-426E-40DD-AFC4-6F175D3DCCD1}">
+              <a14:hiddenFill xmlns:a14="http://schemas.microsoft.com/office/drawing/2010/main">
+                <a:solidFill>
+                  <a:schemeClr val="accent2">
+                    <a:lumMod val="40000"/>
+                    <a:lumOff val="60000"/>
+                  </a:schemeClr>
+                </a:solidFill>
+              </a14:hiddenFill>
+            </a:ext>
+          </a:extLst>
+        </p:spPr>
+        <p:txBody>
+          <a:bodyPr wrap="square" rtlCol="0">
+            <a:spAutoFit/>
+          </a:bodyPr>
+          <a:p>
+            <a:pPr algn="ctr"/>
+            <a:r>
+              <a:rPr lang="zh-CN" altLang="en-US"/>
               <a:t>类似数据集</a:t>
             </a:r>
             <a:r>
@@ -7131,6 +7336,542 @@
 </file>
 
 <file path=ppt/slides/slide2.xml><?xml version="1.0" encoding="utf-8"?>
+<p:sld xmlns:a="http://schemas.openxmlformats.org/drawingml/2006/main" xmlns:r="http://schemas.openxmlformats.org/officeDocument/2006/relationships" xmlns:p="http://schemas.openxmlformats.org/presentationml/2006/main">
+  <p:cSld>
+    <p:spTree>
+      <p:nvGrpSpPr>
+        <p:cNvPr id="1" name=""/>
+        <p:cNvGrpSpPr/>
+        <p:nvPr/>
+      </p:nvGrpSpPr>
+      <p:grpSpPr>
+        <a:xfrm>
+          <a:off x="0" y="0"/>
+          <a:ext cx="0" cy="0"/>
+          <a:chOff x="0" y="0"/>
+          <a:chExt cx="0" cy="0"/>
+        </a:xfrm>
+      </p:grpSpPr>
+      <p:sp>
+        <p:nvSpPr>
+          <p:cNvPr id="2" name="文本框 1"/>
+          <p:cNvSpPr txBox="1"/>
+          <p:nvPr/>
+        </p:nvSpPr>
+        <p:spPr>
+          <a:xfrm>
+            <a:off x="599090" y="302697"/>
+            <a:ext cx="5988685" cy="583565"/>
+          </a:xfrm>
+          <a:prstGeom prst="rect">
+            <a:avLst/>
+          </a:prstGeom>
+          <a:noFill/>
+        </p:spPr>
+        <p:txBody>
+          <a:bodyPr wrap="none" rtlCol="0">
+            <a:spAutoFit/>
+          </a:bodyPr>
+          <a:lstStyle/>
+          <a:p>
+            <a:r>
+              <a:rPr lang="zh-CN" altLang="en-US" sz="3200" dirty="0"/>
+              <a:t>本周记录：</a:t>
+            </a:r>
+            <a:r>
+              <a:rPr lang="zh-CN" altLang="en-US" sz="3200" dirty="0">
+                <a:sym typeface="+mn-ea"/>
+              </a:rPr>
+              <a:t>2025</a:t>
+            </a:r>
+            <a:r>
+              <a:rPr lang="en-US" altLang="zh-CN" sz="3200" dirty="0">
+                <a:sym typeface="+mn-ea"/>
+              </a:rPr>
+              <a:t>1113</a:t>
+            </a:r>
+            <a:r>
+              <a:rPr lang="zh-CN" altLang="en-US" sz="3200" dirty="0">
+                <a:sym typeface="+mn-ea"/>
+              </a:rPr>
+              <a:t> 会议纪要 </a:t>
+            </a:r>
+            <a:r>
+              <a:rPr lang="en-US" altLang="zh-CN" sz="3200" dirty="0">
+                <a:sym typeface="+mn-ea"/>
+              </a:rPr>
+              <a:t>7</a:t>
+            </a:r>
+            <a:endParaRPr lang="en-US" altLang="zh-CN" sz="3200" dirty="0">
+              <a:sym typeface="+mn-ea"/>
+            </a:endParaRPr>
+          </a:p>
+        </p:txBody>
+      </p:sp>
+      <p:sp>
+        <p:nvSpPr>
+          <p:cNvPr id="4" name="文本框 3"/>
+          <p:cNvSpPr txBox="1"/>
+          <p:nvPr/>
+        </p:nvSpPr>
+        <p:spPr>
+          <a:xfrm>
+            <a:off x="186690" y="1167130"/>
+            <a:ext cx="11818620" cy="4246245"/>
+          </a:xfrm>
+          <a:prstGeom prst="rect">
+            <a:avLst/>
+          </a:prstGeom>
+          <a:noFill/>
+        </p:spPr>
+        <p:txBody>
+          <a:bodyPr wrap="square">
+            <a:spAutoFit/>
+          </a:bodyPr>
+          <a:lstStyle/>
+          <a:p>
+            <a:pPr marL="457200" indent="-457200" algn="l">
+              <a:lnSpc>
+                <a:spcPct val="150000"/>
+              </a:lnSpc>
+              <a:buAutoNum type="arabicPeriod"/>
+            </a:pPr>
+            <a:r>
+              <a:rPr lang="zh-CN" altLang="en-US" sz="2000" dirty="0">
+                <a:sym typeface="+mn-ea"/>
+              </a:rPr>
+              <a:t>优化</a:t>
+            </a:r>
+            <a:r>
+              <a:rPr lang="en-US" altLang="zh-CN" sz="2000" dirty="0">
+                <a:sym typeface="+mn-ea"/>
+              </a:rPr>
+              <a:t>cot</a:t>
+            </a:r>
+            <a:r>
+              <a:rPr lang="zh-CN" altLang="en-US" sz="2000" dirty="0">
+                <a:sym typeface="+mn-ea"/>
+              </a:rPr>
+              <a:t>语言结构，做了中英可选切换重构；迁移并接入了目前的</a:t>
+            </a:r>
+            <a:r>
+              <a:rPr lang="en-US" altLang="zh-CN" sz="2000" dirty="0">
+                <a:sym typeface="+mn-ea"/>
+              </a:rPr>
+              <a:t>cot</a:t>
+            </a:r>
+            <a:r>
+              <a:rPr lang="zh-CN" altLang="en-US" sz="2000" dirty="0">
+                <a:sym typeface="+mn-ea"/>
+              </a:rPr>
+              <a:t>生成框架到数据集增广架构；生产了</a:t>
+            </a:r>
+            <a:r>
+              <a:rPr lang="en-US" altLang="zh-CN" sz="2000" dirty="0">
+                <a:sym typeface="+mn-ea"/>
+              </a:rPr>
+              <a:t>500</a:t>
+            </a:r>
+            <a:r>
+              <a:rPr lang="zh-CN" altLang="en-US" sz="2000" dirty="0">
+                <a:sym typeface="+mn-ea"/>
+              </a:rPr>
+              <a:t>个新的粗糙的带</a:t>
+            </a:r>
+            <a:r>
+              <a:rPr lang="en-US" altLang="zh-CN" sz="2000" dirty="0">
+                <a:sym typeface="+mn-ea"/>
+              </a:rPr>
+              <a:t>cot</a:t>
+            </a:r>
+            <a:r>
+              <a:rPr lang="zh-CN" altLang="en-US" sz="2000" dirty="0">
+                <a:sym typeface="+mn-ea"/>
+              </a:rPr>
+              <a:t>的</a:t>
+            </a:r>
+            <a:r>
+              <a:rPr lang="en-US" altLang="zh-CN" sz="2000" dirty="0">
+                <a:sym typeface="+mn-ea"/>
+              </a:rPr>
+              <a:t>python</a:t>
+            </a:r>
+            <a:r>
+              <a:rPr lang="zh-CN" altLang="en-US" sz="2000" dirty="0">
+                <a:sym typeface="+mn-ea"/>
+              </a:rPr>
+              <a:t>数据集</a:t>
+            </a:r>
+            <a:endParaRPr lang="zh-CN" altLang="en-US" sz="2000" dirty="0">
+              <a:sym typeface="+mn-ea"/>
+            </a:endParaRPr>
+          </a:p>
+          <a:p>
+            <a:pPr marL="457200" indent="-457200" algn="l">
+              <a:lnSpc>
+                <a:spcPct val="150000"/>
+              </a:lnSpc>
+              <a:buAutoNum type="arabicPeriod"/>
+            </a:pPr>
+            <a:r>
+              <a:rPr lang="zh-CN" altLang="en-US" sz="2000" dirty="0">
+                <a:sym typeface="+mn-ea"/>
+              </a:rPr>
+              <a:t>尝试在独立</a:t>
+            </a:r>
+            <a:r>
+              <a:rPr lang="en-US" altLang="zh-CN" sz="2000" dirty="0">
+                <a:sym typeface="+mn-ea"/>
+              </a:rPr>
+              <a:t>cot</a:t>
+            </a:r>
+            <a:r>
+              <a:rPr lang="zh-CN" altLang="en-US" sz="2000" dirty="0">
+                <a:sym typeface="+mn-ea"/>
+              </a:rPr>
+              <a:t>项目里实现了</a:t>
+            </a:r>
+            <a:r>
+              <a:rPr lang="en-US" altLang="zh-CN" sz="2000" dirty="0">
+                <a:sym typeface="+mn-ea"/>
+              </a:rPr>
+              <a:t>ai+</a:t>
+            </a:r>
+            <a:r>
+              <a:rPr lang="zh-CN" altLang="en-US" sz="2000" dirty="0">
+                <a:sym typeface="+mn-ea"/>
+              </a:rPr>
+              <a:t>倒叙</a:t>
+            </a:r>
+            <a:r>
+              <a:rPr lang="en-US" altLang="zh-CN" sz="2000" dirty="0">
+                <a:sym typeface="+mn-ea"/>
+              </a:rPr>
+              <a:t>cot</a:t>
+            </a:r>
+            <a:r>
+              <a:rPr lang="zh-CN" altLang="en-US" sz="2000" dirty="0">
+                <a:sym typeface="+mn-ea"/>
+              </a:rPr>
+              <a:t>的能力</a:t>
+            </a:r>
+            <a:endParaRPr lang="zh-CN" altLang="en-US" sz="2000" dirty="0">
+              <a:sym typeface="+mn-ea"/>
+            </a:endParaRPr>
+          </a:p>
+          <a:p>
+            <a:pPr marL="457200" indent="-457200" algn="l">
+              <a:lnSpc>
+                <a:spcPct val="150000"/>
+              </a:lnSpc>
+              <a:buAutoNum type="arabicPeriod"/>
+            </a:pPr>
+            <a:r>
+              <a:rPr lang="zh-CN" altLang="en-US" sz="2000" dirty="0">
+                <a:sym typeface="+mn-ea"/>
+              </a:rPr>
+              <a:t>分享了一个和我们思路相近的一个工作：</a:t>
+            </a:r>
+            <a:r>
+              <a:rPr lang="en-US" altLang="zh-CN" sz="2000" dirty="0">
+                <a:sym typeface="+mn-ea"/>
+              </a:rPr>
+              <a:t>code+</a:t>
+            </a:r>
+            <a:r>
+              <a:rPr lang="zh-CN" altLang="en-US" sz="2000" dirty="0">
+                <a:sym typeface="+mn-ea"/>
+              </a:rPr>
+              <a:t>执行轨迹</a:t>
+            </a:r>
+            <a:r>
+              <a:rPr lang="en-US" altLang="zh-CN" sz="2000" dirty="0">
+                <a:sym typeface="+mn-ea"/>
+              </a:rPr>
+              <a:t>—&gt;AI—&gt;</a:t>
+            </a:r>
+            <a:r>
+              <a:rPr lang="zh-CN" altLang="en-US" sz="2000" dirty="0">
+                <a:sym typeface="+mn-ea"/>
+              </a:rPr>
+              <a:t>自然语言</a:t>
+            </a:r>
+            <a:r>
+              <a:rPr lang="en-US" altLang="zh-CN" sz="2000" dirty="0">
+                <a:sym typeface="+mn-ea"/>
+              </a:rPr>
+              <a:t>cot</a:t>
+            </a:r>
+            <a:endParaRPr lang="en-US" altLang="zh-CN" sz="2000" dirty="0">
+              <a:sym typeface="+mn-ea"/>
+            </a:endParaRPr>
+          </a:p>
+          <a:p>
+            <a:pPr marL="457200" indent="-457200" algn="l">
+              <a:lnSpc>
+                <a:spcPct val="150000"/>
+              </a:lnSpc>
+              <a:buAutoNum type="arabicPeriod"/>
+            </a:pPr>
+            <a:r>
+              <a:rPr lang="zh-CN" altLang="en-US" sz="2000" dirty="0">
+                <a:sym typeface="+mn-ea"/>
+              </a:rPr>
+              <a:t>框架迁移的时候有的功能没耦合好，</a:t>
+            </a:r>
+            <a:r>
+              <a:rPr lang="zh-CN" altLang="en-US" sz="2000" dirty="0">
+                <a:sym typeface="+mn-ea"/>
+              </a:rPr>
+              <a:t>本周再优化；并逐个例子做细节优化</a:t>
+            </a:r>
+            <a:endParaRPr lang="zh-CN" altLang="en-US" sz="2000" b="0" dirty="0">
+              <a:solidFill>
+                <a:schemeClr val="tx1"/>
+              </a:solidFill>
+            </a:endParaRPr>
+          </a:p>
+          <a:p>
+            <a:pPr marL="457200" indent="-457200" algn="l">
+              <a:lnSpc>
+                <a:spcPct val="150000"/>
+              </a:lnSpc>
+              <a:buAutoNum type="arabicPeriod"/>
+            </a:pPr>
+            <a:r>
+              <a:rPr lang="zh-CN" altLang="en-US" sz="2000" dirty="0">
+                <a:sym typeface="+mn-ea"/>
+              </a:rPr>
+              <a:t>重构</a:t>
+            </a:r>
+            <a:r>
+              <a:rPr lang="en-US" altLang="zh-CN" sz="2000" dirty="0">
+                <a:sym typeface="+mn-ea"/>
+              </a:rPr>
+              <a:t>SURGE</a:t>
+            </a:r>
+            <a:r>
+              <a:rPr lang="zh-CN" altLang="en-US" sz="2000" dirty="0">
+                <a:sym typeface="+mn-ea"/>
+              </a:rPr>
+              <a:t>评估</a:t>
+            </a:r>
+            <a:r>
+              <a:rPr lang="zh-CN" altLang="en-US" sz="2000" dirty="0">
+                <a:sym typeface="+mn-ea"/>
+              </a:rPr>
+              <a:t>代码，对</a:t>
+            </a:r>
+            <a:r>
+              <a:rPr lang="zh-CN" altLang="en-US" sz="2000" dirty="0">
+                <a:sym typeface="+mn-ea"/>
+              </a:rPr>
+              <a:t>粗糙的带</a:t>
+            </a:r>
+            <a:r>
+              <a:rPr lang="en-US" altLang="zh-CN" sz="2000" dirty="0">
+                <a:sym typeface="+mn-ea"/>
+              </a:rPr>
+              <a:t>cot</a:t>
+            </a:r>
+            <a:r>
+              <a:rPr lang="zh-CN" altLang="en-US" sz="2000" dirty="0">
+                <a:sym typeface="+mn-ea"/>
+              </a:rPr>
+              <a:t>的</a:t>
+            </a:r>
+            <a:r>
+              <a:rPr lang="en-US" altLang="zh-CN" sz="2000" dirty="0">
+                <a:sym typeface="+mn-ea"/>
+              </a:rPr>
+              <a:t>python</a:t>
+            </a:r>
+            <a:r>
+              <a:rPr lang="zh-CN" altLang="en-US" sz="2000" dirty="0">
+                <a:sym typeface="+mn-ea"/>
+              </a:rPr>
+              <a:t>数据集进行评估，发现效果与直接</a:t>
+            </a:r>
+            <a:r>
+              <a:rPr lang="en-US" altLang="zh-CN" sz="2000" dirty="0">
+                <a:sym typeface="+mn-ea"/>
+              </a:rPr>
+              <a:t>ai-cot</a:t>
+            </a:r>
+            <a:r>
+              <a:rPr lang="zh-CN" altLang="en-US" sz="2000" dirty="0">
+                <a:sym typeface="+mn-ea"/>
+              </a:rPr>
+              <a:t>差不多</a:t>
+            </a:r>
+            <a:endParaRPr lang="zh-CN" altLang="en-US" sz="2000" dirty="0">
+              <a:sym typeface="+mn-ea"/>
+            </a:endParaRPr>
+          </a:p>
+          <a:p>
+            <a:pPr marL="457200" indent="-457200" algn="l">
+              <a:lnSpc>
+                <a:spcPct val="150000"/>
+              </a:lnSpc>
+              <a:buAutoNum type="arabicPeriod"/>
+            </a:pPr>
+            <a:r>
+              <a:rPr lang="zh-CN" altLang="en-US" sz="2000" dirty="0">
+                <a:sym typeface="+mn-ea"/>
+              </a:rPr>
+              <a:t>分享两个新的评估基准：</a:t>
+            </a:r>
+            <a:r>
+              <a:rPr lang="en-US" altLang="zh-CN" sz="2000" dirty="0">
+                <a:sym typeface="+mn-ea"/>
+              </a:rPr>
+              <a:t>CRUXEval-X</a:t>
+            </a:r>
+            <a:r>
+              <a:rPr lang="zh-CN" altLang="en-US" sz="2000" dirty="0">
+                <a:sym typeface="+mn-ea"/>
+              </a:rPr>
+              <a:t>和</a:t>
+            </a:r>
+            <a:r>
+              <a:rPr lang="en-US" altLang="zh-CN" sz="2000" dirty="0">
+                <a:sym typeface="+mn-ea"/>
+              </a:rPr>
+              <a:t>CoRe</a:t>
+            </a:r>
+            <a:r>
+              <a:rPr lang="zh-CN" altLang="en-US" sz="2000" dirty="0">
+                <a:sym typeface="+mn-ea"/>
+              </a:rPr>
+              <a:t>（分析</a:t>
+            </a:r>
+            <a:r>
+              <a:rPr lang="zh-CN" altLang="en-US" sz="2000" dirty="0">
+                <a:sym typeface="+mn-ea"/>
+              </a:rPr>
+              <a:t>信息流）</a:t>
+            </a:r>
+            <a:endParaRPr lang="zh-CN" altLang="en-US" sz="2000" dirty="0">
+              <a:sym typeface="+mn-ea"/>
+            </a:endParaRPr>
+          </a:p>
+          <a:p>
+            <a:pPr marL="457200" indent="-457200" algn="l">
+              <a:lnSpc>
+                <a:spcPct val="150000"/>
+              </a:lnSpc>
+              <a:buAutoNum type="arabicPeriod"/>
+            </a:pPr>
+            <a:r>
+              <a:rPr lang="zh-CN" altLang="en-US" sz="2000" dirty="0">
+                <a:sym typeface="+mn-ea"/>
+              </a:rPr>
+              <a:t>本周尝试产出三类</a:t>
+            </a:r>
+            <a:r>
+              <a:rPr lang="en-US" altLang="zh-CN" sz="2000" dirty="0">
+                <a:sym typeface="+mn-ea"/>
+              </a:rPr>
+              <a:t>cot</a:t>
+            </a:r>
+            <a:r>
+              <a:rPr lang="zh-CN" altLang="en-US" sz="2000" dirty="0">
+                <a:sym typeface="+mn-ea"/>
+              </a:rPr>
+              <a:t>的数据集：</a:t>
+            </a:r>
+            <a:r>
+              <a:rPr lang="en-US" altLang="zh-CN" sz="2000" dirty="0">
+                <a:sym typeface="+mn-ea"/>
+              </a:rPr>
+              <a:t>simple-ai</a:t>
+            </a:r>
+            <a:r>
+              <a:rPr lang="zh-CN" altLang="en-US" sz="2000" dirty="0">
+                <a:sym typeface="+mn-ea"/>
+              </a:rPr>
+              <a:t>；</a:t>
+            </a:r>
+            <a:r>
+              <a:rPr lang="en-US" altLang="zh-CN" sz="2000" dirty="0">
+                <a:sym typeface="+mn-ea"/>
+              </a:rPr>
+              <a:t>reduced-format</a:t>
+            </a:r>
+            <a:r>
+              <a:rPr lang="zh-CN" altLang="en-US" sz="2000" dirty="0">
+                <a:sym typeface="+mn-ea"/>
+              </a:rPr>
+              <a:t>；</a:t>
+            </a:r>
+            <a:r>
+              <a:rPr lang="en-US" altLang="zh-CN" sz="2000" dirty="0">
+                <a:sym typeface="+mn-ea"/>
+              </a:rPr>
+              <a:t>reduced-natural</a:t>
+            </a:r>
+            <a:r>
+              <a:rPr lang="zh-CN" altLang="en-US" sz="2000" dirty="0">
+                <a:sym typeface="+mn-ea"/>
+              </a:rPr>
+              <a:t>。且</a:t>
+            </a:r>
+            <a:r>
+              <a:rPr lang="zh-CN" altLang="en-US" sz="2000" dirty="0">
+                <a:sym typeface="+mn-ea"/>
+              </a:rPr>
+              <a:t>足量</a:t>
+            </a:r>
+            <a:endParaRPr lang="zh-CN" altLang="en-US" sz="2000" dirty="0">
+              <a:sym typeface="+mn-ea"/>
+            </a:endParaRPr>
+          </a:p>
+          <a:p>
+            <a:pPr marL="457200" indent="-457200" algn="l">
+              <a:lnSpc>
+                <a:spcPct val="150000"/>
+              </a:lnSpc>
+              <a:buAutoNum type="arabicPeriod"/>
+            </a:pPr>
+            <a:r>
+              <a:rPr lang="zh-CN" altLang="en-US" sz="2000" dirty="0">
+                <a:sym typeface="+mn-ea"/>
+              </a:rPr>
+              <a:t>本周尝试跑通</a:t>
+            </a:r>
+            <a:r>
+              <a:rPr lang="en-US" altLang="zh-CN" sz="2000" dirty="0">
+                <a:sym typeface="+mn-ea"/>
+              </a:rPr>
+              <a:t>CoRe</a:t>
+            </a:r>
+            <a:r>
+              <a:rPr lang="zh-CN" altLang="en-US" sz="2000" dirty="0">
+                <a:sym typeface="+mn-ea"/>
+              </a:rPr>
+              <a:t>评估基准，并用新的训练数据进行</a:t>
+            </a:r>
+            <a:r>
+              <a:rPr lang="zh-CN" altLang="en-US" sz="2000" dirty="0">
+                <a:sym typeface="+mn-ea"/>
+              </a:rPr>
+              <a:t>微调</a:t>
+            </a:r>
+            <a:endParaRPr lang="zh-CN" altLang="en-US" sz="2000" dirty="0">
+              <a:sym typeface="+mn-ea"/>
+            </a:endParaRPr>
+          </a:p>
+        </p:txBody>
+      </p:sp>
+    </p:spTree>
+  </p:cSld>
+  <p:clrMapOvr>
+    <a:masterClrMapping/>
+  </p:clrMapOvr>
+</p:sld>
+</file>
+
+<file path=ppt/slides/slide3.xml><?xml version="1.0" encoding="utf-8"?>
 <p:sld xmlns:a="http://schemas.openxmlformats.org/drawingml/2006/main" xmlns:r="http://schemas.openxmlformats.org/officeDocument/2006/relationships" xmlns:p="http://schemas.openxmlformats.org/presentationml/2006/main">
   <p:cSld>
     <p:spTree>
@@ -8073,7 +8814,7 @@
 </p:sld>
 </file>
 
-<file path=ppt/slides/slide3.xml><?xml version="1.0" encoding="utf-8"?>
+<file path=ppt/slides/slide4.xml><?xml version="1.0" encoding="utf-8"?>
 <p:sld xmlns:a="http://schemas.openxmlformats.org/drawingml/2006/main" xmlns:r="http://schemas.openxmlformats.org/officeDocument/2006/relationships" xmlns:p="http://schemas.openxmlformats.org/presentationml/2006/main">
   <p:cSld>
     <p:spTree>
@@ -8415,7 +9156,7 @@
 </p:sld>
 </file>
 
-<file path=ppt/slides/slide4.xml><?xml version="1.0" encoding="utf-8"?>
+<file path=ppt/slides/slide5.xml><?xml version="1.0" encoding="utf-8"?>
 <p:sld xmlns:a="http://schemas.openxmlformats.org/drawingml/2006/main" xmlns:r="http://schemas.openxmlformats.org/officeDocument/2006/relationships" xmlns:p="http://schemas.openxmlformats.org/presentationml/2006/main">
   <p:cSld>
     <p:spTree>
@@ -8741,7 +9482,7 @@
 </p:sld>
 </file>
 
-<file path=ppt/slides/slide5.xml><?xml version="1.0" encoding="utf-8"?>
+<file path=ppt/slides/slide6.xml><?xml version="1.0" encoding="utf-8"?>
 <p:sld xmlns:a="http://schemas.openxmlformats.org/drawingml/2006/main" xmlns:r="http://schemas.openxmlformats.org/officeDocument/2006/relationships" xmlns:p="http://schemas.openxmlformats.org/presentationml/2006/main">
   <p:cSld>
     <p:spTree>
@@ -9913,180 +10654,6 @@
 </p:sld>
 </file>
 
-<file path=ppt/slides/slide6.xml><?xml version="1.0" encoding="utf-8"?>
-<p:sld xmlns:a="http://schemas.openxmlformats.org/drawingml/2006/main" xmlns:r="http://schemas.openxmlformats.org/officeDocument/2006/relationships" xmlns:p="http://schemas.openxmlformats.org/presentationml/2006/main">
-  <p:cSld>
-    <p:spTree>
-      <p:nvGrpSpPr>
-        <p:cNvPr id="1" name=""/>
-        <p:cNvGrpSpPr/>
-        <p:nvPr/>
-      </p:nvGrpSpPr>
-      <p:grpSpPr>
-        <a:xfrm>
-          <a:off x="0" y="0"/>
-          <a:ext cx="0" cy="0"/>
-          <a:chOff x="0" y="0"/>
-          <a:chExt cx="0" cy="0"/>
-        </a:xfrm>
-      </p:grpSpPr>
-      <p:sp>
-        <p:nvSpPr>
-          <p:cNvPr id="2" name="文本框 1"/>
-          <p:cNvSpPr txBox="1"/>
-          <p:nvPr/>
-        </p:nvSpPr>
-        <p:spPr>
-          <a:xfrm>
-            <a:off x="344805" y="302895"/>
-            <a:ext cx="10258425" cy="460375"/>
-          </a:xfrm>
-          <a:prstGeom prst="rect">
-            <a:avLst/>
-          </a:prstGeom>
-          <a:noFill/>
-        </p:spPr>
-        <p:txBody>
-          <a:bodyPr wrap="square" rtlCol="0">
-            <a:spAutoFit/>
-          </a:bodyPr>
-          <a:lstStyle/>
-          <a:p>
-            <a:pPr algn="l"/>
-            <a:r>
-              <a:rPr lang="zh-CN" altLang="en-US" sz="2400" dirty="0"/>
-              <a:t>进展分享三：</a:t>
-            </a:r>
-            <a:r>
-              <a:rPr lang="zh-CN" altLang="en-US" sz="2400" dirty="0">
-                <a:sym typeface="+mn-ea"/>
-              </a:rPr>
-              <a:t>生产了</a:t>
-            </a:r>
-            <a:r>
-              <a:rPr lang="en-US" altLang="zh-CN" sz="2400" dirty="0">
-                <a:sym typeface="+mn-ea"/>
-              </a:rPr>
-              <a:t>500</a:t>
-            </a:r>
-            <a:r>
-              <a:rPr lang="zh-CN" altLang="en-US" sz="2400" dirty="0">
-                <a:sym typeface="+mn-ea"/>
-              </a:rPr>
-              <a:t>个新的粗糙的带</a:t>
-            </a:r>
-            <a:r>
-              <a:rPr lang="en-US" altLang="zh-CN" sz="2400" dirty="0">
-                <a:sym typeface="+mn-ea"/>
-              </a:rPr>
-              <a:t>cot</a:t>
-            </a:r>
-            <a:r>
-              <a:rPr lang="zh-CN" altLang="en-US" sz="2400" dirty="0">
-                <a:sym typeface="+mn-ea"/>
-              </a:rPr>
-              <a:t>的</a:t>
-            </a:r>
-            <a:r>
-              <a:rPr lang="en-US" altLang="zh-CN" sz="2400" dirty="0">
-                <a:sym typeface="+mn-ea"/>
-              </a:rPr>
-              <a:t>python</a:t>
-            </a:r>
-            <a:r>
-              <a:rPr lang="zh-CN" altLang="en-US" sz="2400" dirty="0">
-                <a:sym typeface="+mn-ea"/>
-              </a:rPr>
-              <a:t>数据集</a:t>
-            </a:r>
-            <a:endParaRPr lang="zh-CN" altLang="en-US" sz="2400" dirty="0">
-              <a:sym typeface="+mn-ea"/>
-            </a:endParaRPr>
-          </a:p>
-        </p:txBody>
-      </p:sp>
-      <p:sp>
-        <p:nvSpPr>
-          <p:cNvPr id="4" name="文本框 3"/>
-          <p:cNvSpPr txBox="1"/>
-          <p:nvPr/>
-        </p:nvSpPr>
-        <p:spPr>
-          <a:xfrm>
-            <a:off x="532130" y="945515"/>
-            <a:ext cx="10253980" cy="506730"/>
-          </a:xfrm>
-          <a:prstGeom prst="rect">
-            <a:avLst/>
-          </a:prstGeom>
-          <a:noFill/>
-        </p:spPr>
-        <p:txBody>
-          <a:bodyPr wrap="square" rtlCol="0">
-            <a:spAutoFit/>
-          </a:bodyPr>
-          <a:p>
-            <a:pPr>
-              <a:lnSpc>
-                <a:spcPct val="150000"/>
-              </a:lnSpc>
-            </a:pPr>
-            <a:r>
-              <a:rPr lang="zh-CN" altLang="en-US"/>
-              <a:t>重新生成了：【可运行】的【带正确答案】的【带</a:t>
-            </a:r>
-            <a:r>
-              <a:rPr lang="en-US" altLang="zh-CN"/>
-              <a:t>cot</a:t>
-            </a:r>
-            <a:r>
-              <a:rPr lang="zh-CN" altLang="en-US"/>
-              <a:t>】的【高难度】数据集</a:t>
-            </a:r>
-            <a:r>
-              <a:rPr lang="en-US" altLang="zh-CN"/>
-              <a:t>500</a:t>
-            </a:r>
-            <a:r>
-              <a:rPr lang="zh-CN" altLang="en-US"/>
-              <a:t>条</a:t>
-            </a:r>
-            <a:endParaRPr lang="zh-CN" altLang="en-US"/>
-          </a:p>
-        </p:txBody>
-      </p:sp>
-      <p:pic>
-        <p:nvPicPr>
-          <p:cNvPr id="3" name="图片 2"/>
-          <p:cNvPicPr>
-            <a:picLocks noChangeAspect="1"/>
-          </p:cNvPicPr>
-          <p:nvPr/>
-        </p:nvPicPr>
-        <p:blipFill>
-          <a:blip r:embed="rId1"/>
-          <a:stretch>
-            <a:fillRect/>
-          </a:stretch>
-        </p:blipFill>
-        <p:spPr>
-          <a:xfrm>
-            <a:off x="532130" y="1634490"/>
-            <a:ext cx="9236710" cy="4553585"/>
-          </a:xfrm>
-          <a:prstGeom prst="rect">
-            <a:avLst/>
-          </a:prstGeom>
-        </p:spPr>
-      </p:pic>
-    </p:spTree>
-  </p:cSld>
-  <p:clrMapOvr>
-    <a:masterClrMapping/>
-  </p:clrMapOvr>
-</p:sld>
-</file>
-
 <file path=ppt/slides/slide7.xml><?xml version="1.0" encoding="utf-8"?>
 <p:sld xmlns:a="http://schemas.openxmlformats.org/drawingml/2006/main" xmlns:r="http://schemas.openxmlformats.org/officeDocument/2006/relationships" xmlns:p="http://schemas.openxmlformats.org/presentationml/2006/main">
   <p:cSld>
@@ -10231,7 +10798,7 @@
       </p:sp>
       <p:pic>
         <p:nvPicPr>
-          <p:cNvPr id="5" name="图片 4"/>
+          <p:cNvPr id="3" name="图片 2"/>
           <p:cNvPicPr>
             <a:picLocks noChangeAspect="1"/>
           </p:cNvPicPr>
@@ -10245,84 +10812,14 @@
         </p:blipFill>
         <p:spPr>
           <a:xfrm>
-            <a:off x="1030605" y="1564005"/>
-            <a:ext cx="4895215" cy="5151120"/>
+            <a:off x="532130" y="1634490"/>
+            <a:ext cx="9236710" cy="4553585"/>
           </a:xfrm>
           <a:prstGeom prst="rect">
             <a:avLst/>
           </a:prstGeom>
         </p:spPr>
       </p:pic>
-      <p:sp>
-        <p:nvSpPr>
-          <p:cNvPr id="6" name="文本框 5"/>
-          <p:cNvSpPr txBox="1"/>
-          <p:nvPr/>
-        </p:nvSpPr>
-        <p:spPr>
-          <a:xfrm>
-            <a:off x="6096000" y="2573020"/>
-            <a:ext cx="4064000" cy="1198880"/>
-          </a:xfrm>
-          <a:prstGeom prst="rect">
-            <a:avLst/>
-          </a:prstGeom>
-          <a:noFill/>
-        </p:spPr>
-        <p:txBody>
-          <a:bodyPr wrap="square" rtlCol="0">
-            <a:spAutoFit/>
-          </a:bodyPr>
-          <a:p>
-            <a:pPr>
-              <a:lnSpc>
-                <a:spcPct val="200000"/>
-              </a:lnSpc>
-            </a:pPr>
-            <a:r>
-              <a:rPr lang="en-US" altLang="zh-CN"/>
-              <a:t>AI</a:t>
-            </a:r>
-            <a:r>
-              <a:rPr lang="zh-CN" altLang="en-US"/>
-              <a:t>评估</a:t>
-            </a:r>
-            <a:r>
-              <a:rPr lang="zh-CN" altLang="en-US"/>
-              <a:t>结果：</a:t>
-            </a:r>
-            <a:endParaRPr lang="zh-CN" altLang="en-US"/>
-          </a:p>
-          <a:p>
-            <a:pPr>
-              <a:lnSpc>
-                <a:spcPct val="200000"/>
-              </a:lnSpc>
-            </a:pPr>
-            <a:r>
-              <a:rPr lang="zh-CN" altLang="en-US"/>
-              <a:t>常用</a:t>
-            </a:r>
-            <a:r>
-              <a:rPr lang="en-US" altLang="zh-CN"/>
-              <a:t>ai</a:t>
-            </a:r>
-            <a:r>
-              <a:rPr lang="zh-CN" altLang="en-US"/>
-              <a:t>的正确率大概是</a:t>
-            </a:r>
-            <a:r>
-              <a:rPr lang="en-US" altLang="zh-CN"/>
-              <a:t>15%</a:t>
-            </a:r>
-            <a:r>
-              <a:rPr lang="zh-CN" altLang="en-US"/>
-              <a:t>左右</a:t>
-            </a:r>
-            <a:endParaRPr lang="zh-CN" altLang="en-US"/>
-          </a:p>
-        </p:txBody>
-      </p:sp>
     </p:spTree>
   </p:cSld>
   <p:clrMapOvr>
@@ -10423,9 +10920,59 @@
           </a:p>
         </p:txBody>
       </p:sp>
+      <p:sp>
+        <p:nvSpPr>
+          <p:cNvPr id="4" name="文本框 3"/>
+          <p:cNvSpPr txBox="1"/>
+          <p:nvPr/>
+        </p:nvSpPr>
+        <p:spPr>
+          <a:xfrm>
+            <a:off x="532130" y="945515"/>
+            <a:ext cx="10253980" cy="506730"/>
+          </a:xfrm>
+          <a:prstGeom prst="rect">
+            <a:avLst/>
+          </a:prstGeom>
+          <a:noFill/>
+        </p:spPr>
+        <p:txBody>
+          <a:bodyPr wrap="square" rtlCol="0">
+            <a:spAutoFit/>
+          </a:bodyPr>
+          <a:p>
+            <a:pPr>
+              <a:lnSpc>
+                <a:spcPct val="150000"/>
+              </a:lnSpc>
+            </a:pPr>
+            <a:r>
+              <a:rPr lang="zh-CN" altLang="en-US"/>
+              <a:t>重新生成了：【可运行】的【带正确答案】的【带</a:t>
+            </a:r>
+            <a:r>
+              <a:rPr lang="en-US" altLang="zh-CN"/>
+              <a:t>cot</a:t>
+            </a:r>
+            <a:r>
+              <a:rPr lang="zh-CN" altLang="en-US"/>
+              <a:t>】的【高难度】数据集</a:t>
+            </a:r>
+            <a:r>
+              <a:rPr lang="en-US" altLang="zh-CN"/>
+              <a:t>500</a:t>
+            </a:r>
+            <a:r>
+              <a:rPr lang="zh-CN" altLang="en-US"/>
+              <a:t>条</a:t>
+            </a:r>
+            <a:endParaRPr lang="zh-CN" altLang="en-US"/>
+          </a:p>
+        </p:txBody>
+      </p:sp>
       <p:pic>
         <p:nvPicPr>
-          <p:cNvPr id="7" name="图片 6"/>
+          <p:cNvPr id="5" name="图片 4"/>
           <p:cNvPicPr>
             <a:picLocks noChangeAspect="1"/>
           </p:cNvPicPr>
@@ -10439,48 +10986,24 @@
         </p:blipFill>
         <p:spPr>
           <a:xfrm>
-            <a:off x="109855" y="1031875"/>
-            <a:ext cx="5582285" cy="5791200"/>
+            <a:off x="1030605" y="1564005"/>
+            <a:ext cx="4895215" cy="5151120"/>
           </a:xfrm>
           <a:prstGeom prst="rect">
             <a:avLst/>
           </a:prstGeom>
         </p:spPr>
       </p:pic>
-      <p:pic>
-        <p:nvPicPr>
-          <p:cNvPr id="8" name="图片 7"/>
-          <p:cNvPicPr>
-            <a:picLocks noChangeAspect="1"/>
-          </p:cNvPicPr>
-          <p:nvPr/>
-        </p:nvPicPr>
-        <p:blipFill>
-          <a:blip r:embed="rId2"/>
-          <a:stretch>
-            <a:fillRect/>
-          </a:stretch>
-        </p:blipFill>
-        <p:spPr>
-          <a:xfrm>
-            <a:off x="6287135" y="1031875"/>
-            <a:ext cx="5684520" cy="5791200"/>
-          </a:xfrm>
-          <a:prstGeom prst="rect">
-            <a:avLst/>
-          </a:prstGeom>
-        </p:spPr>
-      </p:pic>
-      <p:sp>
-        <p:nvSpPr>
-          <p:cNvPr id="9" name="文本框 8"/>
+      <p:sp>
+        <p:nvSpPr>
+          <p:cNvPr id="6" name="文本框 5"/>
           <p:cNvSpPr txBox="1"/>
           <p:nvPr/>
         </p:nvSpPr>
         <p:spPr>
           <a:xfrm>
-            <a:off x="8535670" y="638810"/>
-            <a:ext cx="2834640" cy="645160"/>
+            <a:off x="6096000" y="2573020"/>
+            <a:ext cx="4064000" cy="1198880"/>
           </a:xfrm>
           <a:prstGeom prst="rect">
             <a:avLst/>
@@ -10488,7 +11011,7 @@
           <a:noFill/>
         </p:spPr>
         <p:txBody>
-          <a:bodyPr wrap="square" rtlCol="0" anchor="t">
+          <a:bodyPr wrap="square" rtlCol="0">
             <a:spAutoFit/>
           </a:bodyPr>
           <a:p>
@@ -10498,20 +11021,46 @@
               </a:lnSpc>
             </a:pPr>
             <a:r>
-              <a:rPr lang="zh-CN" altLang="en-US">
-                <a:sym typeface="+mn-ea"/>
-              </a:rPr>
-              <a:t>不太符合预期的</a:t>
-            </a:r>
-            <a:r>
-              <a:rPr lang="en-US" altLang="zh-CN">
-                <a:sym typeface="+mn-ea"/>
-              </a:rPr>
-              <a:t>cot</a:t>
-            </a:r>
-            <a:endParaRPr lang="en-US" altLang="zh-CN">
-              <a:sym typeface="+mn-ea"/>
-            </a:endParaRPr>
+              <a:rPr lang="en-US" altLang="zh-CN"/>
+              <a:t>AI</a:t>
+            </a:r>
+            <a:r>
+              <a:rPr lang="zh-CN" altLang="en-US"/>
+              <a:t>评估</a:t>
+            </a:r>
+            <a:r>
+              <a:rPr lang="zh-CN" altLang="en-US"/>
+              <a:t>结果：</a:t>
+            </a:r>
+            <a:endParaRPr lang="zh-CN" altLang="en-US"/>
+          </a:p>
+          <a:p>
+            <a:pPr>
+              <a:lnSpc>
+                <a:spcPct val="200000"/>
+              </a:lnSpc>
+            </a:pPr>
+            <a:r>
+              <a:rPr lang="zh-CN" altLang="en-US"/>
+              <a:t>常用</a:t>
+            </a:r>
+            <a:r>
+              <a:rPr lang="en-US" altLang="zh-CN"/>
+              <a:t>ai</a:t>
+            </a:r>
+            <a:r>
+              <a:rPr lang="zh-CN" altLang="en-US"/>
+              <a:t>的正确率大概是</a:t>
+            </a:r>
+            <a:r>
+              <a:rPr lang="en-US" altLang="zh-CN"/>
+              <a:t>15%</a:t>
+            </a:r>
+            <a:r>
+              <a:rPr lang="zh-CN" altLang="en-US"/>
+              <a:t>左右</a:t>
+            </a:r>
+            <a:endParaRPr lang="zh-CN" altLang="en-US"/>
           </a:p>
         </p:txBody>
       </p:sp>
@@ -10617,7 +11166,7 @@
       </p:sp>
       <p:pic>
         <p:nvPicPr>
-          <p:cNvPr id="3" name="图片 2"/>
+          <p:cNvPr id="7" name="图片 6"/>
           <p:cNvPicPr>
             <a:picLocks noChangeAspect="1"/>
           </p:cNvPicPr>
@@ -10631,8 +11180,8 @@
         </p:blipFill>
         <p:spPr>
           <a:xfrm>
-            <a:off x="274320" y="807720"/>
-            <a:ext cx="5723255" cy="5958205"/>
+            <a:off x="109855" y="1031875"/>
+            <a:ext cx="5582285" cy="5791200"/>
           </a:xfrm>
           <a:prstGeom prst="rect">
             <a:avLst/>
@@ -10641,7 +11190,7 @@
       </p:pic>
       <p:pic>
         <p:nvPicPr>
-          <p:cNvPr id="4" name="图片 3"/>
+          <p:cNvPr id="8" name="图片 7"/>
           <p:cNvPicPr>
             <a:picLocks noChangeAspect="1"/>
           </p:cNvPicPr>
@@ -10655,8 +11204,8 @@
         </p:blipFill>
         <p:spPr>
           <a:xfrm>
-            <a:off x="6093460" y="807720"/>
-            <a:ext cx="5964555" cy="4185920"/>
+            <a:off x="6287135" y="1031875"/>
+            <a:ext cx="5684520" cy="5791200"/>
           </a:xfrm>
           <a:prstGeom prst="rect">
             <a:avLst/>
@@ -10671,8 +11220,8 @@
         </p:nvSpPr>
         <p:spPr>
           <a:xfrm>
-            <a:off x="6093460" y="5288280"/>
-            <a:ext cx="5812790" cy="1198880"/>
+            <a:off x="8535670" y="638810"/>
+            <a:ext cx="2834640" cy="645160"/>
           </a:xfrm>
           <a:prstGeom prst="rect">
             <a:avLst/>
@@ -10693,7 +11242,7 @@
               <a:rPr lang="zh-CN" altLang="en-US">
                 <a:sym typeface="+mn-ea"/>
               </a:rPr>
-              <a:t>独立框架生成的</a:t>
+              <a:t>不太符合预期的</a:t>
             </a:r>
             <a:r>
               <a:rPr lang="en-US" altLang="zh-CN">
@@ -10701,19 +11250,7 @@
               </a:rPr>
               <a:t>cot</a:t>
             </a:r>
-            <a:r>
-              <a:rPr lang="zh-CN" altLang="en-US">
-                <a:sym typeface="+mn-ea"/>
-              </a:rPr>
-              <a:t>，基本符合预期，后续会把迁移工作再重</a:t>
-            </a:r>
-            <a:r>
-              <a:rPr lang="zh-CN" altLang="en-US">
-                <a:sym typeface="+mn-ea"/>
-              </a:rPr>
-              <a:t>优化</a:t>
-            </a:r>
-            <a:endParaRPr lang="zh-CN" altLang="en-US">
+            <a:endParaRPr lang="en-US" altLang="zh-CN">
               <a:sym typeface="+mn-ea"/>
             </a:endParaRPr>
           </a:p>
